--- a/presentations/pre-sales/AiOps_A_vision_of_intelligent_control.pptx
+++ b/presentations/pre-sales/AiOps_A_vision_of_intelligent_control.pptx
@@ -1,31 +1,506 @@
 
 <file path=ppt/presentation.xml><?xml version="1.0" encoding="utf-8"?>
-<p:presentation xmlns:a="http://schemas.openxmlformats.org/drawingml/2006/main" xmlns:p="http://schemas.openxmlformats.org/presentationml/2006/main" xmlns:r="http://schemas.openxmlformats.org/officeDocument/2006/relationships" xmlns:p14="http://schemas.microsoft.com/office/powerpoint/2010/main" xmlns:p15="http://schemas.microsoft.com/office/powerpoint/2012/main" xmlns:mc="http://schemas.openxmlformats.org/markup-compatibility/2006">
+<p:presentation xmlns:a="http://schemas.openxmlformats.org/drawingml/2006/main" xmlns:r="http://schemas.openxmlformats.org/officeDocument/2006/relationships" xmlns:p="http://schemas.openxmlformats.org/presentationml/2006/main">
   <p:sldMasterIdLst>
-    <p:sldMasterId id="2147483648" r:id="rId2"/>
-    <p:sldMasterId id="2147483661" r:id="rId3"/>
+    <p:sldMasterId id="2147483648" r:id="rId1"/>
+    <p:sldMasterId id="2147483661" r:id="rId2"/>
   </p:sldMasterIdLst>
   <p:notesMasterIdLst>
-    <p:notesMasterId r:id="rId4"/>
+    <p:notesMasterId r:id="rId12"/>
   </p:notesMasterIdLst>
   <p:sldIdLst>
-    <p:sldId id="256" r:id="rId5"/>
-    <p:sldId id="257" r:id="rId6"/>
-    <p:sldId id="258" r:id="rId7"/>
-    <p:sldId id="259" r:id="rId8"/>
-    <p:sldId id="260" r:id="rId9"/>
-    <p:sldId id="261" r:id="rId10"/>
-    <p:sldId id="262" r:id="rId11"/>
-    <p:sldId id="263" r:id="rId12"/>
-    <p:sldId id="264" r:id="rId13"/>
+    <p:sldId id="256" r:id="rId3"/>
+    <p:sldId id="257" r:id="rId4"/>
+    <p:sldId id="258" r:id="rId5"/>
+    <p:sldId id="259" r:id="rId6"/>
+    <p:sldId id="260" r:id="rId7"/>
+    <p:sldId id="261" r:id="rId8"/>
+    <p:sldId id="262" r:id="rId9"/>
+    <p:sldId id="263" r:id="rId10"/>
+    <p:sldId id="264" r:id="rId11"/>
   </p:sldIdLst>
   <p:sldSz cx="12192000" cy="6858000"/>
   <p:notesSz cx="6858000" cy="9144000"/>
+  <p:defaultTextStyle>
+    <a:defPPr>
+      <a:defRPr lang="en-US"/>
+    </a:defPPr>
+    <a:lvl1pPr marL="0" algn="l" defTabSz="914400" rtl="0" eaLnBrk="1" latinLnBrk="0" hangingPunct="1">
+      <a:defRPr sz="1800" kern="1200">
+        <a:solidFill>
+          <a:schemeClr val="tx1"/>
+        </a:solidFill>
+        <a:latin typeface="+mn-lt"/>
+        <a:ea typeface="+mn-ea"/>
+        <a:cs typeface="+mn-cs"/>
+      </a:defRPr>
+    </a:lvl1pPr>
+    <a:lvl2pPr marL="457200" algn="l" defTabSz="914400" rtl="0" eaLnBrk="1" latinLnBrk="0" hangingPunct="1">
+      <a:defRPr sz="1800" kern="1200">
+        <a:solidFill>
+          <a:schemeClr val="tx1"/>
+        </a:solidFill>
+        <a:latin typeface="+mn-lt"/>
+        <a:ea typeface="+mn-ea"/>
+        <a:cs typeface="+mn-cs"/>
+      </a:defRPr>
+    </a:lvl2pPr>
+    <a:lvl3pPr marL="914400" algn="l" defTabSz="914400" rtl="0" eaLnBrk="1" latinLnBrk="0" hangingPunct="1">
+      <a:defRPr sz="1800" kern="1200">
+        <a:solidFill>
+          <a:schemeClr val="tx1"/>
+        </a:solidFill>
+        <a:latin typeface="+mn-lt"/>
+        <a:ea typeface="+mn-ea"/>
+        <a:cs typeface="+mn-cs"/>
+      </a:defRPr>
+    </a:lvl3pPr>
+    <a:lvl4pPr marL="1371600" algn="l" defTabSz="914400" rtl="0" eaLnBrk="1" latinLnBrk="0" hangingPunct="1">
+      <a:defRPr sz="1800" kern="1200">
+        <a:solidFill>
+          <a:schemeClr val="tx1"/>
+        </a:solidFill>
+        <a:latin typeface="+mn-lt"/>
+        <a:ea typeface="+mn-ea"/>
+        <a:cs typeface="+mn-cs"/>
+      </a:defRPr>
+    </a:lvl4pPr>
+    <a:lvl5pPr marL="1828800" algn="l" defTabSz="914400" rtl="0" eaLnBrk="1" latinLnBrk="0" hangingPunct="1">
+      <a:defRPr sz="1800" kern="1200">
+        <a:solidFill>
+          <a:schemeClr val="tx1"/>
+        </a:solidFill>
+        <a:latin typeface="+mn-lt"/>
+        <a:ea typeface="+mn-ea"/>
+        <a:cs typeface="+mn-cs"/>
+      </a:defRPr>
+    </a:lvl5pPr>
+    <a:lvl6pPr marL="2286000" algn="l" defTabSz="914400" rtl="0" eaLnBrk="1" latinLnBrk="0" hangingPunct="1">
+      <a:defRPr sz="1800" kern="1200">
+        <a:solidFill>
+          <a:schemeClr val="tx1"/>
+        </a:solidFill>
+        <a:latin typeface="+mn-lt"/>
+        <a:ea typeface="+mn-ea"/>
+        <a:cs typeface="+mn-cs"/>
+      </a:defRPr>
+    </a:lvl6pPr>
+    <a:lvl7pPr marL="2743200" algn="l" defTabSz="914400" rtl="0" eaLnBrk="1" latinLnBrk="0" hangingPunct="1">
+      <a:defRPr sz="1800" kern="1200">
+        <a:solidFill>
+          <a:schemeClr val="tx1"/>
+        </a:solidFill>
+        <a:latin typeface="+mn-lt"/>
+        <a:ea typeface="+mn-ea"/>
+        <a:cs typeface="+mn-cs"/>
+      </a:defRPr>
+    </a:lvl7pPr>
+    <a:lvl8pPr marL="3200400" algn="l" defTabSz="914400" rtl="0" eaLnBrk="1" latinLnBrk="0" hangingPunct="1">
+      <a:defRPr sz="1800" kern="1200">
+        <a:solidFill>
+          <a:schemeClr val="tx1"/>
+        </a:solidFill>
+        <a:latin typeface="+mn-lt"/>
+        <a:ea typeface="+mn-ea"/>
+        <a:cs typeface="+mn-cs"/>
+      </a:defRPr>
+    </a:lvl8pPr>
+    <a:lvl9pPr marL="3657600" algn="l" defTabSz="914400" rtl="0" eaLnBrk="1" latinLnBrk="0" hangingPunct="1">
+      <a:defRPr sz="1800" kern="1200">
+        <a:solidFill>
+          <a:schemeClr val="tx1"/>
+        </a:solidFill>
+        <a:latin typeface="+mn-lt"/>
+        <a:ea typeface="+mn-ea"/>
+        <a:cs typeface="+mn-cs"/>
+      </a:defRPr>
+    </a:lvl9pPr>
+  </p:defaultTextStyle>
 </p:presentation>
 </file>
 
 <file path=ppt/notesMasters/notesMaster1.xml><?xml version="1.0" encoding="utf-8"?>
-<p:notesMaster xmlns:a="http://schemas.openxmlformats.org/drawingml/2006/main" xmlns:p="http://schemas.openxmlformats.org/presentationml/2006/main" xmlns:r="http://schemas.openxmlformats.org/officeDocument/2006/relationships" xmlns:p14="http://schemas.microsoft.com/office/powerpoint/2010/main" xmlns:p15="http://schemas.microsoft.com/office/powerpoint/2012/main" xmlns:mc="http://schemas.openxmlformats.org/markup-compatibility/2006">
+<p:notesMaster xmlns:a="http://schemas.openxmlformats.org/drawingml/2006/main" xmlns:r="http://schemas.openxmlformats.org/officeDocument/2006/relationships" xmlns:p="http://schemas.openxmlformats.org/presentationml/2006/main">
+  <p:cSld>
+    <p:bg>
+      <p:bgRef idx="1001">
+        <a:schemeClr val="bg1"/>
+      </p:bgRef>
+    </p:bg>
+    <p:spTree>
+      <p:nvGrpSpPr>
+        <p:cNvPr id="1" name=""/>
+        <p:cNvGrpSpPr/>
+        <p:nvPr/>
+      </p:nvGrpSpPr>
+      <p:grpSpPr>
+        <a:xfrm>
+          <a:off x="0" y="0"/>
+          <a:ext cx="0" cy="0"/>
+          <a:chOff x="0" y="0"/>
+          <a:chExt cx="0" cy="0"/>
+        </a:xfrm>
+      </p:grpSpPr>
+      <p:sp>
+        <p:nvSpPr>
+          <p:cNvPr id="82" name="PlaceHolder 1"/>
+          <p:cNvSpPr>
+            <a:spLocks noGrp="1" noRot="1" noChangeAspect="1"/>
+          </p:cNvSpPr>
+          <p:nvPr>
+            <p:ph type="sldImg"/>
+          </p:nvPr>
+        </p:nvSpPr>
+        <p:spPr>
+          <a:xfrm>
+            <a:off x="216000" y="812520"/>
+            <a:ext cx="7127280" cy="4008960"/>
+          </a:xfrm>
+          <a:prstGeom prst="rect">
+            <a:avLst/>
+          </a:prstGeom>
+          <a:noFill/>
+          <a:ln w="0">
+            <a:noFill/>
+          </a:ln>
+        </p:spPr>
+        <p:txBody>
+          <a:bodyPr lIns="0" tIns="0" rIns="0" bIns="0" anchor="ctr">
+            <a:noAutofit/>
+          </a:bodyPr>
+          <a:lstStyle/>
+          <a:p>
+            <a:pPr algn="ctr">
+              <a:buNone/>
+            </a:pPr>
+            <a:r>
+              <a:rPr lang="en-GB" sz="4400" b="0" strike="noStrike" spc="-1">
+                <a:latin typeface="Arial"/>
+              </a:rPr>
+              <a:t>Click to move the slide</a:t>
+            </a:r>
+          </a:p>
+        </p:txBody>
+      </p:sp>
+      <p:sp>
+        <p:nvSpPr>
+          <p:cNvPr id="83" name="PlaceHolder 2"/>
+          <p:cNvSpPr>
+            <a:spLocks noGrp="1"/>
+          </p:cNvSpPr>
+          <p:nvPr>
+            <p:ph type="body"/>
+          </p:nvPr>
+        </p:nvSpPr>
+        <p:spPr>
+          <a:xfrm>
+            <a:off x="756000" y="5078520"/>
+            <a:ext cx="6047640" cy="4811040"/>
+          </a:xfrm>
+          <a:prstGeom prst="rect">
+            <a:avLst/>
+          </a:prstGeom>
+          <a:noFill/>
+          <a:ln w="0">
+            <a:noFill/>
+          </a:ln>
+        </p:spPr>
+        <p:txBody>
+          <a:bodyPr lIns="0" tIns="0" rIns="0" bIns="0" anchor="t">
+            <a:noAutofit/>
+          </a:bodyPr>
+          <a:lstStyle/>
+          <a:p>
+            <a:r>
+              <a:rPr lang="en-GB" sz="2000" b="0" strike="noStrike" spc="-1">
+                <a:latin typeface="Arial"/>
+              </a:rPr>
+              <a:t>Click to edit the notes' format</a:t>
+            </a:r>
+          </a:p>
+        </p:txBody>
+      </p:sp>
+      <p:sp>
+        <p:nvSpPr>
+          <p:cNvPr id="84" name="PlaceHolder 3"/>
+          <p:cNvSpPr>
+            <a:spLocks noGrp="1"/>
+          </p:cNvSpPr>
+          <p:nvPr>
+            <p:ph type="hdr"/>
+          </p:nvPr>
+        </p:nvSpPr>
+        <p:spPr>
+          <a:xfrm>
+            <a:off x="0" y="0"/>
+            <a:ext cx="3280680" cy="534240"/>
+          </a:xfrm>
+          <a:prstGeom prst="rect">
+            <a:avLst/>
+          </a:prstGeom>
+          <a:noFill/>
+          <a:ln w="0">
+            <a:noFill/>
+          </a:ln>
+        </p:spPr>
+        <p:txBody>
+          <a:bodyPr lIns="0" tIns="0" rIns="0" bIns="0" anchor="t">
+            <a:noAutofit/>
+          </a:bodyPr>
+          <a:lstStyle/>
+          <a:p>
+            <a:r>
+              <a:rPr lang="en-GB" sz="1400" b="0" strike="noStrike" spc="-1">
+                <a:latin typeface="Times New Roman"/>
+              </a:rPr>
+              <a:t>&lt;header&gt;</a:t>
+            </a:r>
+          </a:p>
+        </p:txBody>
+      </p:sp>
+      <p:sp>
+        <p:nvSpPr>
+          <p:cNvPr id="85" name="PlaceHolder 4"/>
+          <p:cNvSpPr>
+            <a:spLocks noGrp="1"/>
+          </p:cNvSpPr>
+          <p:nvPr>
+            <p:ph type="dt" idx="1"/>
+          </p:nvPr>
+        </p:nvSpPr>
+        <p:spPr>
+          <a:xfrm>
+            <a:off x="4278960" y="0"/>
+            <a:ext cx="3280680" cy="534240"/>
+          </a:xfrm>
+          <a:prstGeom prst="rect">
+            <a:avLst/>
+          </a:prstGeom>
+          <a:noFill/>
+          <a:ln w="0">
+            <a:noFill/>
+          </a:ln>
+        </p:spPr>
+        <p:txBody>
+          <a:bodyPr lIns="0" tIns="0" rIns="0" bIns="0" anchor="t">
+            <a:noAutofit/>
+          </a:bodyPr>
+          <a:lstStyle>
+            <a:lvl1pPr algn="r">
+              <a:buNone/>
+              <a:defRPr lang="en-GB" sz="1400" b="0" strike="noStrike" spc="-1">
+                <a:latin typeface="Times New Roman"/>
+              </a:defRPr>
+            </a:lvl1pPr>
+          </a:lstStyle>
+          <a:p>
+            <a:pPr algn="r">
+              <a:buNone/>
+            </a:pPr>
+            <a:r>
+              <a:rPr lang="en-GB" sz="1400" b="0" strike="noStrike" spc="-1">
+                <a:latin typeface="Times New Roman"/>
+              </a:rPr>
+              <a:t>&lt;date/time&gt;</a:t>
+            </a:r>
+          </a:p>
+        </p:txBody>
+      </p:sp>
+      <p:sp>
+        <p:nvSpPr>
+          <p:cNvPr id="86" name="PlaceHolder 5"/>
+          <p:cNvSpPr>
+            <a:spLocks noGrp="1"/>
+          </p:cNvSpPr>
+          <p:nvPr>
+            <p:ph type="ftr" idx="2"/>
+          </p:nvPr>
+        </p:nvSpPr>
+        <p:spPr>
+          <a:xfrm>
+            <a:off x="0" y="10157400"/>
+            <a:ext cx="3280680" cy="534240"/>
+          </a:xfrm>
+          <a:prstGeom prst="rect">
+            <a:avLst/>
+          </a:prstGeom>
+          <a:noFill/>
+          <a:ln w="0">
+            <a:noFill/>
+          </a:ln>
+        </p:spPr>
+        <p:txBody>
+          <a:bodyPr lIns="0" tIns="0" rIns="0" bIns="0" anchor="b">
+            <a:noAutofit/>
+          </a:bodyPr>
+          <a:lstStyle>
+            <a:lvl1pPr>
+              <a:defRPr lang="en-GB" sz="1400" b="0" strike="noStrike" spc="-1">
+                <a:latin typeface="Times New Roman"/>
+              </a:defRPr>
+            </a:lvl1pPr>
+          </a:lstStyle>
+          <a:p>
+            <a:r>
+              <a:rPr lang="en-GB" sz="1400" b="0" strike="noStrike" spc="-1">
+                <a:latin typeface="Times New Roman"/>
+              </a:rPr>
+              <a:t>&lt;footer&gt;</a:t>
+            </a:r>
+          </a:p>
+        </p:txBody>
+      </p:sp>
+      <p:sp>
+        <p:nvSpPr>
+          <p:cNvPr id="87" name="PlaceHolder 6"/>
+          <p:cNvSpPr>
+            <a:spLocks noGrp="1"/>
+          </p:cNvSpPr>
+          <p:nvPr>
+            <p:ph type="sldNum" idx="3"/>
+          </p:nvPr>
+        </p:nvSpPr>
+        <p:spPr>
+          <a:xfrm>
+            <a:off x="4278960" y="10157400"/>
+            <a:ext cx="3280680" cy="534240"/>
+          </a:xfrm>
+          <a:prstGeom prst="rect">
+            <a:avLst/>
+          </a:prstGeom>
+          <a:noFill/>
+          <a:ln w="0">
+            <a:noFill/>
+          </a:ln>
+        </p:spPr>
+        <p:txBody>
+          <a:bodyPr lIns="0" tIns="0" rIns="0" bIns="0" anchor="b">
+            <a:noAutofit/>
+          </a:bodyPr>
+          <a:lstStyle>
+            <a:lvl1pPr algn="r">
+              <a:buNone/>
+              <a:defRPr lang="en-GB" sz="1400" b="0" strike="noStrike" spc="-1">
+                <a:latin typeface="Times New Roman"/>
+              </a:defRPr>
+            </a:lvl1pPr>
+          </a:lstStyle>
+          <a:p>
+            <a:pPr algn="r">
+              <a:buNone/>
+            </a:pPr>
+            <a:fld id="{1D17961F-64AA-46FE-85F4-BA3FA0384941}" type="slidenum">
+              <a:rPr lang="en-GB" sz="1400" b="0" strike="noStrike" spc="-1">
+                <a:latin typeface="Times New Roman"/>
+              </a:rPr>
+              <a:t>‹#›</a:t>
+            </a:fld>
+            <a:endParaRPr lang="en-GB" sz="1400" b="0" strike="noStrike" spc="-1">
+              <a:latin typeface="Times New Roman"/>
+            </a:endParaRPr>
+          </a:p>
+        </p:txBody>
+      </p:sp>
+    </p:spTree>
+  </p:cSld>
+  <p:clrMap bg1="lt1" tx1="dk1" bg2="lt2" tx2="dk2" accent1="accent1" accent2="accent2" accent3="accent3" accent4="accent4" accent5="accent5" accent6="accent6" hlink="hlink" folHlink="folHlink"/>
+  <p:notesStyle>
+    <a:lvl1pPr marL="0" algn="l" defTabSz="914400" rtl="0" eaLnBrk="1" latinLnBrk="0" hangingPunct="1">
+      <a:defRPr sz="1200" kern="1200">
+        <a:solidFill>
+          <a:schemeClr val="tx1"/>
+        </a:solidFill>
+        <a:latin typeface="+mn-lt"/>
+        <a:ea typeface="+mn-ea"/>
+        <a:cs typeface="+mn-cs"/>
+      </a:defRPr>
+    </a:lvl1pPr>
+    <a:lvl2pPr marL="457200" algn="l" defTabSz="914400" rtl="0" eaLnBrk="1" latinLnBrk="0" hangingPunct="1">
+      <a:defRPr sz="1200" kern="1200">
+        <a:solidFill>
+          <a:schemeClr val="tx1"/>
+        </a:solidFill>
+        <a:latin typeface="+mn-lt"/>
+        <a:ea typeface="+mn-ea"/>
+        <a:cs typeface="+mn-cs"/>
+      </a:defRPr>
+    </a:lvl2pPr>
+    <a:lvl3pPr marL="914400" algn="l" defTabSz="914400" rtl="0" eaLnBrk="1" latinLnBrk="0" hangingPunct="1">
+      <a:defRPr sz="1200" kern="1200">
+        <a:solidFill>
+          <a:schemeClr val="tx1"/>
+        </a:solidFill>
+        <a:latin typeface="+mn-lt"/>
+        <a:ea typeface="+mn-ea"/>
+        <a:cs typeface="+mn-cs"/>
+      </a:defRPr>
+    </a:lvl3pPr>
+    <a:lvl4pPr marL="1371600" algn="l" defTabSz="914400" rtl="0" eaLnBrk="1" latinLnBrk="0" hangingPunct="1">
+      <a:defRPr sz="1200" kern="1200">
+        <a:solidFill>
+          <a:schemeClr val="tx1"/>
+        </a:solidFill>
+        <a:latin typeface="+mn-lt"/>
+        <a:ea typeface="+mn-ea"/>
+        <a:cs typeface="+mn-cs"/>
+      </a:defRPr>
+    </a:lvl4pPr>
+    <a:lvl5pPr marL="1828800" algn="l" defTabSz="914400" rtl="0" eaLnBrk="1" latinLnBrk="0" hangingPunct="1">
+      <a:defRPr sz="1200" kern="1200">
+        <a:solidFill>
+          <a:schemeClr val="tx1"/>
+        </a:solidFill>
+        <a:latin typeface="+mn-lt"/>
+        <a:ea typeface="+mn-ea"/>
+        <a:cs typeface="+mn-cs"/>
+      </a:defRPr>
+    </a:lvl5pPr>
+    <a:lvl6pPr marL="2286000" algn="l" defTabSz="914400" rtl="0" eaLnBrk="1" latinLnBrk="0" hangingPunct="1">
+      <a:defRPr sz="1200" kern="1200">
+        <a:solidFill>
+          <a:schemeClr val="tx1"/>
+        </a:solidFill>
+        <a:latin typeface="+mn-lt"/>
+        <a:ea typeface="+mn-ea"/>
+        <a:cs typeface="+mn-cs"/>
+      </a:defRPr>
+    </a:lvl6pPr>
+    <a:lvl7pPr marL="2743200" algn="l" defTabSz="914400" rtl="0" eaLnBrk="1" latinLnBrk="0" hangingPunct="1">
+      <a:defRPr sz="1200" kern="1200">
+        <a:solidFill>
+          <a:schemeClr val="tx1"/>
+        </a:solidFill>
+        <a:latin typeface="+mn-lt"/>
+        <a:ea typeface="+mn-ea"/>
+        <a:cs typeface="+mn-cs"/>
+      </a:defRPr>
+    </a:lvl7pPr>
+    <a:lvl8pPr marL="3200400" algn="l" defTabSz="914400" rtl="0" eaLnBrk="1" latinLnBrk="0" hangingPunct="1">
+      <a:defRPr sz="1200" kern="1200">
+        <a:solidFill>
+          <a:schemeClr val="tx1"/>
+        </a:solidFill>
+        <a:latin typeface="+mn-lt"/>
+        <a:ea typeface="+mn-ea"/>
+        <a:cs typeface="+mn-cs"/>
+      </a:defRPr>
+    </a:lvl8pPr>
+    <a:lvl9pPr marL="3657600" algn="l" defTabSz="914400" rtl="0" eaLnBrk="1" latinLnBrk="0" hangingPunct="1">
+      <a:defRPr sz="1200" kern="1200">
+        <a:solidFill>
+          <a:schemeClr val="tx1"/>
+        </a:solidFill>
+        <a:latin typeface="+mn-lt"/>
+        <a:ea typeface="+mn-ea"/>
+        <a:cs typeface="+mn-cs"/>
+      </a:defRPr>
+    </a:lvl9pPr>
+  </p:notesStyle>
+</p:notesMaster>
+</file>
+
+<file path=ppt/notesSlides/notesSlide1.xml><?xml version="1.0" encoding="utf-8"?>
+<p:notes xmlns:a="http://schemas.openxmlformats.org/drawingml/2006/main" xmlns:r="http://schemas.openxmlformats.org/officeDocument/2006/relationships" xmlns:p="http://schemas.openxmlformats.org/presentationml/2006/main">
   <p:cSld>
     <p:spTree>
       <p:nvGrpSpPr>
@@ -43,9 +518,9 @@
       </p:grpSpPr>
       <p:sp>
         <p:nvSpPr>
-          <p:cNvPr id="82" name="PlaceHolder 1"/>
+          <p:cNvPr id="118" name="PlaceHolder 1"/>
           <p:cNvSpPr>
-            <a:spLocks noGrp="1"/>
+            <a:spLocks noGrp="1" noRot="1" noChangeAspect="1"/>
           </p:cNvSpPr>
           <p:nvPr>
             <p:ph type="sldImg"/>
@@ -53,40 +528,20 @@
         </p:nvSpPr>
         <p:spPr>
           <a:xfrm>
-            <a:off x="216000" y="812520"/>
-            <a:ext cx="7127280" cy="4008960"/>
-          </a:xfrm>
-          <a:prstGeom prst="rect">
-            <a:avLst/>
-          </a:prstGeom>
-          <a:noFill/>
-          <a:ln w="0">
-            <a:noFill/>
-          </a:ln>
-        </p:spPr>
-        <p:txBody>
-          <a:bodyPr lIns="0" rIns="0" tIns="0" bIns="0" anchor="ctr">
-            <a:noAutofit/>
-          </a:bodyPr>
-          <a:p>
-            <a:pPr algn="ctr">
-              <a:buNone/>
-            </a:pPr>
-            <a:r>
-              <a:rPr b="0" lang="en-GB" sz="4400" spc="-1" strike="noStrike">
-                <a:latin typeface="Arial"/>
-              </a:rPr>
-              <a:t>Click to move the slide</a:t>
-            </a:r>
-            <a:endParaRPr b="0" lang="en-GB" sz="4400" spc="-1" strike="noStrike">
-              <a:latin typeface="Arial"/>
-            </a:endParaRPr>
-          </a:p>
-        </p:txBody>
-      </p:sp>
-      <p:sp>
-        <p:nvSpPr>
-          <p:cNvPr id="83" name="PlaceHolder 2"/>
+            <a:off x="685800" y="1143000"/>
+            <a:ext cx="5483160" cy="3083040"/>
+          </a:xfrm>
+          <a:prstGeom prst="rect">
+            <a:avLst/>
+          </a:prstGeom>
+          <a:ln w="0">
+            <a:noFill/>
+          </a:ln>
+        </p:spPr>
+      </p:sp>
+      <p:sp>
+        <p:nvSpPr>
+          <p:cNvPr id="119" name="PlaceHolder 2"/>
           <p:cNvSpPr>
             <a:spLocks noGrp="1"/>
           </p:cNvSpPr>
@@ -96,231 +551,98 @@
         </p:nvSpPr>
         <p:spPr>
           <a:xfrm>
-            <a:off x="756000" y="5078520"/>
-            <a:ext cx="6047640" cy="4811040"/>
-          </a:xfrm>
-          <a:prstGeom prst="rect">
-            <a:avLst/>
-          </a:prstGeom>
-          <a:noFill/>
-          <a:ln w="0">
-            <a:noFill/>
-          </a:ln>
-        </p:spPr>
-        <p:txBody>
-          <a:bodyPr lIns="0" rIns="0" tIns="0" bIns="0" anchor="t">
+            <a:off x="685800" y="4400640"/>
+            <a:ext cx="5482800" cy="3596760"/>
+          </a:xfrm>
+          <a:prstGeom prst="rect">
+            <a:avLst/>
+          </a:prstGeom>
+          <a:noFill/>
+          <a:ln w="0">
+            <a:noFill/>
+          </a:ln>
+        </p:spPr>
+        <p:txBody>
+          <a:bodyPr lIns="0" tIns="0" rIns="0" bIns="0" anchor="t">
             <a:noAutofit/>
           </a:bodyPr>
-          <a:p>
-            <a:r>
-              <a:rPr b="0" lang="en-GB" sz="2000" spc="-1" strike="noStrike">
-                <a:latin typeface="Arial"/>
-              </a:rPr>
-              <a:t>Click to edit the notes' format</a:t>
-            </a:r>
-            <a:endParaRPr b="0" lang="en-GB" sz="2000" spc="-1" strike="noStrike">
-              <a:latin typeface="Arial"/>
-            </a:endParaRPr>
-          </a:p>
-        </p:txBody>
-      </p:sp>
-      <p:sp>
-        <p:nvSpPr>
-          <p:cNvPr id="84" name="PlaceHolder 3"/>
-          <p:cNvSpPr>
-            <a:spLocks noGrp="1"/>
-          </p:cNvSpPr>
-          <p:nvPr>
-            <p:ph type="hdr"/>
-          </p:nvPr>
-        </p:nvSpPr>
-        <p:spPr>
-          <a:xfrm>
-            <a:off x="0" y="0"/>
-            <a:ext cx="3280680" cy="534240"/>
-          </a:xfrm>
-          <a:prstGeom prst="rect">
-            <a:avLst/>
-          </a:prstGeom>
-          <a:noFill/>
-          <a:ln w="0">
-            <a:noFill/>
-          </a:ln>
-        </p:spPr>
-        <p:txBody>
-          <a:bodyPr lIns="0" rIns="0" tIns="0" bIns="0" anchor="t">
+          <a:lstStyle/>
+          <a:p>
+            <a:endParaRPr lang="en-GB" sz="2000" b="0" strike="noStrike" spc="-1">
+              <a:latin typeface="Arial"/>
+            </a:endParaRPr>
+          </a:p>
+        </p:txBody>
+      </p:sp>
+      <p:sp>
+        <p:nvSpPr>
+          <p:cNvPr id="120" name="TextShape 3"/>
+          <p:cNvSpPr/>
+          <p:nvPr/>
+        </p:nvSpPr>
+        <p:spPr>
+          <a:xfrm>
+            <a:off x="3884760" y="8685360"/>
+            <a:ext cx="2968200" cy="455040"/>
+          </a:xfrm>
+          <a:prstGeom prst="rect">
+            <a:avLst/>
+          </a:prstGeom>
+          <a:noFill/>
+          <a:ln w="0">
+            <a:noFill/>
+          </a:ln>
+        </p:spPr>
+        <p:style>
+          <a:lnRef idx="0">
+            <a:scrgbClr r="0" g="0" b="0"/>
+          </a:lnRef>
+          <a:fillRef idx="0">
+            <a:scrgbClr r="0" g="0" b="0"/>
+          </a:fillRef>
+          <a:effectRef idx="0">
+            <a:scrgbClr r="0" g="0" b="0"/>
+          </a:effectRef>
+          <a:fontRef idx="minor"/>
+        </p:style>
+        <p:txBody>
+          <a:bodyPr lIns="90000" tIns="45000" rIns="90000" bIns="45000" anchor="b">
             <a:noAutofit/>
           </a:bodyPr>
-          <a:p>
-            <a:r>
-              <a:rPr b="0" lang="en-GB" sz="1400" spc="-1" strike="noStrike">
-                <a:latin typeface="Times New Roman"/>
-              </a:rPr>
-              <a:t>&lt;header&gt;</a:t>
-            </a:r>
-            <a:endParaRPr b="0" lang="en-GB" sz="1400" spc="-1" strike="noStrike">
-              <a:latin typeface="Times New Roman"/>
-            </a:endParaRPr>
-          </a:p>
-        </p:txBody>
-      </p:sp>
-      <p:sp>
-        <p:nvSpPr>
-          <p:cNvPr id="85" name="PlaceHolder 4"/>
-          <p:cNvSpPr>
-            <a:spLocks noGrp="1"/>
-          </p:cNvSpPr>
-          <p:nvPr>
-            <p:ph type="dt" idx="1"/>
-          </p:nvPr>
-        </p:nvSpPr>
-        <p:spPr>
-          <a:xfrm>
-            <a:off x="4278960" y="0"/>
-            <a:ext cx="3280680" cy="534240"/>
-          </a:xfrm>
-          <a:prstGeom prst="rect">
-            <a:avLst/>
-          </a:prstGeom>
-          <a:noFill/>
-          <a:ln w="0">
-            <a:noFill/>
-          </a:ln>
-        </p:spPr>
-        <p:txBody>
-          <a:bodyPr lIns="0" rIns="0" tIns="0" bIns="0" anchor="t">
-            <a:noAutofit/>
-          </a:bodyPr>
-          <a:lstStyle>
-            <a:lvl1pPr algn="r">
+          <a:lstStyle/>
+          <a:p>
+            <a:pPr algn="r">
+              <a:lnSpc>
+                <a:spcPct val="100000"/>
+              </a:lnSpc>
               <a:buNone/>
-              <a:defRPr b="0" lang="en-GB" sz="1400" spc="-1" strike="noStrike">
-                <a:latin typeface="Times New Roman"/>
-              </a:defRPr>
-            </a:lvl1pPr>
-          </a:lstStyle>
-          <a:p>
-            <a:pPr algn="r">
-              <a:buNone/>
-            </a:pPr>
-            <a:r>
-              <a:rPr b="0" lang="en-GB" sz="1400" spc="-1" strike="noStrike">
-                <a:latin typeface="Times New Roman"/>
-              </a:rPr>
-              <a:t>&lt;date/time&gt;</a:t>
-            </a:r>
-            <a:endParaRPr b="0" lang="en-GB" sz="1400" spc="-1" strike="noStrike">
-              <a:latin typeface="Times New Roman"/>
-            </a:endParaRPr>
-          </a:p>
-        </p:txBody>
-      </p:sp>
-      <p:sp>
-        <p:nvSpPr>
-          <p:cNvPr id="86" name="PlaceHolder 5"/>
-          <p:cNvSpPr>
-            <a:spLocks noGrp="1"/>
-          </p:cNvSpPr>
-          <p:nvPr>
-            <p:ph type="ftr" idx="2"/>
-          </p:nvPr>
-        </p:nvSpPr>
-        <p:spPr>
-          <a:xfrm>
-            <a:off x="0" y="10157400"/>
-            <a:ext cx="3280680" cy="534240"/>
-          </a:xfrm>
-          <a:prstGeom prst="rect">
-            <a:avLst/>
-          </a:prstGeom>
-          <a:noFill/>
-          <a:ln w="0">
-            <a:noFill/>
-          </a:ln>
-        </p:spPr>
-        <p:txBody>
-          <a:bodyPr lIns="0" rIns="0" tIns="0" bIns="0" anchor="b">
-            <a:noAutofit/>
-          </a:bodyPr>
-          <a:lstStyle>
-            <a:lvl1pPr>
-              <a:defRPr b="0" lang="en-GB" sz="1400" spc="-1" strike="noStrike">
-                <a:latin typeface="Times New Roman"/>
-              </a:defRPr>
-            </a:lvl1pPr>
-          </a:lstStyle>
-          <a:p>
-            <a:r>
-              <a:rPr b="0" lang="en-GB" sz="1400" spc="-1" strike="noStrike">
-                <a:latin typeface="Times New Roman"/>
-              </a:rPr>
-              <a:t>&lt;footer&gt;</a:t>
-            </a:r>
-            <a:endParaRPr b="0" lang="en-GB" sz="1400" spc="-1" strike="noStrike">
-              <a:latin typeface="Times New Roman"/>
-            </a:endParaRPr>
-          </a:p>
-        </p:txBody>
-      </p:sp>
-      <p:sp>
-        <p:nvSpPr>
-          <p:cNvPr id="87" name="PlaceHolder 6"/>
-          <p:cNvSpPr>
-            <a:spLocks noGrp="1"/>
-          </p:cNvSpPr>
-          <p:nvPr>
-            <p:ph type="sldNum" idx="3"/>
-          </p:nvPr>
-        </p:nvSpPr>
-        <p:spPr>
-          <a:xfrm>
-            <a:off x="4278960" y="10157400"/>
-            <a:ext cx="3280680" cy="534240"/>
-          </a:xfrm>
-          <a:prstGeom prst="rect">
-            <a:avLst/>
-          </a:prstGeom>
-          <a:noFill/>
-          <a:ln w="0">
-            <a:noFill/>
-          </a:ln>
-        </p:spPr>
-        <p:txBody>
-          <a:bodyPr lIns="0" rIns="0" tIns="0" bIns="0" anchor="b">
-            <a:noAutofit/>
-          </a:bodyPr>
-          <a:lstStyle>
-            <a:lvl1pPr algn="r">
-              <a:buNone/>
-              <a:defRPr b="0" lang="en-GB" sz="1400" spc="-1" strike="noStrike">
-                <a:latin typeface="Times New Roman"/>
-              </a:defRPr>
-            </a:lvl1pPr>
-          </a:lstStyle>
-          <a:p>
-            <a:pPr algn="r">
-              <a:buNone/>
-            </a:pPr>
-            <a:fld id="{1D17961F-64AA-46FE-85F4-BA3FA0384941}" type="slidenum">
-              <a:rPr b="0" lang="en-GB" sz="1400" spc="-1" strike="noStrike">
-                <a:latin typeface="Times New Roman"/>
-              </a:rPr>
-              <a:t>&lt;number&gt;</a:t>
+            </a:pPr>
+            <a:fld id="{83CA4E10-1015-43F1-8F48-339311D5765C}" type="slidenum">
+              <a:rPr lang="en-GB" sz="1200" b="0" strike="noStrike" spc="-1">
+                <a:solidFill>
+                  <a:srgbClr val="000000"/>
+                </a:solidFill>
+                <a:latin typeface="+mn-lt"/>
+                <a:ea typeface="+mn-ea"/>
+              </a:rPr>
+              <a:t>1</a:t>
             </a:fld>
-            <a:endParaRPr b="0" lang="en-GB" sz="1400" spc="-1" strike="noStrike">
-              <a:latin typeface="Times New Roman"/>
+            <a:endParaRPr lang="en-GB" sz="1200" b="0" strike="noStrike" spc="-1">
+              <a:latin typeface="Arial"/>
             </a:endParaRPr>
           </a:p>
         </p:txBody>
       </p:sp>
     </p:spTree>
   </p:cSld>
-  <p:clrMap bg1="lt1" bg2="lt2" tx1="dk1" tx2="dk2" accent1="accent1" accent2="accent2" accent3="accent3" accent4="accent4" accent5="accent5" accent6="accent6" hlink="hlink" folHlink="folHlink"/>
-</p:notesMaster>
+  <p:clrMapOvr>
+    <a:masterClrMapping/>
+  </p:clrMapOvr>
+</p:notes>
 </file>
 
-<file path=ppt/notesSlides/notesSlide1.xml><?xml version="1.0" encoding="utf-8"?>
-<p:notes xmlns:a="http://schemas.openxmlformats.org/drawingml/2006/main" xmlns:p="http://schemas.openxmlformats.org/presentationml/2006/main" xmlns:r="http://schemas.openxmlformats.org/officeDocument/2006/relationships" xmlns:p14="http://schemas.microsoft.com/office/powerpoint/2010/main" xmlns:p15="http://schemas.microsoft.com/office/powerpoint/2012/main" xmlns:mc="http://schemas.openxmlformats.org/markup-compatibility/2006">
+<file path=ppt/notesSlides/notesSlide2.xml><?xml version="1.0" encoding="utf-8"?>
+<p:notes xmlns:a="http://schemas.openxmlformats.org/drawingml/2006/main" xmlns:r="http://schemas.openxmlformats.org/officeDocument/2006/relationships" xmlns:p="http://schemas.openxmlformats.org/presentationml/2006/main">
   <p:cSld>
     <p:spTree>
       <p:nvGrpSpPr>
@@ -338,9 +660,9 @@
       </p:grpSpPr>
       <p:sp>
         <p:nvSpPr>
-          <p:cNvPr id="118" name="PlaceHolder 1"/>
+          <p:cNvPr id="121" name="PlaceHolder 1"/>
           <p:cNvSpPr>
-            <a:spLocks noGrp="1"/>
+            <a:spLocks noGrp="1" noRot="1" noChangeAspect="1"/>
           </p:cNvSpPr>
           <p:nvPr>
             <p:ph type="sldImg"/>
@@ -361,7 +683,7 @@
       </p:sp>
       <p:sp>
         <p:nvSpPr>
-          <p:cNvPr id="119" name="PlaceHolder 2"/>
+          <p:cNvPr id="122" name="PlaceHolder 2"/>
           <p:cNvSpPr>
             <a:spLocks noGrp="1"/>
           </p:cNvSpPr>
@@ -383,19 +705,20 @@
           </a:ln>
         </p:spPr>
         <p:txBody>
-          <a:bodyPr lIns="0" rIns="0" tIns="0" bIns="0" anchor="t">
+          <a:bodyPr lIns="0" tIns="0" rIns="0" bIns="0" anchor="t">
             <a:noAutofit/>
           </a:bodyPr>
-          <a:p>
-            <a:endParaRPr b="0" lang="en-GB" sz="2000" spc="-1" strike="noStrike">
-              <a:latin typeface="Arial"/>
-            </a:endParaRPr>
-          </a:p>
-        </p:txBody>
-      </p:sp>
-      <p:sp>
-        <p:nvSpPr>
-          <p:cNvPr id="120" name="TextShape 3"/>
+          <a:lstStyle/>
+          <a:p>
+            <a:endParaRPr lang="en-GB" sz="2000" b="0" strike="noStrike" spc="-1">
+              <a:latin typeface="Arial"/>
+            </a:endParaRPr>
+          </a:p>
+        </p:txBody>
+      </p:sp>
+      <p:sp>
+        <p:nvSpPr>
+          <p:cNvPr id="123" name="TextShape 3"/>
           <p:cNvSpPr/>
           <p:nvPr/>
         </p:nvSpPr>
@@ -413,15 +736,22 @@
           </a:ln>
         </p:spPr>
         <p:style>
-          <a:lnRef idx="0"/>
-          <a:fillRef idx="0"/>
-          <a:effectRef idx="0"/>
+          <a:lnRef idx="0">
+            <a:scrgbClr r="0" g="0" b="0"/>
+          </a:lnRef>
+          <a:fillRef idx="0">
+            <a:scrgbClr r="0" g="0" b="0"/>
+          </a:fillRef>
+          <a:effectRef idx="0">
+            <a:scrgbClr r="0" g="0" b="0"/>
+          </a:effectRef>
           <a:fontRef idx="minor"/>
         </p:style>
         <p:txBody>
-          <a:bodyPr lIns="90000" rIns="90000" tIns="45000" bIns="45000" anchor="b">
+          <a:bodyPr lIns="90000" tIns="45000" rIns="90000" bIns="45000" anchor="b">
             <a:noAutofit/>
           </a:bodyPr>
+          <a:lstStyle/>
           <a:p>
             <a:pPr algn="r">
               <a:lnSpc>
@@ -429,17 +759,17 @@
               </a:lnSpc>
               <a:buNone/>
             </a:pPr>
-            <a:fld id="{83CA4E10-1015-43F1-8F48-339311D5765C}" type="slidenum">
-              <a:rPr b="0" lang="en-GB" sz="1200" spc="-1" strike="noStrike">
+            <a:fld id="{99C1091A-D952-42BA-BA08-A349DAC52193}" type="slidenum">
+              <a:rPr lang="en-GB" sz="1200" b="0" strike="noStrike" spc="-1">
                 <a:solidFill>
                   <a:srgbClr val="000000"/>
                 </a:solidFill>
                 <a:latin typeface="+mn-lt"/>
                 <a:ea typeface="+mn-ea"/>
               </a:rPr>
-              <a:t>&lt;number&gt;</a:t>
+              <a:t>4</a:t>
             </a:fld>
-            <a:endParaRPr b="0" lang="en-GB" sz="1200" spc="-1" strike="noStrike">
+            <a:endParaRPr lang="en-GB" sz="1200" b="0" strike="noStrike" spc="-1">
               <a:latin typeface="Arial"/>
             </a:endParaRPr>
           </a:p>
@@ -447,11 +777,14 @@
       </p:sp>
     </p:spTree>
   </p:cSld>
+  <p:clrMapOvr>
+    <a:masterClrMapping/>
+  </p:clrMapOvr>
 </p:notes>
 </file>
 
-<file path=ppt/notesSlides/notesSlide4.xml><?xml version="1.0" encoding="utf-8"?>
-<p:notes xmlns:a="http://schemas.openxmlformats.org/drawingml/2006/main" xmlns:p="http://schemas.openxmlformats.org/presentationml/2006/main" xmlns:r="http://schemas.openxmlformats.org/officeDocument/2006/relationships" xmlns:p14="http://schemas.microsoft.com/office/powerpoint/2010/main" xmlns:p15="http://schemas.microsoft.com/office/powerpoint/2012/main" xmlns:mc="http://schemas.openxmlformats.org/markup-compatibility/2006">
+<file path=ppt/notesSlides/notesSlide3.xml><?xml version="1.0" encoding="utf-8"?>
+<p:notes xmlns:a="http://schemas.openxmlformats.org/drawingml/2006/main" xmlns:r="http://schemas.openxmlformats.org/officeDocument/2006/relationships" xmlns:p="http://schemas.openxmlformats.org/presentationml/2006/main">
   <p:cSld>
     <p:spTree>
       <p:nvGrpSpPr>
@@ -469,9 +802,9 @@
       </p:grpSpPr>
       <p:sp>
         <p:nvSpPr>
-          <p:cNvPr id="121" name="PlaceHolder 1"/>
+          <p:cNvPr id="124" name="PlaceHolder 1"/>
           <p:cNvSpPr>
-            <a:spLocks noGrp="1"/>
+            <a:spLocks noGrp="1" noRot="1" noChangeAspect="1"/>
           </p:cNvSpPr>
           <p:nvPr>
             <p:ph type="sldImg"/>
@@ -492,7 +825,7 @@
       </p:sp>
       <p:sp>
         <p:nvSpPr>
-          <p:cNvPr id="122" name="PlaceHolder 2"/>
+          <p:cNvPr id="125" name="PlaceHolder 2"/>
           <p:cNvSpPr>
             <a:spLocks noGrp="1"/>
           </p:cNvSpPr>
@@ -514,19 +847,20 @@
           </a:ln>
         </p:spPr>
         <p:txBody>
-          <a:bodyPr lIns="0" rIns="0" tIns="0" bIns="0" anchor="t">
+          <a:bodyPr lIns="0" tIns="0" rIns="0" bIns="0" anchor="t">
             <a:noAutofit/>
           </a:bodyPr>
-          <a:p>
-            <a:endParaRPr b="0" lang="en-GB" sz="2000" spc="-1" strike="noStrike">
-              <a:latin typeface="Arial"/>
-            </a:endParaRPr>
-          </a:p>
-        </p:txBody>
-      </p:sp>
-      <p:sp>
-        <p:nvSpPr>
-          <p:cNvPr id="123" name="TextShape 3"/>
+          <a:lstStyle/>
+          <a:p>
+            <a:endParaRPr lang="en-GB" sz="2000" b="0" strike="noStrike" spc="-1">
+              <a:latin typeface="Arial"/>
+            </a:endParaRPr>
+          </a:p>
+        </p:txBody>
+      </p:sp>
+      <p:sp>
+        <p:nvSpPr>
+          <p:cNvPr id="126" name="TextShape 5"/>
           <p:cNvSpPr/>
           <p:nvPr/>
         </p:nvSpPr>
@@ -544,15 +878,22 @@
           </a:ln>
         </p:spPr>
         <p:style>
-          <a:lnRef idx="0"/>
-          <a:fillRef idx="0"/>
-          <a:effectRef idx="0"/>
+          <a:lnRef idx="0">
+            <a:scrgbClr r="0" g="0" b="0"/>
+          </a:lnRef>
+          <a:fillRef idx="0">
+            <a:scrgbClr r="0" g="0" b="0"/>
+          </a:fillRef>
+          <a:effectRef idx="0">
+            <a:scrgbClr r="0" g="0" b="0"/>
+          </a:effectRef>
           <a:fontRef idx="minor"/>
         </p:style>
         <p:txBody>
-          <a:bodyPr lIns="90000" rIns="90000" tIns="45000" bIns="45000" anchor="b">
+          <a:bodyPr lIns="90000" tIns="45000" rIns="90000" bIns="45000" anchor="b">
             <a:noAutofit/>
           </a:bodyPr>
+          <a:lstStyle/>
           <a:p>
             <a:pPr algn="r">
               <a:lnSpc>
@@ -560,17 +901,17 @@
               </a:lnSpc>
               <a:buNone/>
             </a:pPr>
-            <a:fld id="{99C1091A-D952-42BA-BA08-A349DAC52193}" type="slidenum">
-              <a:rPr b="0" lang="en-GB" sz="1200" spc="-1" strike="noStrike">
+            <a:fld id="{C4034F77-4DB4-4903-BD4E-1C33B5DC3570}" type="slidenum">
+              <a:rPr lang="en-GB" sz="1200" b="0" strike="noStrike" spc="-1">
                 <a:solidFill>
                   <a:srgbClr val="000000"/>
                 </a:solidFill>
                 <a:latin typeface="+mn-lt"/>
                 <a:ea typeface="+mn-ea"/>
               </a:rPr>
-              <a:t>&lt;number&gt;</a:t>
+              <a:t>5</a:t>
             </a:fld>
-            <a:endParaRPr b="0" lang="en-GB" sz="1200" spc="-1" strike="noStrike">
+            <a:endParaRPr lang="en-GB" sz="1200" b="0" strike="noStrike" spc="-1">
               <a:latin typeface="Arial"/>
             </a:endParaRPr>
           </a:p>
@@ -578,11 +919,14 @@
       </p:sp>
     </p:spTree>
   </p:cSld>
+  <p:clrMapOvr>
+    <a:masterClrMapping/>
+  </p:clrMapOvr>
 </p:notes>
 </file>
 
-<file path=ppt/notesSlides/notesSlide5.xml><?xml version="1.0" encoding="utf-8"?>
-<p:notes xmlns:a="http://schemas.openxmlformats.org/drawingml/2006/main" xmlns:p="http://schemas.openxmlformats.org/presentationml/2006/main" xmlns:r="http://schemas.openxmlformats.org/officeDocument/2006/relationships" xmlns:p14="http://schemas.microsoft.com/office/powerpoint/2010/main" xmlns:p15="http://schemas.microsoft.com/office/powerpoint/2012/main" xmlns:mc="http://schemas.openxmlformats.org/markup-compatibility/2006">
+<file path=ppt/notesSlides/notesSlide4.xml><?xml version="1.0" encoding="utf-8"?>
+<p:notes xmlns:a="http://schemas.openxmlformats.org/drawingml/2006/main" xmlns:r="http://schemas.openxmlformats.org/officeDocument/2006/relationships" xmlns:p="http://schemas.openxmlformats.org/presentationml/2006/main">
   <p:cSld>
     <p:spTree>
       <p:nvGrpSpPr>
@@ -600,9 +944,9 @@
       </p:grpSpPr>
       <p:sp>
         <p:nvSpPr>
-          <p:cNvPr id="124" name="PlaceHolder 1"/>
+          <p:cNvPr id="127" name="PlaceHolder 1"/>
           <p:cNvSpPr>
-            <a:spLocks noGrp="1"/>
+            <a:spLocks noGrp="1" noRot="1" noChangeAspect="1"/>
           </p:cNvSpPr>
           <p:nvPr>
             <p:ph type="sldImg"/>
@@ -610,20 +954,20 @@
         </p:nvSpPr>
         <p:spPr>
           <a:xfrm>
-            <a:off x="685800" y="1143000"/>
-            <a:ext cx="5483160" cy="3083040"/>
-          </a:xfrm>
-          <a:prstGeom prst="rect">
-            <a:avLst/>
-          </a:prstGeom>
-          <a:ln w="0">
-            <a:noFill/>
-          </a:ln>
-        </p:spPr>
-      </p:sp>
-      <p:sp>
-        <p:nvSpPr>
-          <p:cNvPr id="125" name="PlaceHolder 2"/>
+            <a:off x="687388" y="1143000"/>
+            <a:ext cx="5480050" cy="3082925"/>
+          </a:xfrm>
+          <a:prstGeom prst="rect">
+            <a:avLst/>
+          </a:prstGeom>
+          <a:ln w="0">
+            <a:noFill/>
+          </a:ln>
+        </p:spPr>
+      </p:sp>
+      <p:sp>
+        <p:nvSpPr>
+          <p:cNvPr id="128" name="PlaceHolder 2"/>
           <p:cNvSpPr>
             <a:spLocks noGrp="1"/>
           </p:cNvSpPr>
@@ -645,19 +989,20 @@
           </a:ln>
         </p:spPr>
         <p:txBody>
-          <a:bodyPr lIns="0" rIns="0" tIns="0" bIns="0" anchor="t">
+          <a:bodyPr lIns="0" tIns="0" rIns="0" bIns="0" anchor="t">
             <a:noAutofit/>
           </a:bodyPr>
-          <a:p>
-            <a:endParaRPr b="0" lang="en-GB" sz="2000" spc="-1" strike="noStrike">
-              <a:latin typeface="Arial"/>
-            </a:endParaRPr>
-          </a:p>
-        </p:txBody>
-      </p:sp>
-      <p:sp>
-        <p:nvSpPr>
-          <p:cNvPr id="126" name="TextShape 5"/>
+          <a:lstStyle/>
+          <a:p>
+            <a:endParaRPr lang="en-GB" sz="2000" b="0" strike="noStrike" spc="-1">
+              <a:latin typeface="Arial"/>
+            </a:endParaRPr>
+          </a:p>
+        </p:txBody>
+      </p:sp>
+      <p:sp>
+        <p:nvSpPr>
+          <p:cNvPr id="129" name="TextShape 3"/>
           <p:cNvSpPr/>
           <p:nvPr/>
         </p:nvSpPr>
@@ -675,15 +1020,22 @@
           </a:ln>
         </p:spPr>
         <p:style>
-          <a:lnRef idx="0"/>
-          <a:fillRef idx="0"/>
-          <a:effectRef idx="0"/>
+          <a:lnRef idx="0">
+            <a:scrgbClr r="0" g="0" b="0"/>
+          </a:lnRef>
+          <a:fillRef idx="0">
+            <a:scrgbClr r="0" g="0" b="0"/>
+          </a:fillRef>
+          <a:effectRef idx="0">
+            <a:scrgbClr r="0" g="0" b="0"/>
+          </a:effectRef>
           <a:fontRef idx="minor"/>
         </p:style>
         <p:txBody>
-          <a:bodyPr lIns="90000" rIns="90000" tIns="45000" bIns="45000" anchor="b">
+          <a:bodyPr lIns="90000" tIns="45000" rIns="90000" bIns="45000" anchor="b">
             <a:noAutofit/>
           </a:bodyPr>
+          <a:lstStyle/>
           <a:p>
             <a:pPr algn="r">
               <a:lnSpc>
@@ -691,17 +1043,17 @@
               </a:lnSpc>
               <a:buNone/>
             </a:pPr>
-            <a:fld id="{C4034F77-4DB4-4903-BD4E-1C33B5DC3570}" type="slidenum">
-              <a:rPr b="0" lang="en-GB" sz="1200" spc="-1" strike="noStrike">
+            <a:fld id="{A2F69B37-DC5E-4848-BE52-C6A589FEFE51}" type="slidenum">
+              <a:rPr lang="en-GB" sz="1200" b="0" strike="noStrike" spc="-1">
                 <a:solidFill>
                   <a:srgbClr val="000000"/>
                 </a:solidFill>
                 <a:latin typeface="+mn-lt"/>
                 <a:ea typeface="+mn-ea"/>
               </a:rPr>
-              <a:t>&lt;number&gt;</a:t>
+              <a:t>6</a:t>
             </a:fld>
-            <a:endParaRPr b="0" lang="en-GB" sz="1200" spc="-1" strike="noStrike">
+            <a:endParaRPr lang="en-GB" sz="1200" b="0" strike="noStrike" spc="-1">
               <a:latin typeface="Arial"/>
             </a:endParaRPr>
           </a:p>
@@ -709,11 +1061,14 @@
       </p:sp>
     </p:spTree>
   </p:cSld>
+  <p:clrMapOvr>
+    <a:masterClrMapping/>
+  </p:clrMapOvr>
 </p:notes>
 </file>
 
-<file path=ppt/notesSlides/notesSlide6.xml><?xml version="1.0" encoding="utf-8"?>
-<p:notes xmlns:a="http://schemas.openxmlformats.org/drawingml/2006/main" xmlns:p="http://schemas.openxmlformats.org/presentationml/2006/main" xmlns:r="http://schemas.openxmlformats.org/officeDocument/2006/relationships" xmlns:p14="http://schemas.microsoft.com/office/powerpoint/2010/main" xmlns:p15="http://schemas.microsoft.com/office/powerpoint/2012/main" xmlns:mc="http://schemas.openxmlformats.org/markup-compatibility/2006">
+<file path=ppt/notesSlides/notesSlide5.xml><?xml version="1.0" encoding="utf-8"?>
+<p:notes xmlns:a="http://schemas.openxmlformats.org/drawingml/2006/main" xmlns:r="http://schemas.openxmlformats.org/officeDocument/2006/relationships" xmlns:p="http://schemas.openxmlformats.org/presentationml/2006/main">
   <p:cSld>
     <p:spTree>
       <p:nvGrpSpPr>
@@ -731,9 +1086,9 @@
       </p:grpSpPr>
       <p:sp>
         <p:nvSpPr>
-          <p:cNvPr id="127" name="PlaceHolder 1"/>
+          <p:cNvPr id="130" name="PlaceHolder 1"/>
           <p:cNvSpPr>
-            <a:spLocks noGrp="1"/>
+            <a:spLocks noGrp="1" noRot="1" noChangeAspect="1"/>
           </p:cNvSpPr>
           <p:nvPr>
             <p:ph type="sldImg"/>
@@ -754,7 +1109,7 @@
       </p:sp>
       <p:sp>
         <p:nvSpPr>
-          <p:cNvPr id="128" name="PlaceHolder 2"/>
+          <p:cNvPr id="131" name="PlaceHolder 2"/>
           <p:cNvSpPr>
             <a:spLocks noGrp="1"/>
           </p:cNvSpPr>
@@ -776,19 +1131,20 @@
           </a:ln>
         </p:spPr>
         <p:txBody>
-          <a:bodyPr lIns="0" rIns="0" tIns="0" bIns="0" anchor="t">
+          <a:bodyPr lIns="0" tIns="0" rIns="0" bIns="0" anchor="t">
             <a:noAutofit/>
           </a:bodyPr>
-          <a:p>
-            <a:endParaRPr b="0" lang="en-GB" sz="2000" spc="-1" strike="noStrike">
-              <a:latin typeface="Arial"/>
-            </a:endParaRPr>
-          </a:p>
-        </p:txBody>
-      </p:sp>
-      <p:sp>
-        <p:nvSpPr>
-          <p:cNvPr id="129" name="TextShape 3"/>
+          <a:lstStyle/>
+          <a:p>
+            <a:endParaRPr lang="en-GB" sz="2000" b="0" strike="noStrike" spc="-1">
+              <a:latin typeface="Arial"/>
+            </a:endParaRPr>
+          </a:p>
+        </p:txBody>
+      </p:sp>
+      <p:sp>
+        <p:nvSpPr>
+          <p:cNvPr id="132" name="TextShape 3"/>
           <p:cNvSpPr/>
           <p:nvPr/>
         </p:nvSpPr>
@@ -806,15 +1162,22 @@
           </a:ln>
         </p:spPr>
         <p:style>
-          <a:lnRef idx="0"/>
-          <a:fillRef idx="0"/>
-          <a:effectRef idx="0"/>
+          <a:lnRef idx="0">
+            <a:scrgbClr r="0" g="0" b="0"/>
+          </a:lnRef>
+          <a:fillRef idx="0">
+            <a:scrgbClr r="0" g="0" b="0"/>
+          </a:fillRef>
+          <a:effectRef idx="0">
+            <a:scrgbClr r="0" g="0" b="0"/>
+          </a:effectRef>
           <a:fontRef idx="minor"/>
         </p:style>
         <p:txBody>
-          <a:bodyPr lIns="90000" rIns="90000" tIns="45000" bIns="45000" anchor="b">
+          <a:bodyPr lIns="90000" tIns="45000" rIns="90000" bIns="45000" anchor="b">
             <a:noAutofit/>
           </a:bodyPr>
+          <a:lstStyle/>
           <a:p>
             <a:pPr algn="r">
               <a:lnSpc>
@@ -822,17 +1185,17 @@
               </a:lnSpc>
               <a:buNone/>
             </a:pPr>
-            <a:fld id="{A2F69B37-DC5E-4848-BE52-C6A589FEFE51}" type="slidenum">
-              <a:rPr b="0" lang="en-GB" sz="1200" spc="-1" strike="noStrike">
+            <a:fld id="{EA8463D7-41AC-4267-9602-24654C4AEE8E}" type="slidenum">
+              <a:rPr lang="en-GB" sz="1200" b="0" strike="noStrike" spc="-1">
                 <a:solidFill>
                   <a:srgbClr val="000000"/>
                 </a:solidFill>
                 <a:latin typeface="+mn-lt"/>
                 <a:ea typeface="+mn-ea"/>
               </a:rPr>
-              <a:t>&lt;number&gt;</a:t>
+              <a:t>7</a:t>
             </a:fld>
-            <a:endParaRPr b="0" lang="en-GB" sz="1200" spc="-1" strike="noStrike">
+            <a:endParaRPr lang="en-GB" sz="1200" b="0" strike="noStrike" spc="-1">
               <a:latin typeface="Arial"/>
             </a:endParaRPr>
           </a:p>
@@ -840,11 +1203,14 @@
       </p:sp>
     </p:spTree>
   </p:cSld>
+  <p:clrMapOvr>
+    <a:masterClrMapping/>
+  </p:clrMapOvr>
 </p:notes>
 </file>
 
-<file path=ppt/notesSlides/notesSlide7.xml><?xml version="1.0" encoding="utf-8"?>
-<p:notes xmlns:a="http://schemas.openxmlformats.org/drawingml/2006/main" xmlns:p="http://schemas.openxmlformats.org/presentationml/2006/main" xmlns:r="http://schemas.openxmlformats.org/officeDocument/2006/relationships" xmlns:p14="http://schemas.microsoft.com/office/powerpoint/2010/main" xmlns:p15="http://schemas.microsoft.com/office/powerpoint/2012/main" xmlns:mc="http://schemas.openxmlformats.org/markup-compatibility/2006">
+<file path=ppt/notesSlides/notesSlide6.xml><?xml version="1.0" encoding="utf-8"?>
+<p:notes xmlns:a="http://schemas.openxmlformats.org/drawingml/2006/main" xmlns:r="http://schemas.openxmlformats.org/officeDocument/2006/relationships" xmlns:p="http://schemas.openxmlformats.org/presentationml/2006/main">
   <p:cSld>
     <p:spTree>
       <p:nvGrpSpPr>
@@ -862,9 +1228,9 @@
       </p:grpSpPr>
       <p:sp>
         <p:nvSpPr>
-          <p:cNvPr id="130" name="PlaceHolder 1"/>
+          <p:cNvPr id="133" name="PlaceHolder 1"/>
           <p:cNvSpPr>
-            <a:spLocks noGrp="1"/>
+            <a:spLocks noGrp="1" noRot="1" noChangeAspect="1"/>
           </p:cNvSpPr>
           <p:nvPr>
             <p:ph type="sldImg"/>
@@ -885,7 +1251,7 @@
       </p:sp>
       <p:sp>
         <p:nvSpPr>
-          <p:cNvPr id="131" name="PlaceHolder 2"/>
+          <p:cNvPr id="134" name="PlaceHolder 2"/>
           <p:cNvSpPr>
             <a:spLocks noGrp="1"/>
           </p:cNvSpPr>
@@ -907,19 +1273,20 @@
           </a:ln>
         </p:spPr>
         <p:txBody>
-          <a:bodyPr lIns="0" rIns="0" tIns="0" bIns="0" anchor="t">
+          <a:bodyPr lIns="0" tIns="0" rIns="0" bIns="0" anchor="t">
             <a:noAutofit/>
           </a:bodyPr>
-          <a:p>
-            <a:endParaRPr b="0" lang="en-GB" sz="2000" spc="-1" strike="noStrike">
-              <a:latin typeface="Arial"/>
-            </a:endParaRPr>
-          </a:p>
-        </p:txBody>
-      </p:sp>
-      <p:sp>
-        <p:nvSpPr>
-          <p:cNvPr id="132" name="TextShape 3"/>
+          <a:lstStyle/>
+          <a:p>
+            <a:endParaRPr lang="en-GB" sz="2000" b="0" strike="noStrike" spc="-1">
+              <a:latin typeface="Arial"/>
+            </a:endParaRPr>
+          </a:p>
+        </p:txBody>
+      </p:sp>
+      <p:sp>
+        <p:nvSpPr>
+          <p:cNvPr id="135" name="TextShape 15"/>
           <p:cNvSpPr/>
           <p:nvPr/>
         </p:nvSpPr>
@@ -937,15 +1304,22 @@
           </a:ln>
         </p:spPr>
         <p:style>
-          <a:lnRef idx="0"/>
-          <a:fillRef idx="0"/>
-          <a:effectRef idx="0"/>
+          <a:lnRef idx="0">
+            <a:scrgbClr r="0" g="0" b="0"/>
+          </a:lnRef>
+          <a:fillRef idx="0">
+            <a:scrgbClr r="0" g="0" b="0"/>
+          </a:fillRef>
+          <a:effectRef idx="0">
+            <a:scrgbClr r="0" g="0" b="0"/>
+          </a:effectRef>
           <a:fontRef idx="minor"/>
         </p:style>
         <p:txBody>
-          <a:bodyPr lIns="90000" rIns="90000" tIns="45000" bIns="45000" anchor="b">
+          <a:bodyPr lIns="90000" tIns="45000" rIns="90000" bIns="45000" anchor="b">
             <a:noAutofit/>
           </a:bodyPr>
+          <a:lstStyle/>
           <a:p>
             <a:pPr algn="r">
               <a:lnSpc>
@@ -953,17 +1327,17 @@
               </a:lnSpc>
               <a:buNone/>
             </a:pPr>
-            <a:fld id="{EA8463D7-41AC-4267-9602-24654C4AEE8E}" type="slidenum">
-              <a:rPr b="0" lang="en-GB" sz="1200" spc="-1" strike="noStrike">
+            <a:fld id="{CED96846-5378-4DBC-9604-B5E6FC1B20A2}" type="slidenum">
+              <a:rPr lang="en-GB" sz="1200" b="0" strike="noStrike" spc="-1">
                 <a:solidFill>
                   <a:srgbClr val="000000"/>
                 </a:solidFill>
                 <a:latin typeface="+mn-lt"/>
                 <a:ea typeface="+mn-ea"/>
               </a:rPr>
-              <a:t>&lt;number&gt;</a:t>
+              <a:t>8</a:t>
             </a:fld>
-            <a:endParaRPr b="0" lang="en-GB" sz="1200" spc="-1" strike="noStrike">
+            <a:endParaRPr lang="en-GB" sz="1200" b="0" strike="noStrike" spc="-1">
               <a:latin typeface="Arial"/>
             </a:endParaRPr>
           </a:p>
@@ -971,11 +1345,14 @@
       </p:sp>
     </p:spTree>
   </p:cSld>
+  <p:clrMapOvr>
+    <a:masterClrMapping/>
+  </p:clrMapOvr>
 </p:notes>
 </file>
 
-<file path=ppt/notesSlides/notesSlide8.xml><?xml version="1.0" encoding="utf-8"?>
-<p:notes xmlns:a="http://schemas.openxmlformats.org/drawingml/2006/main" xmlns:p="http://schemas.openxmlformats.org/presentationml/2006/main" xmlns:r="http://schemas.openxmlformats.org/officeDocument/2006/relationships" xmlns:p14="http://schemas.microsoft.com/office/powerpoint/2010/main" xmlns:p15="http://schemas.microsoft.com/office/powerpoint/2012/main" xmlns:mc="http://schemas.openxmlformats.org/markup-compatibility/2006">
+<file path=ppt/notesSlides/notesSlide7.xml><?xml version="1.0" encoding="utf-8"?>
+<p:notes xmlns:a="http://schemas.openxmlformats.org/drawingml/2006/main" xmlns:r="http://schemas.openxmlformats.org/officeDocument/2006/relationships" xmlns:p="http://schemas.openxmlformats.org/presentationml/2006/main">
   <p:cSld>
     <p:spTree>
       <p:nvGrpSpPr>
@@ -993,140 +1370,9 @@
       </p:grpSpPr>
       <p:sp>
         <p:nvSpPr>
-          <p:cNvPr id="133" name="PlaceHolder 1"/>
-          <p:cNvSpPr>
-            <a:spLocks noGrp="1"/>
-          </p:cNvSpPr>
-          <p:nvPr>
-            <p:ph type="sldImg"/>
-          </p:nvPr>
-        </p:nvSpPr>
-        <p:spPr>
-          <a:xfrm>
-            <a:off x="685800" y="1143000"/>
-            <a:ext cx="5483160" cy="3083040"/>
-          </a:xfrm>
-          <a:prstGeom prst="rect">
-            <a:avLst/>
-          </a:prstGeom>
-          <a:ln w="0">
-            <a:noFill/>
-          </a:ln>
-        </p:spPr>
-      </p:sp>
-      <p:sp>
-        <p:nvSpPr>
-          <p:cNvPr id="134" name="PlaceHolder 2"/>
-          <p:cNvSpPr>
-            <a:spLocks noGrp="1"/>
-          </p:cNvSpPr>
-          <p:nvPr>
-            <p:ph type="body"/>
-          </p:nvPr>
-        </p:nvSpPr>
-        <p:spPr>
-          <a:xfrm>
-            <a:off x="685800" y="4400640"/>
-            <a:ext cx="5482800" cy="3596760"/>
-          </a:xfrm>
-          <a:prstGeom prst="rect">
-            <a:avLst/>
-          </a:prstGeom>
-          <a:noFill/>
-          <a:ln w="0">
-            <a:noFill/>
-          </a:ln>
-        </p:spPr>
-        <p:txBody>
-          <a:bodyPr lIns="0" rIns="0" tIns="0" bIns="0" anchor="t">
-            <a:noAutofit/>
-          </a:bodyPr>
-          <a:p>
-            <a:endParaRPr b="0" lang="en-GB" sz="2000" spc="-1" strike="noStrike">
-              <a:latin typeface="Arial"/>
-            </a:endParaRPr>
-          </a:p>
-        </p:txBody>
-      </p:sp>
-      <p:sp>
-        <p:nvSpPr>
-          <p:cNvPr id="135" name="TextShape 15"/>
-          <p:cNvSpPr/>
-          <p:nvPr/>
-        </p:nvSpPr>
-        <p:spPr>
-          <a:xfrm>
-            <a:off x="3884760" y="8685360"/>
-            <a:ext cx="2968200" cy="455040"/>
-          </a:xfrm>
-          <a:prstGeom prst="rect">
-            <a:avLst/>
-          </a:prstGeom>
-          <a:noFill/>
-          <a:ln w="0">
-            <a:noFill/>
-          </a:ln>
-        </p:spPr>
-        <p:style>
-          <a:lnRef idx="0"/>
-          <a:fillRef idx="0"/>
-          <a:effectRef idx="0"/>
-          <a:fontRef idx="minor"/>
-        </p:style>
-        <p:txBody>
-          <a:bodyPr lIns="90000" rIns="90000" tIns="45000" bIns="45000" anchor="b">
-            <a:noAutofit/>
-          </a:bodyPr>
-          <a:p>
-            <a:pPr algn="r">
-              <a:lnSpc>
-                <a:spcPct val="100000"/>
-              </a:lnSpc>
-              <a:buNone/>
-            </a:pPr>
-            <a:fld id="{CED96846-5378-4DBC-9604-B5E6FC1B20A2}" type="slidenum">
-              <a:rPr b="0" lang="en-GB" sz="1200" spc="-1" strike="noStrike">
-                <a:solidFill>
-                  <a:srgbClr val="000000"/>
-                </a:solidFill>
-                <a:latin typeface="+mn-lt"/>
-                <a:ea typeface="+mn-ea"/>
-              </a:rPr>
-              <a:t>&lt;number&gt;</a:t>
-            </a:fld>
-            <a:endParaRPr b="0" lang="en-GB" sz="1200" spc="-1" strike="noStrike">
-              <a:latin typeface="Arial"/>
-            </a:endParaRPr>
-          </a:p>
-        </p:txBody>
-      </p:sp>
-    </p:spTree>
-  </p:cSld>
-</p:notes>
-</file>
-
-<file path=ppt/notesSlides/notesSlide9.xml><?xml version="1.0" encoding="utf-8"?>
-<p:notes xmlns:a="http://schemas.openxmlformats.org/drawingml/2006/main" xmlns:p="http://schemas.openxmlformats.org/presentationml/2006/main" xmlns:r="http://schemas.openxmlformats.org/officeDocument/2006/relationships" xmlns:p14="http://schemas.microsoft.com/office/powerpoint/2010/main" xmlns:p15="http://schemas.microsoft.com/office/powerpoint/2012/main" xmlns:mc="http://schemas.openxmlformats.org/markup-compatibility/2006">
-  <p:cSld>
-    <p:spTree>
-      <p:nvGrpSpPr>
-        <p:cNvPr id="1" name=""/>
-        <p:cNvGrpSpPr/>
-        <p:nvPr/>
-      </p:nvGrpSpPr>
-      <p:grpSpPr>
-        <a:xfrm>
-          <a:off x="0" y="0"/>
-          <a:ext cx="0" cy="0"/>
-          <a:chOff x="0" y="0"/>
-          <a:chExt cx="0" cy="0"/>
-        </a:xfrm>
-      </p:grpSpPr>
-      <p:sp>
-        <p:nvSpPr>
           <p:cNvPr id="136" name="PlaceHolder 1"/>
           <p:cNvSpPr>
-            <a:spLocks noGrp="1"/>
+            <a:spLocks noGrp="1" noRot="1" noChangeAspect="1"/>
           </p:cNvSpPr>
           <p:nvPr>
             <p:ph type="sldImg"/>
@@ -1169,11 +1415,12 @@
           </a:ln>
         </p:spPr>
         <p:txBody>
-          <a:bodyPr lIns="0" rIns="0" tIns="0" bIns="0" anchor="t">
+          <a:bodyPr lIns="0" tIns="0" rIns="0" bIns="0" anchor="t">
             <a:noAutofit/>
           </a:bodyPr>
-          <a:p>
-            <a:endParaRPr b="0" lang="en-GB" sz="2000" spc="-1" strike="noStrike">
+          <a:lstStyle/>
+          <a:p>
+            <a:endParaRPr lang="en-GB" sz="2000" b="0" strike="noStrike" spc="-1">
               <a:latin typeface="Arial"/>
             </a:endParaRPr>
           </a:p>
@@ -1199,15 +1446,22 @@
           </a:ln>
         </p:spPr>
         <p:style>
-          <a:lnRef idx="0"/>
-          <a:fillRef idx="0"/>
-          <a:effectRef idx="0"/>
+          <a:lnRef idx="0">
+            <a:scrgbClr r="0" g="0" b="0"/>
+          </a:lnRef>
+          <a:fillRef idx="0">
+            <a:scrgbClr r="0" g="0" b="0"/>
+          </a:fillRef>
+          <a:effectRef idx="0">
+            <a:scrgbClr r="0" g="0" b="0"/>
+          </a:effectRef>
           <a:fontRef idx="minor"/>
         </p:style>
         <p:txBody>
-          <a:bodyPr lIns="90000" rIns="90000" tIns="45000" bIns="45000" anchor="b">
+          <a:bodyPr lIns="90000" tIns="45000" rIns="90000" bIns="45000" anchor="b">
             <a:noAutofit/>
           </a:bodyPr>
+          <a:lstStyle/>
           <a:p>
             <a:pPr algn="r">
               <a:lnSpc>
@@ -1216,16 +1470,16 @@
               <a:buNone/>
             </a:pPr>
             <a:fld id="{78300936-0C3B-4509-92E2-B58B5A9BFDE3}" type="slidenum">
-              <a:rPr b="0" lang="en-GB" sz="1200" spc="-1" strike="noStrike">
+              <a:rPr lang="en-GB" sz="1200" b="0" strike="noStrike" spc="-1">
                 <a:solidFill>
                   <a:srgbClr val="000000"/>
                 </a:solidFill>
                 <a:latin typeface="+mn-lt"/>
                 <a:ea typeface="+mn-ea"/>
               </a:rPr>
-              <a:t>&lt;number&gt;</a:t>
+              <a:t>9</a:t>
             </a:fld>
-            <a:endParaRPr b="0" lang="en-GB" sz="1200" spc="-1" strike="noStrike">
+            <a:endParaRPr lang="en-GB" sz="1200" b="0" strike="noStrike" spc="-1">
               <a:latin typeface="Arial"/>
             </a:endParaRPr>
           </a:p>
@@ -1233,11 +1487,14 @@
       </p:sp>
     </p:spTree>
   </p:cSld>
+  <p:clrMapOvr>
+    <a:masterClrMapping/>
+  </p:clrMapOvr>
 </p:notes>
 </file>
 
 <file path=ppt/slideLayouts/slideLayout1.xml><?xml version="1.0" encoding="utf-8"?>
-<p:sldLayout xmlns:a="http://schemas.openxmlformats.org/drawingml/2006/main" xmlns:p="http://schemas.openxmlformats.org/presentationml/2006/main" xmlns:r="http://schemas.openxmlformats.org/officeDocument/2006/relationships" xmlns:p14="http://schemas.microsoft.com/office/powerpoint/2010/main" xmlns:p15="http://schemas.microsoft.com/office/powerpoint/2012/main" xmlns:mc="http://schemas.openxmlformats.org/markup-compatibility/2006" type="blank" preserve="1">
+<p:sldLayout xmlns:a="http://schemas.openxmlformats.org/drawingml/2006/main" xmlns:r="http://schemas.openxmlformats.org/officeDocument/2006/relationships" xmlns:p="http://schemas.openxmlformats.org/presentationml/2006/main" type="blank" preserve="1">
   <p:cSld name="Blank Slide">
     <p:spTree>
       <p:nvGrpSpPr>
@@ -1255,11 +1512,14 @@
       </p:grpSpPr>
     </p:spTree>
   </p:cSld>
+  <p:clrMapOvr>
+    <a:masterClrMapping/>
+  </p:clrMapOvr>
 </p:sldLayout>
 </file>
 
 <file path=ppt/slideLayouts/slideLayout10.xml><?xml version="1.0" encoding="utf-8"?>
-<p:sldLayout xmlns:a="http://schemas.openxmlformats.org/drawingml/2006/main" xmlns:p="http://schemas.openxmlformats.org/presentationml/2006/main" xmlns:r="http://schemas.openxmlformats.org/officeDocument/2006/relationships" xmlns:p14="http://schemas.microsoft.com/office/powerpoint/2010/main" xmlns:p15="http://schemas.microsoft.com/office/powerpoint/2012/main" xmlns:mc="http://schemas.openxmlformats.org/markup-compatibility/2006" type="objOverTx" preserve="1">
+<p:sldLayout xmlns:a="http://schemas.openxmlformats.org/drawingml/2006/main" xmlns:r="http://schemas.openxmlformats.org/officeDocument/2006/relationships" xmlns:p="http://schemas.openxmlformats.org/presentationml/2006/main" type="objOverTx" preserve="1">
   <p:cSld name="Title, Content over Content">
     <p:spTree>
       <p:nvGrpSpPr>
@@ -1299,14 +1559,15 @@
           </a:ln>
         </p:spPr>
         <p:txBody>
-          <a:bodyPr lIns="0" rIns="0" tIns="0" bIns="0" anchor="ctr">
+          <a:bodyPr lIns="0" tIns="0" rIns="0" bIns="0" anchor="ctr">
             <a:noAutofit/>
           </a:bodyPr>
+          <a:lstStyle/>
           <a:p>
             <a:pPr algn="ctr">
               <a:buNone/>
             </a:pPr>
-            <a:endParaRPr b="0" lang="en-GB" sz="4400" spc="-1" strike="noStrike">
+            <a:endParaRPr lang="en-GB" sz="4400" b="0" strike="noStrike" spc="-1">
               <a:latin typeface="Arial"/>
             </a:endParaRPr>
           </a:p>
@@ -1336,11 +1597,12 @@
           </a:ln>
         </p:spPr>
         <p:txBody>
-          <a:bodyPr lIns="0" rIns="0" tIns="0" bIns="0" anchor="t">
+          <a:bodyPr lIns="0" tIns="0" rIns="0" bIns="0" anchor="t">
             <a:normAutofit/>
           </a:bodyPr>
-          <a:p>
-            <a:endParaRPr b="0" lang="en-GB" sz="3200" spc="-1" strike="noStrike">
+          <a:lstStyle/>
+          <a:p>
+            <a:endParaRPr lang="en-GB" sz="3200" b="0" strike="noStrike" spc="-1">
               <a:latin typeface="Arial"/>
             </a:endParaRPr>
           </a:p>
@@ -1370,11 +1632,12 @@
           </a:ln>
         </p:spPr>
         <p:txBody>
-          <a:bodyPr lIns="0" rIns="0" tIns="0" bIns="0" anchor="t">
+          <a:bodyPr lIns="0" tIns="0" rIns="0" bIns="0" anchor="t">
             <a:normAutofit/>
           </a:bodyPr>
-          <a:p>
-            <a:endParaRPr b="0" lang="en-GB" sz="3200" spc="-1" strike="noStrike">
+          <a:lstStyle/>
+          <a:p>
+            <a:endParaRPr lang="en-GB" sz="3200" b="0" strike="noStrike" spc="-1">
               <a:latin typeface="Arial"/>
             </a:endParaRPr>
           </a:p>
@@ -1382,11 +1645,14 @@
       </p:sp>
     </p:spTree>
   </p:cSld>
+  <p:clrMapOvr>
+    <a:masterClrMapping/>
+  </p:clrMapOvr>
 </p:sldLayout>
 </file>
 
 <file path=ppt/slideLayouts/slideLayout11.xml><?xml version="1.0" encoding="utf-8"?>
-<p:sldLayout xmlns:a="http://schemas.openxmlformats.org/drawingml/2006/main" xmlns:p="http://schemas.openxmlformats.org/presentationml/2006/main" xmlns:r="http://schemas.openxmlformats.org/officeDocument/2006/relationships" xmlns:p14="http://schemas.microsoft.com/office/powerpoint/2010/main" xmlns:p15="http://schemas.microsoft.com/office/powerpoint/2012/main" xmlns:mc="http://schemas.openxmlformats.org/markup-compatibility/2006" type="fourObj" preserve="1">
+<p:sldLayout xmlns:a="http://schemas.openxmlformats.org/drawingml/2006/main" xmlns:r="http://schemas.openxmlformats.org/officeDocument/2006/relationships" xmlns:p="http://schemas.openxmlformats.org/presentationml/2006/main" type="fourObj" preserve="1">
   <p:cSld name="Title, 4 Content">
     <p:spTree>
       <p:nvGrpSpPr>
@@ -1426,14 +1692,15 @@
           </a:ln>
         </p:spPr>
         <p:txBody>
-          <a:bodyPr lIns="0" rIns="0" tIns="0" bIns="0" anchor="ctr">
+          <a:bodyPr lIns="0" tIns="0" rIns="0" bIns="0" anchor="ctr">
             <a:noAutofit/>
           </a:bodyPr>
+          <a:lstStyle/>
           <a:p>
             <a:pPr algn="ctr">
               <a:buNone/>
             </a:pPr>
-            <a:endParaRPr b="0" lang="en-GB" sz="4400" spc="-1" strike="noStrike">
+            <a:endParaRPr lang="en-GB" sz="4400" b="0" strike="noStrike" spc="-1">
               <a:latin typeface="Arial"/>
             </a:endParaRPr>
           </a:p>
@@ -1463,11 +1730,12 @@
           </a:ln>
         </p:spPr>
         <p:txBody>
-          <a:bodyPr lIns="0" rIns="0" tIns="0" bIns="0" anchor="t">
+          <a:bodyPr lIns="0" tIns="0" rIns="0" bIns="0" anchor="t">
             <a:normAutofit/>
           </a:bodyPr>
-          <a:p>
-            <a:endParaRPr b="0" lang="en-GB" sz="3200" spc="-1" strike="noStrike">
+          <a:lstStyle/>
+          <a:p>
+            <a:endParaRPr lang="en-GB" sz="3200" b="0" strike="noStrike" spc="-1">
               <a:latin typeface="Arial"/>
             </a:endParaRPr>
           </a:p>
@@ -1497,11 +1765,12 @@
           </a:ln>
         </p:spPr>
         <p:txBody>
-          <a:bodyPr lIns="0" rIns="0" tIns="0" bIns="0" anchor="t">
+          <a:bodyPr lIns="0" tIns="0" rIns="0" bIns="0" anchor="t">
             <a:normAutofit/>
           </a:bodyPr>
-          <a:p>
-            <a:endParaRPr b="0" lang="en-GB" sz="3200" spc="-1" strike="noStrike">
+          <a:lstStyle/>
+          <a:p>
+            <a:endParaRPr lang="en-GB" sz="3200" b="0" strike="noStrike" spc="-1">
               <a:latin typeface="Arial"/>
             </a:endParaRPr>
           </a:p>
@@ -1531,11 +1800,12 @@
           </a:ln>
         </p:spPr>
         <p:txBody>
-          <a:bodyPr lIns="0" rIns="0" tIns="0" bIns="0" anchor="t">
+          <a:bodyPr lIns="0" tIns="0" rIns="0" bIns="0" anchor="t">
             <a:normAutofit/>
           </a:bodyPr>
-          <a:p>
-            <a:endParaRPr b="0" lang="en-GB" sz="3200" spc="-1" strike="noStrike">
+          <a:lstStyle/>
+          <a:p>
+            <a:endParaRPr lang="en-GB" sz="3200" b="0" strike="noStrike" spc="-1">
               <a:latin typeface="Arial"/>
             </a:endParaRPr>
           </a:p>
@@ -1565,11 +1835,12 @@
           </a:ln>
         </p:spPr>
         <p:txBody>
-          <a:bodyPr lIns="0" rIns="0" tIns="0" bIns="0" anchor="t">
+          <a:bodyPr lIns="0" tIns="0" rIns="0" bIns="0" anchor="t">
             <a:normAutofit/>
           </a:bodyPr>
-          <a:p>
-            <a:endParaRPr b="0" lang="en-GB" sz="3200" spc="-1" strike="noStrike">
+          <a:lstStyle/>
+          <a:p>
+            <a:endParaRPr lang="en-GB" sz="3200" b="0" strike="noStrike" spc="-1">
               <a:latin typeface="Arial"/>
             </a:endParaRPr>
           </a:p>
@@ -1577,11 +1848,14 @@
       </p:sp>
     </p:spTree>
   </p:cSld>
+  <p:clrMapOvr>
+    <a:masterClrMapping/>
+  </p:clrMapOvr>
 </p:sldLayout>
 </file>
 
 <file path=ppt/slideLayouts/slideLayout12.xml><?xml version="1.0" encoding="utf-8"?>
-<p:sldLayout xmlns:a="http://schemas.openxmlformats.org/drawingml/2006/main" xmlns:p="http://schemas.openxmlformats.org/presentationml/2006/main" xmlns:r="http://schemas.openxmlformats.org/officeDocument/2006/relationships" xmlns:p14="http://schemas.microsoft.com/office/powerpoint/2010/main" xmlns:p15="http://schemas.microsoft.com/office/powerpoint/2012/main" xmlns:mc="http://schemas.openxmlformats.org/markup-compatibility/2006" type="blank" preserve="1">
+<p:sldLayout xmlns:a="http://schemas.openxmlformats.org/drawingml/2006/main" xmlns:r="http://schemas.openxmlformats.org/officeDocument/2006/relationships" xmlns:p="http://schemas.openxmlformats.org/presentationml/2006/main" type="blank" preserve="1">
   <p:cSld name="Title, 6 Content">
     <p:spTree>
       <p:nvGrpSpPr>
@@ -1621,14 +1895,15 @@
           </a:ln>
         </p:spPr>
         <p:txBody>
-          <a:bodyPr lIns="0" rIns="0" tIns="0" bIns="0" anchor="ctr">
+          <a:bodyPr lIns="0" tIns="0" rIns="0" bIns="0" anchor="ctr">
             <a:noAutofit/>
           </a:bodyPr>
+          <a:lstStyle/>
           <a:p>
             <a:pPr algn="ctr">
               <a:buNone/>
             </a:pPr>
-            <a:endParaRPr b="0" lang="en-GB" sz="4400" spc="-1" strike="noStrike">
+            <a:endParaRPr lang="en-GB" sz="4400" b="0" strike="noStrike" spc="-1">
               <a:latin typeface="Arial"/>
             </a:endParaRPr>
           </a:p>
@@ -1658,11 +1933,12 @@
           </a:ln>
         </p:spPr>
         <p:txBody>
-          <a:bodyPr lIns="0" rIns="0" tIns="0" bIns="0" anchor="t">
+          <a:bodyPr lIns="0" tIns="0" rIns="0" bIns="0" anchor="t">
             <a:normAutofit/>
           </a:bodyPr>
-          <a:p>
-            <a:endParaRPr b="0" lang="en-GB" sz="3200" spc="-1" strike="noStrike">
+          <a:lstStyle/>
+          <a:p>
+            <a:endParaRPr lang="en-GB" sz="3200" b="0" strike="noStrike" spc="-1">
               <a:latin typeface="Arial"/>
             </a:endParaRPr>
           </a:p>
@@ -1692,11 +1968,12 @@
           </a:ln>
         </p:spPr>
         <p:txBody>
-          <a:bodyPr lIns="0" rIns="0" tIns="0" bIns="0" anchor="t">
+          <a:bodyPr lIns="0" tIns="0" rIns="0" bIns="0" anchor="t">
             <a:normAutofit/>
           </a:bodyPr>
-          <a:p>
-            <a:endParaRPr b="0" lang="en-GB" sz="3200" spc="-1" strike="noStrike">
+          <a:lstStyle/>
+          <a:p>
+            <a:endParaRPr lang="en-GB" sz="3200" b="0" strike="noStrike" spc="-1">
               <a:latin typeface="Arial"/>
             </a:endParaRPr>
           </a:p>
@@ -1726,11 +2003,12 @@
           </a:ln>
         </p:spPr>
         <p:txBody>
-          <a:bodyPr lIns="0" rIns="0" tIns="0" bIns="0" anchor="t">
+          <a:bodyPr lIns="0" tIns="0" rIns="0" bIns="0" anchor="t">
             <a:normAutofit/>
           </a:bodyPr>
-          <a:p>
-            <a:endParaRPr b="0" lang="en-GB" sz="3200" spc="-1" strike="noStrike">
+          <a:lstStyle/>
+          <a:p>
+            <a:endParaRPr lang="en-GB" sz="3200" b="0" strike="noStrike" spc="-1">
               <a:latin typeface="Arial"/>
             </a:endParaRPr>
           </a:p>
@@ -1760,11 +2038,12 @@
           </a:ln>
         </p:spPr>
         <p:txBody>
-          <a:bodyPr lIns="0" rIns="0" tIns="0" bIns="0" anchor="t">
+          <a:bodyPr lIns="0" tIns="0" rIns="0" bIns="0" anchor="t">
             <a:normAutofit/>
           </a:bodyPr>
-          <a:p>
-            <a:endParaRPr b="0" lang="en-GB" sz="3200" spc="-1" strike="noStrike">
+          <a:lstStyle/>
+          <a:p>
+            <a:endParaRPr lang="en-GB" sz="3200" b="0" strike="noStrike" spc="-1">
               <a:latin typeface="Arial"/>
             </a:endParaRPr>
           </a:p>
@@ -1794,11 +2073,12 @@
           </a:ln>
         </p:spPr>
         <p:txBody>
-          <a:bodyPr lIns="0" rIns="0" tIns="0" bIns="0" anchor="t">
+          <a:bodyPr lIns="0" tIns="0" rIns="0" bIns="0" anchor="t">
             <a:normAutofit/>
           </a:bodyPr>
-          <a:p>
-            <a:endParaRPr b="0" lang="en-GB" sz="3200" spc="-1" strike="noStrike">
+          <a:lstStyle/>
+          <a:p>
+            <a:endParaRPr lang="en-GB" sz="3200" b="0" strike="noStrike" spc="-1">
               <a:latin typeface="Arial"/>
             </a:endParaRPr>
           </a:p>
@@ -1828,11 +2108,12 @@
           </a:ln>
         </p:spPr>
         <p:txBody>
-          <a:bodyPr lIns="0" rIns="0" tIns="0" bIns="0" anchor="t">
+          <a:bodyPr lIns="0" tIns="0" rIns="0" bIns="0" anchor="t">
             <a:normAutofit/>
           </a:bodyPr>
-          <a:p>
-            <a:endParaRPr b="0" lang="en-GB" sz="3200" spc="-1" strike="noStrike">
+          <a:lstStyle/>
+          <a:p>
+            <a:endParaRPr lang="en-GB" sz="3200" b="0" strike="noStrike" spc="-1">
               <a:latin typeface="Arial"/>
             </a:endParaRPr>
           </a:p>
@@ -1840,11 +2121,14 @@
       </p:sp>
     </p:spTree>
   </p:cSld>
+  <p:clrMapOvr>
+    <a:masterClrMapping/>
+  </p:clrMapOvr>
 </p:sldLayout>
 </file>
 
 <file path=ppt/slideLayouts/slideLayout13.xml><?xml version="1.0" encoding="utf-8"?>
-<p:sldLayout xmlns:a="http://schemas.openxmlformats.org/drawingml/2006/main" xmlns:p="http://schemas.openxmlformats.org/presentationml/2006/main" xmlns:r="http://schemas.openxmlformats.org/officeDocument/2006/relationships" xmlns:p14="http://schemas.microsoft.com/office/powerpoint/2010/main" xmlns:p15="http://schemas.microsoft.com/office/powerpoint/2012/main" xmlns:mc="http://schemas.openxmlformats.org/markup-compatibility/2006" type="blank" preserve="1">
+<p:sldLayout xmlns:a="http://schemas.openxmlformats.org/drawingml/2006/main" xmlns:r="http://schemas.openxmlformats.org/officeDocument/2006/relationships" xmlns:p="http://schemas.openxmlformats.org/presentationml/2006/main" type="blank" preserve="1">
   <p:cSld name="Blank Slide">
     <p:spTree>
       <p:nvGrpSpPr>
@@ -1862,11 +2146,14 @@
       </p:grpSpPr>
     </p:spTree>
   </p:cSld>
+  <p:clrMapOvr>
+    <a:masterClrMapping/>
+  </p:clrMapOvr>
 </p:sldLayout>
 </file>
 
 <file path=ppt/slideLayouts/slideLayout14.xml><?xml version="1.0" encoding="utf-8"?>
-<p:sldLayout xmlns:a="http://schemas.openxmlformats.org/drawingml/2006/main" xmlns:p="http://schemas.openxmlformats.org/presentationml/2006/main" xmlns:r="http://schemas.openxmlformats.org/officeDocument/2006/relationships" xmlns:p14="http://schemas.microsoft.com/office/powerpoint/2010/main" xmlns:p15="http://schemas.microsoft.com/office/powerpoint/2012/main" xmlns:mc="http://schemas.openxmlformats.org/markup-compatibility/2006" type="tx" preserve="1">
+<p:sldLayout xmlns:a="http://schemas.openxmlformats.org/drawingml/2006/main" xmlns:r="http://schemas.openxmlformats.org/officeDocument/2006/relationships" xmlns:p="http://schemas.openxmlformats.org/presentationml/2006/main" type="tx" preserve="1">
   <p:cSld name="Title Slide">
     <p:spTree>
       <p:nvGrpSpPr>
@@ -1906,14 +2193,15 @@
           </a:ln>
         </p:spPr>
         <p:txBody>
-          <a:bodyPr lIns="0" rIns="0" tIns="0" bIns="0" anchor="ctr">
+          <a:bodyPr lIns="0" tIns="0" rIns="0" bIns="0" anchor="ctr">
             <a:noAutofit/>
           </a:bodyPr>
+          <a:lstStyle/>
           <a:p>
             <a:pPr algn="ctr">
               <a:buNone/>
             </a:pPr>
-            <a:endParaRPr b="0" lang="en-GB" sz="4400" spc="-1" strike="noStrike">
+            <a:endParaRPr lang="en-GB" sz="4400" b="0" strike="noStrike" spc="-1">
               <a:latin typeface="Arial"/>
             </a:endParaRPr>
           </a:p>
@@ -1943,14 +2231,15 @@
           </a:ln>
         </p:spPr>
         <p:txBody>
-          <a:bodyPr lIns="0" rIns="0" tIns="0" bIns="0" anchor="ctr">
+          <a:bodyPr lIns="0" tIns="0" rIns="0" bIns="0" anchor="ctr">
             <a:noAutofit/>
           </a:bodyPr>
+          <a:lstStyle/>
           <a:p>
             <a:pPr algn="ctr">
               <a:buNone/>
             </a:pPr>
-            <a:endParaRPr b="0" lang="en-GB" sz="3200" spc="-1" strike="noStrike">
+            <a:endParaRPr lang="en-GB" sz="3200" b="0" strike="noStrike" spc="-1">
               <a:latin typeface="Arial"/>
             </a:endParaRPr>
           </a:p>
@@ -1958,11 +2247,14 @@
       </p:sp>
     </p:spTree>
   </p:cSld>
+  <p:clrMapOvr>
+    <a:masterClrMapping/>
+  </p:clrMapOvr>
 </p:sldLayout>
 </file>
 
 <file path=ppt/slideLayouts/slideLayout15.xml><?xml version="1.0" encoding="utf-8"?>
-<p:sldLayout xmlns:a="http://schemas.openxmlformats.org/drawingml/2006/main" xmlns:p="http://schemas.openxmlformats.org/presentationml/2006/main" xmlns:r="http://schemas.openxmlformats.org/officeDocument/2006/relationships" xmlns:p14="http://schemas.microsoft.com/office/powerpoint/2010/main" xmlns:p15="http://schemas.microsoft.com/office/powerpoint/2012/main" xmlns:mc="http://schemas.openxmlformats.org/markup-compatibility/2006" type="obj" preserve="1">
+<p:sldLayout xmlns:a="http://schemas.openxmlformats.org/drawingml/2006/main" xmlns:r="http://schemas.openxmlformats.org/officeDocument/2006/relationships" xmlns:p="http://schemas.openxmlformats.org/presentationml/2006/main" type="obj" preserve="1">
   <p:cSld name="Title, Content">
     <p:spTree>
       <p:nvGrpSpPr>
@@ -2002,14 +2294,15 @@
           </a:ln>
         </p:spPr>
         <p:txBody>
-          <a:bodyPr lIns="0" rIns="0" tIns="0" bIns="0" anchor="ctr">
+          <a:bodyPr lIns="0" tIns="0" rIns="0" bIns="0" anchor="ctr">
             <a:noAutofit/>
           </a:bodyPr>
+          <a:lstStyle/>
           <a:p>
             <a:pPr algn="ctr">
               <a:buNone/>
             </a:pPr>
-            <a:endParaRPr b="0" lang="en-GB" sz="4400" spc="-1" strike="noStrike">
+            <a:endParaRPr lang="en-GB" sz="4400" b="0" strike="noStrike" spc="-1">
               <a:latin typeface="Arial"/>
             </a:endParaRPr>
           </a:p>
@@ -2039,11 +2332,12 @@
           </a:ln>
         </p:spPr>
         <p:txBody>
-          <a:bodyPr lIns="0" rIns="0" tIns="0" bIns="0" anchor="t">
+          <a:bodyPr lIns="0" tIns="0" rIns="0" bIns="0" anchor="t">
             <a:normAutofit/>
           </a:bodyPr>
-          <a:p>
-            <a:endParaRPr b="0" lang="en-GB" sz="3200" spc="-1" strike="noStrike">
+          <a:lstStyle/>
+          <a:p>
+            <a:endParaRPr lang="en-GB" sz="3200" b="0" strike="noStrike" spc="-1">
               <a:latin typeface="Arial"/>
             </a:endParaRPr>
           </a:p>
@@ -2051,11 +2345,14 @@
       </p:sp>
     </p:spTree>
   </p:cSld>
+  <p:clrMapOvr>
+    <a:masterClrMapping/>
+  </p:clrMapOvr>
 </p:sldLayout>
 </file>
 
 <file path=ppt/slideLayouts/slideLayout16.xml><?xml version="1.0" encoding="utf-8"?>
-<p:sldLayout xmlns:a="http://schemas.openxmlformats.org/drawingml/2006/main" xmlns:p="http://schemas.openxmlformats.org/presentationml/2006/main" xmlns:r="http://schemas.openxmlformats.org/officeDocument/2006/relationships" xmlns:p14="http://schemas.microsoft.com/office/powerpoint/2010/main" xmlns:p15="http://schemas.microsoft.com/office/powerpoint/2012/main" xmlns:mc="http://schemas.openxmlformats.org/markup-compatibility/2006" type="twoObj" preserve="1">
+<p:sldLayout xmlns:a="http://schemas.openxmlformats.org/drawingml/2006/main" xmlns:r="http://schemas.openxmlformats.org/officeDocument/2006/relationships" xmlns:p="http://schemas.openxmlformats.org/presentationml/2006/main" type="twoObj" preserve="1">
   <p:cSld name="Title, 2 Content">
     <p:spTree>
       <p:nvGrpSpPr>
@@ -2095,14 +2392,15 @@
           </a:ln>
         </p:spPr>
         <p:txBody>
-          <a:bodyPr lIns="0" rIns="0" tIns="0" bIns="0" anchor="ctr">
+          <a:bodyPr lIns="0" tIns="0" rIns="0" bIns="0" anchor="ctr">
             <a:noAutofit/>
           </a:bodyPr>
+          <a:lstStyle/>
           <a:p>
             <a:pPr algn="ctr">
               <a:buNone/>
             </a:pPr>
-            <a:endParaRPr b="0" lang="en-GB" sz="4400" spc="-1" strike="noStrike">
+            <a:endParaRPr lang="en-GB" sz="4400" b="0" strike="noStrike" spc="-1">
               <a:latin typeface="Arial"/>
             </a:endParaRPr>
           </a:p>
@@ -2132,11 +2430,12 @@
           </a:ln>
         </p:spPr>
         <p:txBody>
-          <a:bodyPr lIns="0" rIns="0" tIns="0" bIns="0" anchor="t">
+          <a:bodyPr lIns="0" tIns="0" rIns="0" bIns="0" anchor="t">
             <a:normAutofit/>
           </a:bodyPr>
-          <a:p>
-            <a:endParaRPr b="0" lang="en-GB" sz="3200" spc="-1" strike="noStrike">
+          <a:lstStyle/>
+          <a:p>
+            <a:endParaRPr lang="en-GB" sz="3200" b="0" strike="noStrike" spc="-1">
               <a:latin typeface="Arial"/>
             </a:endParaRPr>
           </a:p>
@@ -2166,11 +2465,12 @@
           </a:ln>
         </p:spPr>
         <p:txBody>
-          <a:bodyPr lIns="0" rIns="0" tIns="0" bIns="0" anchor="t">
+          <a:bodyPr lIns="0" tIns="0" rIns="0" bIns="0" anchor="t">
             <a:normAutofit/>
           </a:bodyPr>
-          <a:p>
-            <a:endParaRPr b="0" lang="en-GB" sz="3200" spc="-1" strike="noStrike">
+          <a:lstStyle/>
+          <a:p>
+            <a:endParaRPr lang="en-GB" sz="3200" b="0" strike="noStrike" spc="-1">
               <a:latin typeface="Arial"/>
             </a:endParaRPr>
           </a:p>
@@ -2178,11 +2478,14 @@
       </p:sp>
     </p:spTree>
   </p:cSld>
+  <p:clrMapOvr>
+    <a:masterClrMapping/>
+  </p:clrMapOvr>
 </p:sldLayout>
 </file>
 
 <file path=ppt/slideLayouts/slideLayout17.xml><?xml version="1.0" encoding="utf-8"?>
-<p:sldLayout xmlns:a="http://schemas.openxmlformats.org/drawingml/2006/main" xmlns:p="http://schemas.openxmlformats.org/presentationml/2006/main" xmlns:r="http://schemas.openxmlformats.org/officeDocument/2006/relationships" xmlns:p14="http://schemas.microsoft.com/office/powerpoint/2010/main" xmlns:p15="http://schemas.microsoft.com/office/powerpoint/2012/main" xmlns:mc="http://schemas.openxmlformats.org/markup-compatibility/2006" type="titleOnly" preserve="1">
+<p:sldLayout xmlns:a="http://schemas.openxmlformats.org/drawingml/2006/main" xmlns:r="http://schemas.openxmlformats.org/officeDocument/2006/relationships" xmlns:p="http://schemas.openxmlformats.org/presentationml/2006/main" type="titleOnly" preserve="1">
   <p:cSld name="Title Only">
     <p:spTree>
       <p:nvGrpSpPr>
@@ -2222,14 +2525,15 @@
           </a:ln>
         </p:spPr>
         <p:txBody>
-          <a:bodyPr lIns="0" rIns="0" tIns="0" bIns="0" anchor="ctr">
+          <a:bodyPr lIns="0" tIns="0" rIns="0" bIns="0" anchor="ctr">
             <a:noAutofit/>
           </a:bodyPr>
+          <a:lstStyle/>
           <a:p>
             <a:pPr algn="ctr">
               <a:buNone/>
             </a:pPr>
-            <a:endParaRPr b="0" lang="en-GB" sz="4400" spc="-1" strike="noStrike">
+            <a:endParaRPr lang="en-GB" sz="4400" b="0" strike="noStrike" spc="-1">
               <a:latin typeface="Arial"/>
             </a:endParaRPr>
           </a:p>
@@ -2237,11 +2541,14 @@
       </p:sp>
     </p:spTree>
   </p:cSld>
+  <p:clrMapOvr>
+    <a:masterClrMapping/>
+  </p:clrMapOvr>
 </p:sldLayout>
 </file>
 
 <file path=ppt/slideLayouts/slideLayout18.xml><?xml version="1.0" encoding="utf-8"?>
-<p:sldLayout xmlns:a="http://schemas.openxmlformats.org/drawingml/2006/main" xmlns:p="http://schemas.openxmlformats.org/presentationml/2006/main" xmlns:r="http://schemas.openxmlformats.org/officeDocument/2006/relationships" xmlns:p14="http://schemas.microsoft.com/office/powerpoint/2010/main" xmlns:p15="http://schemas.microsoft.com/office/powerpoint/2012/main" xmlns:mc="http://schemas.openxmlformats.org/markup-compatibility/2006" type="objOnly" preserve="1">
+<p:sldLayout xmlns:a="http://schemas.openxmlformats.org/drawingml/2006/main" xmlns:r="http://schemas.openxmlformats.org/officeDocument/2006/relationships" xmlns:p="http://schemas.openxmlformats.org/presentationml/2006/main" type="objOnly" preserve="1">
   <p:cSld name="Centered Text">
     <p:spTree>
       <p:nvGrpSpPr>
@@ -2281,14 +2588,15 @@
           </a:ln>
         </p:spPr>
         <p:txBody>
-          <a:bodyPr lIns="0" rIns="0" tIns="0" bIns="0" anchor="ctr">
+          <a:bodyPr lIns="0" tIns="0" rIns="0" bIns="0" anchor="ctr">
             <a:noAutofit/>
           </a:bodyPr>
+          <a:lstStyle/>
           <a:p>
             <a:pPr algn="ctr">
               <a:buNone/>
             </a:pPr>
-            <a:endParaRPr b="0" lang="en-GB" sz="3200" spc="-1" strike="noStrike">
+            <a:endParaRPr lang="en-GB" sz="3200" b="0" strike="noStrike" spc="-1">
               <a:latin typeface="Arial"/>
             </a:endParaRPr>
           </a:p>
@@ -2296,11 +2604,14 @@
       </p:sp>
     </p:spTree>
   </p:cSld>
+  <p:clrMapOvr>
+    <a:masterClrMapping/>
+  </p:clrMapOvr>
 </p:sldLayout>
 </file>
 
 <file path=ppt/slideLayouts/slideLayout19.xml><?xml version="1.0" encoding="utf-8"?>
-<p:sldLayout xmlns:a="http://schemas.openxmlformats.org/drawingml/2006/main" xmlns:p="http://schemas.openxmlformats.org/presentationml/2006/main" xmlns:r="http://schemas.openxmlformats.org/officeDocument/2006/relationships" xmlns:p14="http://schemas.microsoft.com/office/powerpoint/2010/main" xmlns:p15="http://schemas.microsoft.com/office/powerpoint/2012/main" xmlns:mc="http://schemas.openxmlformats.org/markup-compatibility/2006" type="twoObjAndObj" preserve="1">
+<p:sldLayout xmlns:a="http://schemas.openxmlformats.org/drawingml/2006/main" xmlns:r="http://schemas.openxmlformats.org/officeDocument/2006/relationships" xmlns:p="http://schemas.openxmlformats.org/presentationml/2006/main" type="twoObjAndObj" preserve="1">
   <p:cSld name="Title, 2 Content and Content">
     <p:spTree>
       <p:nvGrpSpPr>
@@ -2340,14 +2651,15 @@
           </a:ln>
         </p:spPr>
         <p:txBody>
-          <a:bodyPr lIns="0" rIns="0" tIns="0" bIns="0" anchor="ctr">
+          <a:bodyPr lIns="0" tIns="0" rIns="0" bIns="0" anchor="ctr">
             <a:noAutofit/>
           </a:bodyPr>
+          <a:lstStyle/>
           <a:p>
             <a:pPr algn="ctr">
               <a:buNone/>
             </a:pPr>
-            <a:endParaRPr b="0" lang="en-GB" sz="4400" spc="-1" strike="noStrike">
+            <a:endParaRPr lang="en-GB" sz="4400" b="0" strike="noStrike" spc="-1">
               <a:latin typeface="Arial"/>
             </a:endParaRPr>
           </a:p>
@@ -2377,11 +2689,12 @@
           </a:ln>
         </p:spPr>
         <p:txBody>
-          <a:bodyPr lIns="0" rIns="0" tIns="0" bIns="0" anchor="t">
+          <a:bodyPr lIns="0" tIns="0" rIns="0" bIns="0" anchor="t">
             <a:normAutofit/>
           </a:bodyPr>
-          <a:p>
-            <a:endParaRPr b="0" lang="en-GB" sz="3200" spc="-1" strike="noStrike">
+          <a:lstStyle/>
+          <a:p>
+            <a:endParaRPr lang="en-GB" sz="3200" b="0" strike="noStrike" spc="-1">
               <a:latin typeface="Arial"/>
             </a:endParaRPr>
           </a:p>
@@ -2411,11 +2724,12 @@
           </a:ln>
         </p:spPr>
         <p:txBody>
-          <a:bodyPr lIns="0" rIns="0" tIns="0" bIns="0" anchor="t">
+          <a:bodyPr lIns="0" tIns="0" rIns="0" bIns="0" anchor="t">
             <a:normAutofit/>
           </a:bodyPr>
-          <a:p>
-            <a:endParaRPr b="0" lang="en-GB" sz="3200" spc="-1" strike="noStrike">
+          <a:lstStyle/>
+          <a:p>
+            <a:endParaRPr lang="en-GB" sz="3200" b="0" strike="noStrike" spc="-1">
               <a:latin typeface="Arial"/>
             </a:endParaRPr>
           </a:p>
@@ -2445,11 +2759,12 @@
           </a:ln>
         </p:spPr>
         <p:txBody>
-          <a:bodyPr lIns="0" rIns="0" tIns="0" bIns="0" anchor="t">
+          <a:bodyPr lIns="0" tIns="0" rIns="0" bIns="0" anchor="t">
             <a:normAutofit/>
           </a:bodyPr>
-          <a:p>
-            <a:endParaRPr b="0" lang="en-GB" sz="3200" spc="-1" strike="noStrike">
+          <a:lstStyle/>
+          <a:p>
+            <a:endParaRPr lang="en-GB" sz="3200" b="0" strike="noStrike" spc="-1">
               <a:latin typeface="Arial"/>
             </a:endParaRPr>
           </a:p>
@@ -2457,11 +2772,14 @@
       </p:sp>
     </p:spTree>
   </p:cSld>
+  <p:clrMapOvr>
+    <a:masterClrMapping/>
+  </p:clrMapOvr>
 </p:sldLayout>
 </file>
 
 <file path=ppt/slideLayouts/slideLayout2.xml><?xml version="1.0" encoding="utf-8"?>
-<p:sldLayout xmlns:a="http://schemas.openxmlformats.org/drawingml/2006/main" xmlns:p="http://schemas.openxmlformats.org/presentationml/2006/main" xmlns:r="http://schemas.openxmlformats.org/officeDocument/2006/relationships" xmlns:p14="http://schemas.microsoft.com/office/powerpoint/2010/main" xmlns:p15="http://schemas.microsoft.com/office/powerpoint/2012/main" xmlns:mc="http://schemas.openxmlformats.org/markup-compatibility/2006" type="tx" preserve="1">
+<p:sldLayout xmlns:a="http://schemas.openxmlformats.org/drawingml/2006/main" xmlns:r="http://schemas.openxmlformats.org/officeDocument/2006/relationships" xmlns:p="http://schemas.openxmlformats.org/presentationml/2006/main" type="tx" preserve="1">
   <p:cSld name="Title Slide">
     <p:spTree>
       <p:nvGrpSpPr>
@@ -2501,14 +2819,15 @@
           </a:ln>
         </p:spPr>
         <p:txBody>
-          <a:bodyPr lIns="0" rIns="0" tIns="0" bIns="0" anchor="ctr">
+          <a:bodyPr lIns="0" tIns="0" rIns="0" bIns="0" anchor="ctr">
             <a:noAutofit/>
           </a:bodyPr>
+          <a:lstStyle/>
           <a:p>
             <a:pPr algn="ctr">
               <a:buNone/>
             </a:pPr>
-            <a:endParaRPr b="0" lang="en-GB" sz="4400" spc="-1" strike="noStrike">
+            <a:endParaRPr lang="en-GB" sz="4400" b="0" strike="noStrike" spc="-1">
               <a:latin typeface="Arial"/>
             </a:endParaRPr>
           </a:p>
@@ -2538,14 +2857,15 @@
           </a:ln>
         </p:spPr>
         <p:txBody>
-          <a:bodyPr lIns="0" rIns="0" tIns="0" bIns="0" anchor="ctr">
+          <a:bodyPr lIns="0" tIns="0" rIns="0" bIns="0" anchor="ctr">
             <a:noAutofit/>
           </a:bodyPr>
+          <a:lstStyle/>
           <a:p>
             <a:pPr algn="ctr">
               <a:buNone/>
             </a:pPr>
-            <a:endParaRPr b="0" lang="en-GB" sz="3200" spc="-1" strike="noStrike">
+            <a:endParaRPr lang="en-GB" sz="3200" b="0" strike="noStrike" spc="-1">
               <a:latin typeface="Arial"/>
             </a:endParaRPr>
           </a:p>
@@ -2553,11 +2873,14 @@
       </p:sp>
     </p:spTree>
   </p:cSld>
+  <p:clrMapOvr>
+    <a:masterClrMapping/>
+  </p:clrMapOvr>
 </p:sldLayout>
 </file>
 
 <file path=ppt/slideLayouts/slideLayout20.xml><?xml version="1.0" encoding="utf-8"?>
-<p:sldLayout xmlns:a="http://schemas.openxmlformats.org/drawingml/2006/main" xmlns:p="http://schemas.openxmlformats.org/presentationml/2006/main" xmlns:r="http://schemas.openxmlformats.org/officeDocument/2006/relationships" xmlns:p14="http://schemas.microsoft.com/office/powerpoint/2010/main" xmlns:p15="http://schemas.microsoft.com/office/powerpoint/2012/main" xmlns:mc="http://schemas.openxmlformats.org/markup-compatibility/2006" type="objAndTwoObj" preserve="1">
+<p:sldLayout xmlns:a="http://schemas.openxmlformats.org/drawingml/2006/main" xmlns:r="http://schemas.openxmlformats.org/officeDocument/2006/relationships" xmlns:p="http://schemas.openxmlformats.org/presentationml/2006/main" type="objAndTwoObj" preserve="1">
   <p:cSld name="Title Content and 2 Content">
     <p:spTree>
       <p:nvGrpSpPr>
@@ -2597,14 +2920,15 @@
           </a:ln>
         </p:spPr>
         <p:txBody>
-          <a:bodyPr lIns="0" rIns="0" tIns="0" bIns="0" anchor="ctr">
+          <a:bodyPr lIns="0" tIns="0" rIns="0" bIns="0" anchor="ctr">
             <a:noAutofit/>
           </a:bodyPr>
+          <a:lstStyle/>
           <a:p>
             <a:pPr algn="ctr">
               <a:buNone/>
             </a:pPr>
-            <a:endParaRPr b="0" lang="en-GB" sz="4400" spc="-1" strike="noStrike">
+            <a:endParaRPr lang="en-GB" sz="4400" b="0" strike="noStrike" spc="-1">
               <a:latin typeface="Arial"/>
             </a:endParaRPr>
           </a:p>
@@ -2634,11 +2958,12 @@
           </a:ln>
         </p:spPr>
         <p:txBody>
-          <a:bodyPr lIns="0" rIns="0" tIns="0" bIns="0" anchor="t">
+          <a:bodyPr lIns="0" tIns="0" rIns="0" bIns="0" anchor="t">
             <a:normAutofit/>
           </a:bodyPr>
-          <a:p>
-            <a:endParaRPr b="0" lang="en-GB" sz="3200" spc="-1" strike="noStrike">
+          <a:lstStyle/>
+          <a:p>
+            <a:endParaRPr lang="en-GB" sz="3200" b="0" strike="noStrike" spc="-1">
               <a:latin typeface="Arial"/>
             </a:endParaRPr>
           </a:p>
@@ -2668,11 +2993,12 @@
           </a:ln>
         </p:spPr>
         <p:txBody>
-          <a:bodyPr lIns="0" rIns="0" tIns="0" bIns="0" anchor="t">
+          <a:bodyPr lIns="0" tIns="0" rIns="0" bIns="0" anchor="t">
             <a:normAutofit/>
           </a:bodyPr>
-          <a:p>
-            <a:endParaRPr b="0" lang="en-GB" sz="3200" spc="-1" strike="noStrike">
+          <a:lstStyle/>
+          <a:p>
+            <a:endParaRPr lang="en-GB" sz="3200" b="0" strike="noStrike" spc="-1">
               <a:latin typeface="Arial"/>
             </a:endParaRPr>
           </a:p>
@@ -2702,11 +3028,12 @@
           </a:ln>
         </p:spPr>
         <p:txBody>
-          <a:bodyPr lIns="0" rIns="0" tIns="0" bIns="0" anchor="t">
+          <a:bodyPr lIns="0" tIns="0" rIns="0" bIns="0" anchor="t">
             <a:normAutofit/>
           </a:bodyPr>
-          <a:p>
-            <a:endParaRPr b="0" lang="en-GB" sz="3200" spc="-1" strike="noStrike">
+          <a:lstStyle/>
+          <a:p>
+            <a:endParaRPr lang="en-GB" sz="3200" b="0" strike="noStrike" spc="-1">
               <a:latin typeface="Arial"/>
             </a:endParaRPr>
           </a:p>
@@ -2714,11 +3041,14 @@
       </p:sp>
     </p:spTree>
   </p:cSld>
+  <p:clrMapOvr>
+    <a:masterClrMapping/>
+  </p:clrMapOvr>
 </p:sldLayout>
 </file>
 
 <file path=ppt/slideLayouts/slideLayout21.xml><?xml version="1.0" encoding="utf-8"?>
-<p:sldLayout xmlns:a="http://schemas.openxmlformats.org/drawingml/2006/main" xmlns:p="http://schemas.openxmlformats.org/presentationml/2006/main" xmlns:r="http://schemas.openxmlformats.org/officeDocument/2006/relationships" xmlns:p14="http://schemas.microsoft.com/office/powerpoint/2010/main" xmlns:p15="http://schemas.microsoft.com/office/powerpoint/2012/main" xmlns:mc="http://schemas.openxmlformats.org/markup-compatibility/2006" type="twoObjOverTx" preserve="1">
+<p:sldLayout xmlns:a="http://schemas.openxmlformats.org/drawingml/2006/main" xmlns:r="http://schemas.openxmlformats.org/officeDocument/2006/relationships" xmlns:p="http://schemas.openxmlformats.org/presentationml/2006/main" type="twoObjOverTx" preserve="1">
   <p:cSld name="Title, 2 Content over Content">
     <p:spTree>
       <p:nvGrpSpPr>
@@ -2758,14 +3088,15 @@
           </a:ln>
         </p:spPr>
         <p:txBody>
-          <a:bodyPr lIns="0" rIns="0" tIns="0" bIns="0" anchor="ctr">
+          <a:bodyPr lIns="0" tIns="0" rIns="0" bIns="0" anchor="ctr">
             <a:noAutofit/>
           </a:bodyPr>
+          <a:lstStyle/>
           <a:p>
             <a:pPr algn="ctr">
               <a:buNone/>
             </a:pPr>
-            <a:endParaRPr b="0" lang="en-GB" sz="4400" spc="-1" strike="noStrike">
+            <a:endParaRPr lang="en-GB" sz="4400" b="0" strike="noStrike" spc="-1">
               <a:latin typeface="Arial"/>
             </a:endParaRPr>
           </a:p>
@@ -2795,11 +3126,12 @@
           </a:ln>
         </p:spPr>
         <p:txBody>
-          <a:bodyPr lIns="0" rIns="0" tIns="0" bIns="0" anchor="t">
+          <a:bodyPr lIns="0" tIns="0" rIns="0" bIns="0" anchor="t">
             <a:normAutofit/>
           </a:bodyPr>
-          <a:p>
-            <a:endParaRPr b="0" lang="en-GB" sz="3200" spc="-1" strike="noStrike">
+          <a:lstStyle/>
+          <a:p>
+            <a:endParaRPr lang="en-GB" sz="3200" b="0" strike="noStrike" spc="-1">
               <a:latin typeface="Arial"/>
             </a:endParaRPr>
           </a:p>
@@ -2829,11 +3161,12 @@
           </a:ln>
         </p:spPr>
         <p:txBody>
-          <a:bodyPr lIns="0" rIns="0" tIns="0" bIns="0" anchor="t">
+          <a:bodyPr lIns="0" tIns="0" rIns="0" bIns="0" anchor="t">
             <a:normAutofit/>
           </a:bodyPr>
-          <a:p>
-            <a:endParaRPr b="0" lang="en-GB" sz="3200" spc="-1" strike="noStrike">
+          <a:lstStyle/>
+          <a:p>
+            <a:endParaRPr lang="en-GB" sz="3200" b="0" strike="noStrike" spc="-1">
               <a:latin typeface="Arial"/>
             </a:endParaRPr>
           </a:p>
@@ -2863,11 +3196,12 @@
           </a:ln>
         </p:spPr>
         <p:txBody>
-          <a:bodyPr lIns="0" rIns="0" tIns="0" bIns="0" anchor="t">
+          <a:bodyPr lIns="0" tIns="0" rIns="0" bIns="0" anchor="t">
             <a:normAutofit/>
           </a:bodyPr>
-          <a:p>
-            <a:endParaRPr b="0" lang="en-GB" sz="3200" spc="-1" strike="noStrike">
+          <a:lstStyle/>
+          <a:p>
+            <a:endParaRPr lang="en-GB" sz="3200" b="0" strike="noStrike" spc="-1">
               <a:latin typeface="Arial"/>
             </a:endParaRPr>
           </a:p>
@@ -2875,11 +3209,14 @@
       </p:sp>
     </p:spTree>
   </p:cSld>
+  <p:clrMapOvr>
+    <a:masterClrMapping/>
+  </p:clrMapOvr>
 </p:sldLayout>
 </file>
 
 <file path=ppt/slideLayouts/slideLayout22.xml><?xml version="1.0" encoding="utf-8"?>
-<p:sldLayout xmlns:a="http://schemas.openxmlformats.org/drawingml/2006/main" xmlns:p="http://schemas.openxmlformats.org/presentationml/2006/main" xmlns:r="http://schemas.openxmlformats.org/officeDocument/2006/relationships" xmlns:p14="http://schemas.microsoft.com/office/powerpoint/2010/main" xmlns:p15="http://schemas.microsoft.com/office/powerpoint/2012/main" xmlns:mc="http://schemas.openxmlformats.org/markup-compatibility/2006" type="objOverTx" preserve="1">
+<p:sldLayout xmlns:a="http://schemas.openxmlformats.org/drawingml/2006/main" xmlns:r="http://schemas.openxmlformats.org/officeDocument/2006/relationships" xmlns:p="http://schemas.openxmlformats.org/presentationml/2006/main" type="objOverTx" preserve="1">
   <p:cSld name="Title, Content over Content">
     <p:spTree>
       <p:nvGrpSpPr>
@@ -2919,14 +3256,15 @@
           </a:ln>
         </p:spPr>
         <p:txBody>
-          <a:bodyPr lIns="0" rIns="0" tIns="0" bIns="0" anchor="ctr">
+          <a:bodyPr lIns="0" tIns="0" rIns="0" bIns="0" anchor="ctr">
             <a:noAutofit/>
           </a:bodyPr>
+          <a:lstStyle/>
           <a:p>
             <a:pPr algn="ctr">
               <a:buNone/>
             </a:pPr>
-            <a:endParaRPr b="0" lang="en-GB" sz="4400" spc="-1" strike="noStrike">
+            <a:endParaRPr lang="en-GB" sz="4400" b="0" strike="noStrike" spc="-1">
               <a:latin typeface="Arial"/>
             </a:endParaRPr>
           </a:p>
@@ -2956,11 +3294,12 @@
           </a:ln>
         </p:spPr>
         <p:txBody>
-          <a:bodyPr lIns="0" rIns="0" tIns="0" bIns="0" anchor="t">
+          <a:bodyPr lIns="0" tIns="0" rIns="0" bIns="0" anchor="t">
             <a:normAutofit/>
           </a:bodyPr>
-          <a:p>
-            <a:endParaRPr b="0" lang="en-GB" sz="3200" spc="-1" strike="noStrike">
+          <a:lstStyle/>
+          <a:p>
+            <a:endParaRPr lang="en-GB" sz="3200" b="0" strike="noStrike" spc="-1">
               <a:latin typeface="Arial"/>
             </a:endParaRPr>
           </a:p>
@@ -2990,11 +3329,12 @@
           </a:ln>
         </p:spPr>
         <p:txBody>
-          <a:bodyPr lIns="0" rIns="0" tIns="0" bIns="0" anchor="t">
+          <a:bodyPr lIns="0" tIns="0" rIns="0" bIns="0" anchor="t">
             <a:normAutofit/>
           </a:bodyPr>
-          <a:p>
-            <a:endParaRPr b="0" lang="en-GB" sz="3200" spc="-1" strike="noStrike">
+          <a:lstStyle/>
+          <a:p>
+            <a:endParaRPr lang="en-GB" sz="3200" b="0" strike="noStrike" spc="-1">
               <a:latin typeface="Arial"/>
             </a:endParaRPr>
           </a:p>
@@ -3002,11 +3342,14 @@
       </p:sp>
     </p:spTree>
   </p:cSld>
+  <p:clrMapOvr>
+    <a:masterClrMapping/>
+  </p:clrMapOvr>
 </p:sldLayout>
 </file>
 
 <file path=ppt/slideLayouts/slideLayout23.xml><?xml version="1.0" encoding="utf-8"?>
-<p:sldLayout xmlns:a="http://schemas.openxmlformats.org/drawingml/2006/main" xmlns:p="http://schemas.openxmlformats.org/presentationml/2006/main" xmlns:r="http://schemas.openxmlformats.org/officeDocument/2006/relationships" xmlns:p14="http://schemas.microsoft.com/office/powerpoint/2010/main" xmlns:p15="http://schemas.microsoft.com/office/powerpoint/2012/main" xmlns:mc="http://schemas.openxmlformats.org/markup-compatibility/2006" type="fourObj" preserve="1">
+<p:sldLayout xmlns:a="http://schemas.openxmlformats.org/drawingml/2006/main" xmlns:r="http://schemas.openxmlformats.org/officeDocument/2006/relationships" xmlns:p="http://schemas.openxmlformats.org/presentationml/2006/main" type="fourObj" preserve="1">
   <p:cSld name="Title, 4 Content">
     <p:spTree>
       <p:nvGrpSpPr>
@@ -3046,14 +3389,15 @@
           </a:ln>
         </p:spPr>
         <p:txBody>
-          <a:bodyPr lIns="0" rIns="0" tIns="0" bIns="0" anchor="ctr">
+          <a:bodyPr lIns="0" tIns="0" rIns="0" bIns="0" anchor="ctr">
             <a:noAutofit/>
           </a:bodyPr>
+          <a:lstStyle/>
           <a:p>
             <a:pPr algn="ctr">
               <a:buNone/>
             </a:pPr>
-            <a:endParaRPr b="0" lang="en-GB" sz="4400" spc="-1" strike="noStrike">
+            <a:endParaRPr lang="en-GB" sz="4400" b="0" strike="noStrike" spc="-1">
               <a:latin typeface="Arial"/>
             </a:endParaRPr>
           </a:p>
@@ -3083,11 +3427,12 @@
           </a:ln>
         </p:spPr>
         <p:txBody>
-          <a:bodyPr lIns="0" rIns="0" tIns="0" bIns="0" anchor="t">
+          <a:bodyPr lIns="0" tIns="0" rIns="0" bIns="0" anchor="t">
             <a:normAutofit/>
           </a:bodyPr>
-          <a:p>
-            <a:endParaRPr b="0" lang="en-GB" sz="3200" spc="-1" strike="noStrike">
+          <a:lstStyle/>
+          <a:p>
+            <a:endParaRPr lang="en-GB" sz="3200" b="0" strike="noStrike" spc="-1">
               <a:latin typeface="Arial"/>
             </a:endParaRPr>
           </a:p>
@@ -3117,11 +3462,12 @@
           </a:ln>
         </p:spPr>
         <p:txBody>
-          <a:bodyPr lIns="0" rIns="0" tIns="0" bIns="0" anchor="t">
+          <a:bodyPr lIns="0" tIns="0" rIns="0" bIns="0" anchor="t">
             <a:normAutofit/>
           </a:bodyPr>
-          <a:p>
-            <a:endParaRPr b="0" lang="en-GB" sz="3200" spc="-1" strike="noStrike">
+          <a:lstStyle/>
+          <a:p>
+            <a:endParaRPr lang="en-GB" sz="3200" b="0" strike="noStrike" spc="-1">
               <a:latin typeface="Arial"/>
             </a:endParaRPr>
           </a:p>
@@ -3151,11 +3497,12 @@
           </a:ln>
         </p:spPr>
         <p:txBody>
-          <a:bodyPr lIns="0" rIns="0" tIns="0" bIns="0" anchor="t">
+          <a:bodyPr lIns="0" tIns="0" rIns="0" bIns="0" anchor="t">
             <a:normAutofit/>
           </a:bodyPr>
-          <a:p>
-            <a:endParaRPr b="0" lang="en-GB" sz="3200" spc="-1" strike="noStrike">
+          <a:lstStyle/>
+          <a:p>
+            <a:endParaRPr lang="en-GB" sz="3200" b="0" strike="noStrike" spc="-1">
               <a:latin typeface="Arial"/>
             </a:endParaRPr>
           </a:p>
@@ -3185,11 +3532,12 @@
           </a:ln>
         </p:spPr>
         <p:txBody>
-          <a:bodyPr lIns="0" rIns="0" tIns="0" bIns="0" anchor="t">
+          <a:bodyPr lIns="0" tIns="0" rIns="0" bIns="0" anchor="t">
             <a:normAutofit/>
           </a:bodyPr>
-          <a:p>
-            <a:endParaRPr b="0" lang="en-GB" sz="3200" spc="-1" strike="noStrike">
+          <a:lstStyle/>
+          <a:p>
+            <a:endParaRPr lang="en-GB" sz="3200" b="0" strike="noStrike" spc="-1">
               <a:latin typeface="Arial"/>
             </a:endParaRPr>
           </a:p>
@@ -3197,11 +3545,14 @@
       </p:sp>
     </p:spTree>
   </p:cSld>
+  <p:clrMapOvr>
+    <a:masterClrMapping/>
+  </p:clrMapOvr>
 </p:sldLayout>
 </file>
 
 <file path=ppt/slideLayouts/slideLayout24.xml><?xml version="1.0" encoding="utf-8"?>
-<p:sldLayout xmlns:a="http://schemas.openxmlformats.org/drawingml/2006/main" xmlns:p="http://schemas.openxmlformats.org/presentationml/2006/main" xmlns:r="http://schemas.openxmlformats.org/officeDocument/2006/relationships" xmlns:p14="http://schemas.microsoft.com/office/powerpoint/2010/main" xmlns:p15="http://schemas.microsoft.com/office/powerpoint/2012/main" xmlns:mc="http://schemas.openxmlformats.org/markup-compatibility/2006" type="blank" preserve="1">
+<p:sldLayout xmlns:a="http://schemas.openxmlformats.org/drawingml/2006/main" xmlns:r="http://schemas.openxmlformats.org/officeDocument/2006/relationships" xmlns:p="http://schemas.openxmlformats.org/presentationml/2006/main" type="blank" preserve="1">
   <p:cSld name="Title, 6 Content">
     <p:spTree>
       <p:nvGrpSpPr>
@@ -3241,14 +3592,15 @@
           </a:ln>
         </p:spPr>
         <p:txBody>
-          <a:bodyPr lIns="0" rIns="0" tIns="0" bIns="0" anchor="ctr">
+          <a:bodyPr lIns="0" tIns="0" rIns="0" bIns="0" anchor="ctr">
             <a:noAutofit/>
           </a:bodyPr>
+          <a:lstStyle/>
           <a:p>
             <a:pPr algn="ctr">
               <a:buNone/>
             </a:pPr>
-            <a:endParaRPr b="0" lang="en-GB" sz="4400" spc="-1" strike="noStrike">
+            <a:endParaRPr lang="en-GB" sz="4400" b="0" strike="noStrike" spc="-1">
               <a:latin typeface="Arial"/>
             </a:endParaRPr>
           </a:p>
@@ -3278,11 +3630,12 @@
           </a:ln>
         </p:spPr>
         <p:txBody>
-          <a:bodyPr lIns="0" rIns="0" tIns="0" bIns="0" anchor="t">
+          <a:bodyPr lIns="0" tIns="0" rIns="0" bIns="0" anchor="t">
             <a:normAutofit/>
           </a:bodyPr>
-          <a:p>
-            <a:endParaRPr b="0" lang="en-GB" sz="3200" spc="-1" strike="noStrike">
+          <a:lstStyle/>
+          <a:p>
+            <a:endParaRPr lang="en-GB" sz="3200" b="0" strike="noStrike" spc="-1">
               <a:latin typeface="Arial"/>
             </a:endParaRPr>
           </a:p>
@@ -3312,11 +3665,12 @@
           </a:ln>
         </p:spPr>
         <p:txBody>
-          <a:bodyPr lIns="0" rIns="0" tIns="0" bIns="0" anchor="t">
+          <a:bodyPr lIns="0" tIns="0" rIns="0" bIns="0" anchor="t">
             <a:normAutofit/>
           </a:bodyPr>
-          <a:p>
-            <a:endParaRPr b="0" lang="en-GB" sz="3200" spc="-1" strike="noStrike">
+          <a:lstStyle/>
+          <a:p>
+            <a:endParaRPr lang="en-GB" sz="3200" b="0" strike="noStrike" spc="-1">
               <a:latin typeface="Arial"/>
             </a:endParaRPr>
           </a:p>
@@ -3346,11 +3700,12 @@
           </a:ln>
         </p:spPr>
         <p:txBody>
-          <a:bodyPr lIns="0" rIns="0" tIns="0" bIns="0" anchor="t">
+          <a:bodyPr lIns="0" tIns="0" rIns="0" bIns="0" anchor="t">
             <a:normAutofit/>
           </a:bodyPr>
-          <a:p>
-            <a:endParaRPr b="0" lang="en-GB" sz="3200" spc="-1" strike="noStrike">
+          <a:lstStyle/>
+          <a:p>
+            <a:endParaRPr lang="en-GB" sz="3200" b="0" strike="noStrike" spc="-1">
               <a:latin typeface="Arial"/>
             </a:endParaRPr>
           </a:p>
@@ -3380,11 +3735,12 @@
           </a:ln>
         </p:spPr>
         <p:txBody>
-          <a:bodyPr lIns="0" rIns="0" tIns="0" bIns="0" anchor="t">
+          <a:bodyPr lIns="0" tIns="0" rIns="0" bIns="0" anchor="t">
             <a:normAutofit/>
           </a:bodyPr>
-          <a:p>
-            <a:endParaRPr b="0" lang="en-GB" sz="3200" spc="-1" strike="noStrike">
+          <a:lstStyle/>
+          <a:p>
+            <a:endParaRPr lang="en-GB" sz="3200" b="0" strike="noStrike" spc="-1">
               <a:latin typeface="Arial"/>
             </a:endParaRPr>
           </a:p>
@@ -3414,11 +3770,12 @@
           </a:ln>
         </p:spPr>
         <p:txBody>
-          <a:bodyPr lIns="0" rIns="0" tIns="0" bIns="0" anchor="t">
+          <a:bodyPr lIns="0" tIns="0" rIns="0" bIns="0" anchor="t">
             <a:normAutofit/>
           </a:bodyPr>
-          <a:p>
-            <a:endParaRPr b="0" lang="en-GB" sz="3200" spc="-1" strike="noStrike">
+          <a:lstStyle/>
+          <a:p>
+            <a:endParaRPr lang="en-GB" sz="3200" b="0" strike="noStrike" spc="-1">
               <a:latin typeface="Arial"/>
             </a:endParaRPr>
           </a:p>
@@ -3448,11 +3805,12 @@
           </a:ln>
         </p:spPr>
         <p:txBody>
-          <a:bodyPr lIns="0" rIns="0" tIns="0" bIns="0" anchor="t">
+          <a:bodyPr lIns="0" tIns="0" rIns="0" bIns="0" anchor="t">
             <a:normAutofit/>
           </a:bodyPr>
-          <a:p>
-            <a:endParaRPr b="0" lang="en-GB" sz="3200" spc="-1" strike="noStrike">
+          <a:lstStyle/>
+          <a:p>
+            <a:endParaRPr lang="en-GB" sz="3200" b="0" strike="noStrike" spc="-1">
               <a:latin typeface="Arial"/>
             </a:endParaRPr>
           </a:p>
@@ -3460,11 +3818,14 @@
       </p:sp>
     </p:spTree>
   </p:cSld>
+  <p:clrMapOvr>
+    <a:masterClrMapping/>
+  </p:clrMapOvr>
 </p:sldLayout>
 </file>
 
 <file path=ppt/slideLayouts/slideLayout3.xml><?xml version="1.0" encoding="utf-8"?>
-<p:sldLayout xmlns:a="http://schemas.openxmlformats.org/drawingml/2006/main" xmlns:p="http://schemas.openxmlformats.org/presentationml/2006/main" xmlns:r="http://schemas.openxmlformats.org/officeDocument/2006/relationships" xmlns:p14="http://schemas.microsoft.com/office/powerpoint/2010/main" xmlns:p15="http://schemas.microsoft.com/office/powerpoint/2012/main" xmlns:mc="http://schemas.openxmlformats.org/markup-compatibility/2006" type="obj" preserve="1">
+<p:sldLayout xmlns:a="http://schemas.openxmlformats.org/drawingml/2006/main" xmlns:r="http://schemas.openxmlformats.org/officeDocument/2006/relationships" xmlns:p="http://schemas.openxmlformats.org/presentationml/2006/main" type="obj" preserve="1">
   <p:cSld name="Title, Content">
     <p:spTree>
       <p:nvGrpSpPr>
@@ -3504,14 +3865,15 @@
           </a:ln>
         </p:spPr>
         <p:txBody>
-          <a:bodyPr lIns="0" rIns="0" tIns="0" bIns="0" anchor="ctr">
+          <a:bodyPr lIns="0" tIns="0" rIns="0" bIns="0" anchor="ctr">
             <a:noAutofit/>
           </a:bodyPr>
+          <a:lstStyle/>
           <a:p>
             <a:pPr algn="ctr">
               <a:buNone/>
             </a:pPr>
-            <a:endParaRPr b="0" lang="en-GB" sz="4400" spc="-1" strike="noStrike">
+            <a:endParaRPr lang="en-GB" sz="4400" b="0" strike="noStrike" spc="-1">
               <a:latin typeface="Arial"/>
             </a:endParaRPr>
           </a:p>
@@ -3541,11 +3903,12 @@
           </a:ln>
         </p:spPr>
         <p:txBody>
-          <a:bodyPr lIns="0" rIns="0" tIns="0" bIns="0" anchor="t">
+          <a:bodyPr lIns="0" tIns="0" rIns="0" bIns="0" anchor="t">
             <a:normAutofit/>
           </a:bodyPr>
-          <a:p>
-            <a:endParaRPr b="0" lang="en-GB" sz="3200" spc="-1" strike="noStrike">
+          <a:lstStyle/>
+          <a:p>
+            <a:endParaRPr lang="en-GB" sz="3200" b="0" strike="noStrike" spc="-1">
               <a:latin typeface="Arial"/>
             </a:endParaRPr>
           </a:p>
@@ -3553,11 +3916,14 @@
       </p:sp>
     </p:spTree>
   </p:cSld>
+  <p:clrMapOvr>
+    <a:masterClrMapping/>
+  </p:clrMapOvr>
 </p:sldLayout>
 </file>
 
 <file path=ppt/slideLayouts/slideLayout4.xml><?xml version="1.0" encoding="utf-8"?>
-<p:sldLayout xmlns:a="http://schemas.openxmlformats.org/drawingml/2006/main" xmlns:p="http://schemas.openxmlformats.org/presentationml/2006/main" xmlns:r="http://schemas.openxmlformats.org/officeDocument/2006/relationships" xmlns:p14="http://schemas.microsoft.com/office/powerpoint/2010/main" xmlns:p15="http://schemas.microsoft.com/office/powerpoint/2012/main" xmlns:mc="http://schemas.openxmlformats.org/markup-compatibility/2006" type="twoObj" preserve="1">
+<p:sldLayout xmlns:a="http://schemas.openxmlformats.org/drawingml/2006/main" xmlns:r="http://schemas.openxmlformats.org/officeDocument/2006/relationships" xmlns:p="http://schemas.openxmlformats.org/presentationml/2006/main" type="twoObj" preserve="1">
   <p:cSld name="Title, 2 Content">
     <p:spTree>
       <p:nvGrpSpPr>
@@ -3597,14 +3963,15 @@
           </a:ln>
         </p:spPr>
         <p:txBody>
-          <a:bodyPr lIns="0" rIns="0" tIns="0" bIns="0" anchor="ctr">
+          <a:bodyPr lIns="0" tIns="0" rIns="0" bIns="0" anchor="ctr">
             <a:noAutofit/>
           </a:bodyPr>
+          <a:lstStyle/>
           <a:p>
             <a:pPr algn="ctr">
               <a:buNone/>
             </a:pPr>
-            <a:endParaRPr b="0" lang="en-GB" sz="4400" spc="-1" strike="noStrike">
+            <a:endParaRPr lang="en-GB" sz="4400" b="0" strike="noStrike" spc="-1">
               <a:latin typeface="Arial"/>
             </a:endParaRPr>
           </a:p>
@@ -3634,11 +4001,12 @@
           </a:ln>
         </p:spPr>
         <p:txBody>
-          <a:bodyPr lIns="0" rIns="0" tIns="0" bIns="0" anchor="t">
+          <a:bodyPr lIns="0" tIns="0" rIns="0" bIns="0" anchor="t">
             <a:normAutofit/>
           </a:bodyPr>
-          <a:p>
-            <a:endParaRPr b="0" lang="en-GB" sz="3200" spc="-1" strike="noStrike">
+          <a:lstStyle/>
+          <a:p>
+            <a:endParaRPr lang="en-GB" sz="3200" b="0" strike="noStrike" spc="-1">
               <a:latin typeface="Arial"/>
             </a:endParaRPr>
           </a:p>
@@ -3668,11 +4036,12 @@
           </a:ln>
         </p:spPr>
         <p:txBody>
-          <a:bodyPr lIns="0" rIns="0" tIns="0" bIns="0" anchor="t">
+          <a:bodyPr lIns="0" tIns="0" rIns="0" bIns="0" anchor="t">
             <a:normAutofit/>
           </a:bodyPr>
-          <a:p>
-            <a:endParaRPr b="0" lang="en-GB" sz="3200" spc="-1" strike="noStrike">
+          <a:lstStyle/>
+          <a:p>
+            <a:endParaRPr lang="en-GB" sz="3200" b="0" strike="noStrike" spc="-1">
               <a:latin typeface="Arial"/>
             </a:endParaRPr>
           </a:p>
@@ -3680,11 +4049,14 @@
       </p:sp>
     </p:spTree>
   </p:cSld>
+  <p:clrMapOvr>
+    <a:masterClrMapping/>
+  </p:clrMapOvr>
 </p:sldLayout>
 </file>
 
 <file path=ppt/slideLayouts/slideLayout5.xml><?xml version="1.0" encoding="utf-8"?>
-<p:sldLayout xmlns:a="http://schemas.openxmlformats.org/drawingml/2006/main" xmlns:p="http://schemas.openxmlformats.org/presentationml/2006/main" xmlns:r="http://schemas.openxmlformats.org/officeDocument/2006/relationships" xmlns:p14="http://schemas.microsoft.com/office/powerpoint/2010/main" xmlns:p15="http://schemas.microsoft.com/office/powerpoint/2012/main" xmlns:mc="http://schemas.openxmlformats.org/markup-compatibility/2006" type="titleOnly" preserve="1">
+<p:sldLayout xmlns:a="http://schemas.openxmlformats.org/drawingml/2006/main" xmlns:r="http://schemas.openxmlformats.org/officeDocument/2006/relationships" xmlns:p="http://schemas.openxmlformats.org/presentationml/2006/main" type="titleOnly" preserve="1">
   <p:cSld name="Title Only">
     <p:spTree>
       <p:nvGrpSpPr>
@@ -3724,14 +4096,15 @@
           </a:ln>
         </p:spPr>
         <p:txBody>
-          <a:bodyPr lIns="0" rIns="0" tIns="0" bIns="0" anchor="ctr">
+          <a:bodyPr lIns="0" tIns="0" rIns="0" bIns="0" anchor="ctr">
             <a:noAutofit/>
           </a:bodyPr>
+          <a:lstStyle/>
           <a:p>
             <a:pPr algn="ctr">
               <a:buNone/>
             </a:pPr>
-            <a:endParaRPr b="0" lang="en-GB" sz="4400" spc="-1" strike="noStrike">
+            <a:endParaRPr lang="en-GB" sz="4400" b="0" strike="noStrike" spc="-1">
               <a:latin typeface="Arial"/>
             </a:endParaRPr>
           </a:p>
@@ -3739,11 +4112,14 @@
       </p:sp>
     </p:spTree>
   </p:cSld>
+  <p:clrMapOvr>
+    <a:masterClrMapping/>
+  </p:clrMapOvr>
 </p:sldLayout>
 </file>
 
 <file path=ppt/slideLayouts/slideLayout6.xml><?xml version="1.0" encoding="utf-8"?>
-<p:sldLayout xmlns:a="http://schemas.openxmlformats.org/drawingml/2006/main" xmlns:p="http://schemas.openxmlformats.org/presentationml/2006/main" xmlns:r="http://schemas.openxmlformats.org/officeDocument/2006/relationships" xmlns:p14="http://schemas.microsoft.com/office/powerpoint/2010/main" xmlns:p15="http://schemas.microsoft.com/office/powerpoint/2012/main" xmlns:mc="http://schemas.openxmlformats.org/markup-compatibility/2006" type="objOnly" preserve="1">
+<p:sldLayout xmlns:a="http://schemas.openxmlformats.org/drawingml/2006/main" xmlns:r="http://schemas.openxmlformats.org/officeDocument/2006/relationships" xmlns:p="http://schemas.openxmlformats.org/presentationml/2006/main" type="objOnly" preserve="1">
   <p:cSld name="Centered Text">
     <p:spTree>
       <p:nvGrpSpPr>
@@ -3783,14 +4159,15 @@
           </a:ln>
         </p:spPr>
         <p:txBody>
-          <a:bodyPr lIns="0" rIns="0" tIns="0" bIns="0" anchor="ctr">
+          <a:bodyPr lIns="0" tIns="0" rIns="0" bIns="0" anchor="ctr">
             <a:noAutofit/>
           </a:bodyPr>
+          <a:lstStyle/>
           <a:p>
             <a:pPr algn="ctr">
               <a:buNone/>
             </a:pPr>
-            <a:endParaRPr b="0" lang="en-GB" sz="3200" spc="-1" strike="noStrike">
+            <a:endParaRPr lang="en-GB" sz="3200" b="0" strike="noStrike" spc="-1">
               <a:latin typeface="Arial"/>
             </a:endParaRPr>
           </a:p>
@@ -3798,11 +4175,14 @@
       </p:sp>
     </p:spTree>
   </p:cSld>
+  <p:clrMapOvr>
+    <a:masterClrMapping/>
+  </p:clrMapOvr>
 </p:sldLayout>
 </file>
 
 <file path=ppt/slideLayouts/slideLayout7.xml><?xml version="1.0" encoding="utf-8"?>
-<p:sldLayout xmlns:a="http://schemas.openxmlformats.org/drawingml/2006/main" xmlns:p="http://schemas.openxmlformats.org/presentationml/2006/main" xmlns:r="http://schemas.openxmlformats.org/officeDocument/2006/relationships" xmlns:p14="http://schemas.microsoft.com/office/powerpoint/2010/main" xmlns:p15="http://schemas.microsoft.com/office/powerpoint/2012/main" xmlns:mc="http://schemas.openxmlformats.org/markup-compatibility/2006" type="twoObjAndObj" preserve="1">
+<p:sldLayout xmlns:a="http://schemas.openxmlformats.org/drawingml/2006/main" xmlns:r="http://schemas.openxmlformats.org/officeDocument/2006/relationships" xmlns:p="http://schemas.openxmlformats.org/presentationml/2006/main" type="twoObjAndObj" preserve="1">
   <p:cSld name="Title, 2 Content and Content">
     <p:spTree>
       <p:nvGrpSpPr>
@@ -3842,14 +4222,15 @@
           </a:ln>
         </p:spPr>
         <p:txBody>
-          <a:bodyPr lIns="0" rIns="0" tIns="0" bIns="0" anchor="ctr">
+          <a:bodyPr lIns="0" tIns="0" rIns="0" bIns="0" anchor="ctr">
             <a:noAutofit/>
           </a:bodyPr>
+          <a:lstStyle/>
           <a:p>
             <a:pPr algn="ctr">
               <a:buNone/>
             </a:pPr>
-            <a:endParaRPr b="0" lang="en-GB" sz="4400" spc="-1" strike="noStrike">
+            <a:endParaRPr lang="en-GB" sz="4400" b="0" strike="noStrike" spc="-1">
               <a:latin typeface="Arial"/>
             </a:endParaRPr>
           </a:p>
@@ -3879,11 +4260,12 @@
           </a:ln>
         </p:spPr>
         <p:txBody>
-          <a:bodyPr lIns="0" rIns="0" tIns="0" bIns="0" anchor="t">
+          <a:bodyPr lIns="0" tIns="0" rIns="0" bIns="0" anchor="t">
             <a:normAutofit/>
           </a:bodyPr>
-          <a:p>
-            <a:endParaRPr b="0" lang="en-GB" sz="3200" spc="-1" strike="noStrike">
+          <a:lstStyle/>
+          <a:p>
+            <a:endParaRPr lang="en-GB" sz="3200" b="0" strike="noStrike" spc="-1">
               <a:latin typeface="Arial"/>
             </a:endParaRPr>
           </a:p>
@@ -3913,11 +4295,12 @@
           </a:ln>
         </p:spPr>
         <p:txBody>
-          <a:bodyPr lIns="0" rIns="0" tIns="0" bIns="0" anchor="t">
+          <a:bodyPr lIns="0" tIns="0" rIns="0" bIns="0" anchor="t">
             <a:normAutofit/>
           </a:bodyPr>
-          <a:p>
-            <a:endParaRPr b="0" lang="en-GB" sz="3200" spc="-1" strike="noStrike">
+          <a:lstStyle/>
+          <a:p>
+            <a:endParaRPr lang="en-GB" sz="3200" b="0" strike="noStrike" spc="-1">
               <a:latin typeface="Arial"/>
             </a:endParaRPr>
           </a:p>
@@ -3947,11 +4330,12 @@
           </a:ln>
         </p:spPr>
         <p:txBody>
-          <a:bodyPr lIns="0" rIns="0" tIns="0" bIns="0" anchor="t">
+          <a:bodyPr lIns="0" tIns="0" rIns="0" bIns="0" anchor="t">
             <a:normAutofit/>
           </a:bodyPr>
-          <a:p>
-            <a:endParaRPr b="0" lang="en-GB" sz="3200" spc="-1" strike="noStrike">
+          <a:lstStyle/>
+          <a:p>
+            <a:endParaRPr lang="en-GB" sz="3200" b="0" strike="noStrike" spc="-1">
               <a:latin typeface="Arial"/>
             </a:endParaRPr>
           </a:p>
@@ -3959,11 +4343,14 @@
       </p:sp>
     </p:spTree>
   </p:cSld>
+  <p:clrMapOvr>
+    <a:masterClrMapping/>
+  </p:clrMapOvr>
 </p:sldLayout>
 </file>
 
 <file path=ppt/slideLayouts/slideLayout8.xml><?xml version="1.0" encoding="utf-8"?>
-<p:sldLayout xmlns:a="http://schemas.openxmlformats.org/drawingml/2006/main" xmlns:p="http://schemas.openxmlformats.org/presentationml/2006/main" xmlns:r="http://schemas.openxmlformats.org/officeDocument/2006/relationships" xmlns:p14="http://schemas.microsoft.com/office/powerpoint/2010/main" xmlns:p15="http://schemas.microsoft.com/office/powerpoint/2012/main" xmlns:mc="http://schemas.openxmlformats.org/markup-compatibility/2006" type="objAndTwoObj" preserve="1">
+<p:sldLayout xmlns:a="http://schemas.openxmlformats.org/drawingml/2006/main" xmlns:r="http://schemas.openxmlformats.org/officeDocument/2006/relationships" xmlns:p="http://schemas.openxmlformats.org/presentationml/2006/main" type="objAndTwoObj" preserve="1">
   <p:cSld name="Title Content and 2 Content">
     <p:spTree>
       <p:nvGrpSpPr>
@@ -4003,14 +4390,15 @@
           </a:ln>
         </p:spPr>
         <p:txBody>
-          <a:bodyPr lIns="0" rIns="0" tIns="0" bIns="0" anchor="ctr">
+          <a:bodyPr lIns="0" tIns="0" rIns="0" bIns="0" anchor="ctr">
             <a:noAutofit/>
           </a:bodyPr>
+          <a:lstStyle/>
           <a:p>
             <a:pPr algn="ctr">
               <a:buNone/>
             </a:pPr>
-            <a:endParaRPr b="0" lang="en-GB" sz="4400" spc="-1" strike="noStrike">
+            <a:endParaRPr lang="en-GB" sz="4400" b="0" strike="noStrike" spc="-1">
               <a:latin typeface="Arial"/>
             </a:endParaRPr>
           </a:p>
@@ -4040,11 +4428,12 @@
           </a:ln>
         </p:spPr>
         <p:txBody>
-          <a:bodyPr lIns="0" rIns="0" tIns="0" bIns="0" anchor="t">
+          <a:bodyPr lIns="0" tIns="0" rIns="0" bIns="0" anchor="t">
             <a:normAutofit/>
           </a:bodyPr>
-          <a:p>
-            <a:endParaRPr b="0" lang="en-GB" sz="3200" spc="-1" strike="noStrike">
+          <a:lstStyle/>
+          <a:p>
+            <a:endParaRPr lang="en-GB" sz="3200" b="0" strike="noStrike" spc="-1">
               <a:latin typeface="Arial"/>
             </a:endParaRPr>
           </a:p>
@@ -4074,11 +4463,12 @@
           </a:ln>
         </p:spPr>
         <p:txBody>
-          <a:bodyPr lIns="0" rIns="0" tIns="0" bIns="0" anchor="t">
+          <a:bodyPr lIns="0" tIns="0" rIns="0" bIns="0" anchor="t">
             <a:normAutofit/>
           </a:bodyPr>
-          <a:p>
-            <a:endParaRPr b="0" lang="en-GB" sz="3200" spc="-1" strike="noStrike">
+          <a:lstStyle/>
+          <a:p>
+            <a:endParaRPr lang="en-GB" sz="3200" b="0" strike="noStrike" spc="-1">
               <a:latin typeface="Arial"/>
             </a:endParaRPr>
           </a:p>
@@ -4108,11 +4498,12 @@
           </a:ln>
         </p:spPr>
         <p:txBody>
-          <a:bodyPr lIns="0" rIns="0" tIns="0" bIns="0" anchor="t">
+          <a:bodyPr lIns="0" tIns="0" rIns="0" bIns="0" anchor="t">
             <a:normAutofit/>
           </a:bodyPr>
-          <a:p>
-            <a:endParaRPr b="0" lang="en-GB" sz="3200" spc="-1" strike="noStrike">
+          <a:lstStyle/>
+          <a:p>
+            <a:endParaRPr lang="en-GB" sz="3200" b="0" strike="noStrike" spc="-1">
               <a:latin typeface="Arial"/>
             </a:endParaRPr>
           </a:p>
@@ -4120,11 +4511,14 @@
       </p:sp>
     </p:spTree>
   </p:cSld>
+  <p:clrMapOvr>
+    <a:masterClrMapping/>
+  </p:clrMapOvr>
 </p:sldLayout>
 </file>
 
 <file path=ppt/slideLayouts/slideLayout9.xml><?xml version="1.0" encoding="utf-8"?>
-<p:sldLayout xmlns:a="http://schemas.openxmlformats.org/drawingml/2006/main" xmlns:p="http://schemas.openxmlformats.org/presentationml/2006/main" xmlns:r="http://schemas.openxmlformats.org/officeDocument/2006/relationships" xmlns:p14="http://schemas.microsoft.com/office/powerpoint/2010/main" xmlns:p15="http://schemas.microsoft.com/office/powerpoint/2012/main" xmlns:mc="http://schemas.openxmlformats.org/markup-compatibility/2006" type="twoObjOverTx" preserve="1">
+<p:sldLayout xmlns:a="http://schemas.openxmlformats.org/drawingml/2006/main" xmlns:r="http://schemas.openxmlformats.org/officeDocument/2006/relationships" xmlns:p="http://schemas.openxmlformats.org/presentationml/2006/main" type="twoObjOverTx" preserve="1">
   <p:cSld name="Title, 2 Content over Content">
     <p:spTree>
       <p:nvGrpSpPr>
@@ -4164,14 +4558,15 @@
           </a:ln>
         </p:spPr>
         <p:txBody>
-          <a:bodyPr lIns="0" rIns="0" tIns="0" bIns="0" anchor="ctr">
+          <a:bodyPr lIns="0" tIns="0" rIns="0" bIns="0" anchor="ctr">
             <a:noAutofit/>
           </a:bodyPr>
+          <a:lstStyle/>
           <a:p>
             <a:pPr algn="ctr">
               <a:buNone/>
             </a:pPr>
-            <a:endParaRPr b="0" lang="en-GB" sz="4400" spc="-1" strike="noStrike">
+            <a:endParaRPr lang="en-GB" sz="4400" b="0" strike="noStrike" spc="-1">
               <a:latin typeface="Arial"/>
             </a:endParaRPr>
           </a:p>
@@ -4201,11 +4596,12 @@
           </a:ln>
         </p:spPr>
         <p:txBody>
-          <a:bodyPr lIns="0" rIns="0" tIns="0" bIns="0" anchor="t">
+          <a:bodyPr lIns="0" tIns="0" rIns="0" bIns="0" anchor="t">
             <a:normAutofit/>
           </a:bodyPr>
-          <a:p>
-            <a:endParaRPr b="0" lang="en-GB" sz="3200" spc="-1" strike="noStrike">
+          <a:lstStyle/>
+          <a:p>
+            <a:endParaRPr lang="en-GB" sz="3200" b="0" strike="noStrike" spc="-1">
               <a:latin typeface="Arial"/>
             </a:endParaRPr>
           </a:p>
@@ -4235,11 +4631,12 @@
           </a:ln>
         </p:spPr>
         <p:txBody>
-          <a:bodyPr lIns="0" rIns="0" tIns="0" bIns="0" anchor="t">
+          <a:bodyPr lIns="0" tIns="0" rIns="0" bIns="0" anchor="t">
             <a:normAutofit/>
           </a:bodyPr>
-          <a:p>
-            <a:endParaRPr b="0" lang="en-GB" sz="3200" spc="-1" strike="noStrike">
+          <a:lstStyle/>
+          <a:p>
+            <a:endParaRPr lang="en-GB" sz="3200" b="0" strike="noStrike" spc="-1">
               <a:latin typeface="Arial"/>
             </a:endParaRPr>
           </a:p>
@@ -4269,11 +4666,12 @@
           </a:ln>
         </p:spPr>
         <p:txBody>
-          <a:bodyPr lIns="0" rIns="0" tIns="0" bIns="0" anchor="t">
+          <a:bodyPr lIns="0" tIns="0" rIns="0" bIns="0" anchor="t">
             <a:normAutofit/>
           </a:bodyPr>
-          <a:p>
-            <a:endParaRPr b="0" lang="en-GB" sz="3200" spc="-1" strike="noStrike">
+          <a:lstStyle/>
+          <a:p>
+            <a:endParaRPr lang="en-GB" sz="3200" b="0" strike="noStrike" spc="-1">
               <a:latin typeface="Arial"/>
             </a:endParaRPr>
           </a:p>
@@ -4281,17 +4679,21 @@
       </p:sp>
     </p:spTree>
   </p:cSld>
+  <p:clrMapOvr>
+    <a:masterClrMapping/>
+  </p:clrMapOvr>
 </p:sldLayout>
 </file>
 
 <file path=ppt/slideMasters/slideMaster1.xml><?xml version="1.0" encoding="utf-8"?>
-<p:sldMaster xmlns:a="http://schemas.openxmlformats.org/drawingml/2006/main" xmlns:p="http://schemas.openxmlformats.org/presentationml/2006/main" xmlns:r="http://schemas.openxmlformats.org/officeDocument/2006/relationships" xmlns:p14="http://schemas.microsoft.com/office/powerpoint/2010/main" xmlns:p15="http://schemas.microsoft.com/office/powerpoint/2012/main" xmlns:mc="http://schemas.openxmlformats.org/markup-compatibility/2006">
+<p:sldMaster xmlns:a="http://schemas.openxmlformats.org/drawingml/2006/main" xmlns:r="http://schemas.openxmlformats.org/officeDocument/2006/relationships" xmlns:p="http://schemas.openxmlformats.org/presentationml/2006/main">
   <p:cSld>
     <p:bg>
       <p:bgPr>
         <a:solidFill>
-          <a:srgbClr val="00689a"/>
+          <a:srgbClr val="00689A"/>
         </a:solidFill>
+        <a:effectLst/>
       </p:bgPr>
     </p:bg>
     <p:spTree>
@@ -4310,12 +4712,12 @@
       </p:grpSpPr>
       <p:pic>
         <p:nvPicPr>
-          <p:cNvPr id="0" name="Afbeelding 11" descr=""/>
+          <p:cNvPr id="6" name="Afbeelding 11"/>
           <p:cNvPicPr/>
           <p:nvPr/>
         </p:nvPicPr>
         <p:blipFill>
-          <a:blip r:embed="rId2"/>
+          <a:blip r:embed="rId14"/>
           <a:stretch/>
         </p:blipFill>
         <p:spPr>
@@ -4333,7 +4735,7 @@
       </p:pic>
       <p:sp>
         <p:nvSpPr>
-          <p:cNvPr id="1" name="CustomShape 1" hidden="1"/>
+          <p:cNvPr id="7" name="CustomShape 1" hidden="1"/>
           <p:cNvSpPr/>
           <p:nvPr/>
         </p:nvSpPr>
@@ -4405,12 +4807,12 @@
       </p:sp>
       <p:pic>
         <p:nvPicPr>
-          <p:cNvPr id="3" name="Afbeelding 7" descr=""/>
+          <p:cNvPr id="3" name="Afbeelding 7"/>
           <p:cNvPicPr/>
           <p:nvPr/>
         </p:nvPicPr>
         <p:blipFill>
-          <a:blip r:embed="rId3"/>
+          <a:blip r:embed="rId15"/>
           <a:stretch/>
         </p:blipFill>
         <p:spPr>
@@ -4450,22 +4852,20 @@
           </a:ln>
         </p:spPr>
         <p:txBody>
-          <a:bodyPr lIns="0" rIns="0" tIns="0" bIns="0" anchor="ctr">
+          <a:bodyPr lIns="0" tIns="0" rIns="0" bIns="0" anchor="ctr">
             <a:noAutofit/>
           </a:bodyPr>
+          <a:lstStyle/>
           <a:p>
             <a:pPr algn="ctr">
               <a:buNone/>
             </a:pPr>
             <a:r>
-              <a:rPr b="0" lang="en-GB" sz="4400" spc="-1" strike="noStrike">
+              <a:rPr lang="en-GB" sz="4400" b="0" strike="noStrike" spc="-1">
                 <a:latin typeface="Arial"/>
               </a:rPr>
               <a:t>Click to edit the title text format</a:t>
             </a:r>
-            <a:endParaRPr b="0" lang="en-GB" sz="4400" spc="-1" strike="noStrike">
-              <a:latin typeface="Arial"/>
-            </a:endParaRPr>
           </a:p>
         </p:txBody>
       </p:sp>
@@ -4493,9 +4893,10 @@
           </a:ln>
         </p:spPr>
         <p:txBody>
-          <a:bodyPr lIns="0" rIns="0" tIns="0" bIns="0" anchor="t">
+          <a:bodyPr lIns="0" tIns="0" rIns="0" bIns="0" anchor="t">
             <a:normAutofit/>
           </a:bodyPr>
+          <a:lstStyle/>
           <a:p>
             <a:pPr marL="432000" indent="-324000">
               <a:spcBef>
@@ -4509,17 +4910,14 @@
               <a:buChar char=""/>
             </a:pPr>
             <a:r>
-              <a:rPr b="0" lang="en-GB" sz="3200" spc="-1" strike="noStrike">
+              <a:rPr lang="en-GB" sz="3200" b="0" strike="noStrike" spc="-1">
                 <a:latin typeface="Arial"/>
               </a:rPr>
               <a:t>Click to edit the outline text format</a:t>
             </a:r>
-            <a:endParaRPr b="0" lang="en-GB" sz="3200" spc="-1" strike="noStrike">
-              <a:latin typeface="Arial"/>
-            </a:endParaRPr>
-          </a:p>
-          <a:p>
-            <a:pPr lvl="1" marL="864000" indent="-324000">
+          </a:p>
+          <a:p>
+            <a:pPr marL="864000" lvl="1" indent="-324000">
               <a:spcBef>
                 <a:spcPts val="1134"/>
               </a:spcBef>
@@ -4531,17 +4929,14 @@
               <a:buChar char=""/>
             </a:pPr>
             <a:r>
-              <a:rPr b="0" lang="en-GB" sz="2800" spc="-1" strike="noStrike">
+              <a:rPr lang="en-GB" sz="2800" b="0" strike="noStrike" spc="-1">
                 <a:latin typeface="Arial"/>
               </a:rPr>
               <a:t>Second Outline Level</a:t>
             </a:r>
-            <a:endParaRPr b="0" lang="en-GB" sz="2800" spc="-1" strike="noStrike">
-              <a:latin typeface="Arial"/>
-            </a:endParaRPr>
-          </a:p>
-          <a:p>
-            <a:pPr lvl="2" marL="1296000" indent="-288000">
+          </a:p>
+          <a:p>
+            <a:pPr marL="1296000" lvl="2" indent="-288000">
               <a:spcBef>
                 <a:spcPts val="850"/>
               </a:spcBef>
@@ -4553,17 +4948,14 @@
               <a:buChar char=""/>
             </a:pPr>
             <a:r>
-              <a:rPr b="0" lang="en-GB" sz="2400" spc="-1" strike="noStrike">
+              <a:rPr lang="en-GB" sz="2400" b="0" strike="noStrike" spc="-1">
                 <a:latin typeface="Arial"/>
               </a:rPr>
               <a:t>Third Outline Level</a:t>
             </a:r>
-            <a:endParaRPr b="0" lang="en-GB" sz="2400" spc="-1" strike="noStrike">
-              <a:latin typeface="Arial"/>
-            </a:endParaRPr>
-          </a:p>
-          <a:p>
-            <a:pPr lvl="3" marL="1728000" indent="-216000">
+          </a:p>
+          <a:p>
+            <a:pPr marL="1728000" lvl="3" indent="-216000">
               <a:spcBef>
                 <a:spcPts val="567"/>
               </a:spcBef>
@@ -4575,17 +4967,14 @@
               <a:buChar char=""/>
             </a:pPr>
             <a:r>
-              <a:rPr b="0" lang="en-GB" sz="2000" spc="-1" strike="noStrike">
+              <a:rPr lang="en-GB" sz="2000" b="0" strike="noStrike" spc="-1">
                 <a:latin typeface="Arial"/>
               </a:rPr>
               <a:t>Fourth Outline Level</a:t>
             </a:r>
-            <a:endParaRPr b="0" lang="en-GB" sz="2000" spc="-1" strike="noStrike">
-              <a:latin typeface="Arial"/>
-            </a:endParaRPr>
-          </a:p>
-          <a:p>
-            <a:pPr lvl="4" marL="2160000" indent="-216000">
+          </a:p>
+          <a:p>
+            <a:pPr marL="2160000" lvl="4" indent="-216000">
               <a:spcBef>
                 <a:spcPts val="283"/>
               </a:spcBef>
@@ -4597,17 +4986,14 @@
               <a:buChar char=""/>
             </a:pPr>
             <a:r>
-              <a:rPr b="0" lang="en-GB" sz="2000" spc="-1" strike="noStrike">
+              <a:rPr lang="en-GB" sz="2000" b="0" strike="noStrike" spc="-1">
                 <a:latin typeface="Arial"/>
               </a:rPr>
               <a:t>Fifth Outline Level</a:t>
             </a:r>
-            <a:endParaRPr b="0" lang="en-GB" sz="2000" spc="-1" strike="noStrike">
-              <a:latin typeface="Arial"/>
-            </a:endParaRPr>
-          </a:p>
-          <a:p>
-            <a:pPr lvl="5" marL="2592000" indent="-216000">
+          </a:p>
+          <a:p>
+            <a:pPr marL="2592000" lvl="5" indent="-216000">
               <a:spcBef>
                 <a:spcPts val="283"/>
               </a:spcBef>
@@ -4619,17 +5005,14 @@
               <a:buChar char=""/>
             </a:pPr>
             <a:r>
-              <a:rPr b="0" lang="en-GB" sz="2000" spc="-1" strike="noStrike">
+              <a:rPr lang="en-GB" sz="2000" b="0" strike="noStrike" spc="-1">
                 <a:latin typeface="Arial"/>
               </a:rPr>
               <a:t>Sixth Outline Level</a:t>
             </a:r>
-            <a:endParaRPr b="0" lang="en-GB" sz="2000" spc="-1" strike="noStrike">
-              <a:latin typeface="Arial"/>
-            </a:endParaRPr>
-          </a:p>
-          <a:p>
-            <a:pPr lvl="6" marL="3024000" indent="-216000">
+          </a:p>
+          <a:p>
+            <a:pPr marL="3024000" lvl="6" indent="-216000">
               <a:spcBef>
                 <a:spcPts val="283"/>
               </a:spcBef>
@@ -4641,45 +5024,323 @@
               <a:buChar char=""/>
             </a:pPr>
             <a:r>
-              <a:rPr b="0" lang="en-GB" sz="2000" spc="-1" strike="noStrike">
+              <a:rPr lang="en-GB" sz="2000" b="0" strike="noStrike" spc="-1">
                 <a:latin typeface="Arial"/>
               </a:rPr>
               <a:t>Seventh Outline Level</a:t>
             </a:r>
-            <a:endParaRPr b="0" lang="en-GB" sz="2000" spc="-1" strike="noStrike">
-              <a:latin typeface="Arial"/>
-            </a:endParaRPr>
           </a:p>
         </p:txBody>
       </p:sp>
     </p:spTree>
   </p:cSld>
-  <p:clrMap bg1="lt1" bg2="lt2" tx1="dk1" tx2="dk2" accent1="accent1" accent2="accent2" accent3="accent3" accent4="accent4" accent5="accent5" accent6="accent6" hlink="hlink" folHlink="folHlink"/>
+  <p:clrMap bg1="lt1" tx1="dk1" bg2="lt2" tx2="dk2" accent1="accent1" accent2="accent2" accent3="accent3" accent4="accent4" accent5="accent5" accent6="accent6" hlink="hlink" folHlink="folHlink"/>
   <p:sldLayoutIdLst>
-    <p:sldLayoutId id="2147483649" r:id="rId4"/>
-    <p:sldLayoutId id="2147483650" r:id="rId5"/>
-    <p:sldLayoutId id="2147483651" r:id="rId6"/>
-    <p:sldLayoutId id="2147483652" r:id="rId7"/>
-    <p:sldLayoutId id="2147483653" r:id="rId8"/>
-    <p:sldLayoutId id="2147483654" r:id="rId9"/>
-    <p:sldLayoutId id="2147483655" r:id="rId10"/>
-    <p:sldLayoutId id="2147483656" r:id="rId11"/>
-    <p:sldLayoutId id="2147483657" r:id="rId12"/>
-    <p:sldLayoutId id="2147483658" r:id="rId13"/>
-    <p:sldLayoutId id="2147483659" r:id="rId14"/>
-    <p:sldLayoutId id="2147483660" r:id="rId15"/>
+    <p:sldLayoutId id="2147483649" r:id="rId1"/>
+    <p:sldLayoutId id="2147483650" r:id="rId2"/>
+    <p:sldLayoutId id="2147483651" r:id="rId3"/>
+    <p:sldLayoutId id="2147483652" r:id="rId4"/>
+    <p:sldLayoutId id="2147483653" r:id="rId5"/>
+    <p:sldLayoutId id="2147483654" r:id="rId6"/>
+    <p:sldLayoutId id="2147483655" r:id="rId7"/>
+    <p:sldLayoutId id="2147483656" r:id="rId8"/>
+    <p:sldLayoutId id="2147483657" r:id="rId9"/>
+    <p:sldLayoutId id="2147483658" r:id="rId10"/>
+    <p:sldLayoutId id="2147483659" r:id="rId11"/>
+    <p:sldLayoutId id="2147483660" r:id="rId12"/>
   </p:sldLayoutIdLst>
+  <p:txStyles>
+    <p:titleStyle>
+      <a:lvl1pPr algn="l" defTabSz="914400" rtl="0" eaLnBrk="1" latinLnBrk="0" hangingPunct="1">
+        <a:lnSpc>
+          <a:spcPct val="90000"/>
+        </a:lnSpc>
+        <a:spcBef>
+          <a:spcPct val="0"/>
+        </a:spcBef>
+        <a:buNone/>
+        <a:defRPr sz="4400" kern="1200">
+          <a:solidFill>
+            <a:schemeClr val="tx1"/>
+          </a:solidFill>
+          <a:latin typeface="+mj-lt"/>
+          <a:ea typeface="+mj-ea"/>
+          <a:cs typeface="+mj-cs"/>
+        </a:defRPr>
+      </a:lvl1pPr>
+    </p:titleStyle>
+    <p:bodyStyle>
+      <a:lvl1pPr marL="228600" indent="-228600" algn="l" defTabSz="914400" rtl="0" eaLnBrk="1" latinLnBrk="0" hangingPunct="1">
+        <a:lnSpc>
+          <a:spcPct val="90000"/>
+        </a:lnSpc>
+        <a:spcBef>
+          <a:spcPts val="1000"/>
+        </a:spcBef>
+        <a:buFont typeface="Arial" panose="020B0604020202020204" pitchFamily="34" charset="0"/>
+        <a:buChar char="•"/>
+        <a:defRPr sz="2800" kern="1200">
+          <a:solidFill>
+            <a:schemeClr val="tx1"/>
+          </a:solidFill>
+          <a:latin typeface="+mn-lt"/>
+          <a:ea typeface="+mn-ea"/>
+          <a:cs typeface="+mn-cs"/>
+        </a:defRPr>
+      </a:lvl1pPr>
+      <a:lvl2pPr marL="685800" indent="-228600" algn="l" defTabSz="914400" rtl="0" eaLnBrk="1" latinLnBrk="0" hangingPunct="1">
+        <a:lnSpc>
+          <a:spcPct val="90000"/>
+        </a:lnSpc>
+        <a:spcBef>
+          <a:spcPts val="500"/>
+        </a:spcBef>
+        <a:buFont typeface="Arial" panose="020B0604020202020204" pitchFamily="34" charset="0"/>
+        <a:buChar char="•"/>
+        <a:defRPr sz="2400" kern="1200">
+          <a:solidFill>
+            <a:schemeClr val="tx1"/>
+          </a:solidFill>
+          <a:latin typeface="+mn-lt"/>
+          <a:ea typeface="+mn-ea"/>
+          <a:cs typeface="+mn-cs"/>
+        </a:defRPr>
+      </a:lvl2pPr>
+      <a:lvl3pPr marL="1143000" indent="-228600" algn="l" defTabSz="914400" rtl="0" eaLnBrk="1" latinLnBrk="0" hangingPunct="1">
+        <a:lnSpc>
+          <a:spcPct val="90000"/>
+        </a:lnSpc>
+        <a:spcBef>
+          <a:spcPts val="500"/>
+        </a:spcBef>
+        <a:buFont typeface="Arial" panose="020B0604020202020204" pitchFamily="34" charset="0"/>
+        <a:buChar char="•"/>
+        <a:defRPr sz="2000" kern="1200">
+          <a:solidFill>
+            <a:schemeClr val="tx1"/>
+          </a:solidFill>
+          <a:latin typeface="+mn-lt"/>
+          <a:ea typeface="+mn-ea"/>
+          <a:cs typeface="+mn-cs"/>
+        </a:defRPr>
+      </a:lvl3pPr>
+      <a:lvl4pPr marL="1600200" indent="-228600" algn="l" defTabSz="914400" rtl="0" eaLnBrk="1" latinLnBrk="0" hangingPunct="1">
+        <a:lnSpc>
+          <a:spcPct val="90000"/>
+        </a:lnSpc>
+        <a:spcBef>
+          <a:spcPts val="500"/>
+        </a:spcBef>
+        <a:buFont typeface="Arial" panose="020B0604020202020204" pitchFamily="34" charset="0"/>
+        <a:buChar char="•"/>
+        <a:defRPr sz="1800" kern="1200">
+          <a:solidFill>
+            <a:schemeClr val="tx1"/>
+          </a:solidFill>
+          <a:latin typeface="+mn-lt"/>
+          <a:ea typeface="+mn-ea"/>
+          <a:cs typeface="+mn-cs"/>
+        </a:defRPr>
+      </a:lvl4pPr>
+      <a:lvl5pPr marL="2057400" indent="-228600" algn="l" defTabSz="914400" rtl="0" eaLnBrk="1" latinLnBrk="0" hangingPunct="1">
+        <a:lnSpc>
+          <a:spcPct val="90000"/>
+        </a:lnSpc>
+        <a:spcBef>
+          <a:spcPts val="500"/>
+        </a:spcBef>
+        <a:buFont typeface="Arial" panose="020B0604020202020204" pitchFamily="34" charset="0"/>
+        <a:buChar char="•"/>
+        <a:defRPr sz="1800" kern="1200">
+          <a:solidFill>
+            <a:schemeClr val="tx1"/>
+          </a:solidFill>
+          <a:latin typeface="+mn-lt"/>
+          <a:ea typeface="+mn-ea"/>
+          <a:cs typeface="+mn-cs"/>
+        </a:defRPr>
+      </a:lvl5pPr>
+      <a:lvl6pPr marL="2514600" indent="-228600" algn="l" defTabSz="914400" rtl="0" eaLnBrk="1" latinLnBrk="0" hangingPunct="1">
+        <a:lnSpc>
+          <a:spcPct val="90000"/>
+        </a:lnSpc>
+        <a:spcBef>
+          <a:spcPts val="500"/>
+        </a:spcBef>
+        <a:buFont typeface="Arial" panose="020B0604020202020204" pitchFamily="34" charset="0"/>
+        <a:buChar char="•"/>
+        <a:defRPr sz="1800" kern="1200">
+          <a:solidFill>
+            <a:schemeClr val="tx1"/>
+          </a:solidFill>
+          <a:latin typeface="+mn-lt"/>
+          <a:ea typeface="+mn-ea"/>
+          <a:cs typeface="+mn-cs"/>
+        </a:defRPr>
+      </a:lvl6pPr>
+      <a:lvl7pPr marL="2971800" indent="-228600" algn="l" defTabSz="914400" rtl="0" eaLnBrk="1" latinLnBrk="0" hangingPunct="1">
+        <a:lnSpc>
+          <a:spcPct val="90000"/>
+        </a:lnSpc>
+        <a:spcBef>
+          <a:spcPts val="500"/>
+        </a:spcBef>
+        <a:buFont typeface="Arial" panose="020B0604020202020204" pitchFamily="34" charset="0"/>
+        <a:buChar char="•"/>
+        <a:defRPr sz="1800" kern="1200">
+          <a:solidFill>
+            <a:schemeClr val="tx1"/>
+          </a:solidFill>
+          <a:latin typeface="+mn-lt"/>
+          <a:ea typeface="+mn-ea"/>
+          <a:cs typeface="+mn-cs"/>
+        </a:defRPr>
+      </a:lvl7pPr>
+      <a:lvl8pPr marL="3429000" indent="-228600" algn="l" defTabSz="914400" rtl="0" eaLnBrk="1" latinLnBrk="0" hangingPunct="1">
+        <a:lnSpc>
+          <a:spcPct val="90000"/>
+        </a:lnSpc>
+        <a:spcBef>
+          <a:spcPts val="500"/>
+        </a:spcBef>
+        <a:buFont typeface="Arial" panose="020B0604020202020204" pitchFamily="34" charset="0"/>
+        <a:buChar char="•"/>
+        <a:defRPr sz="1800" kern="1200">
+          <a:solidFill>
+            <a:schemeClr val="tx1"/>
+          </a:solidFill>
+          <a:latin typeface="+mn-lt"/>
+          <a:ea typeface="+mn-ea"/>
+          <a:cs typeface="+mn-cs"/>
+        </a:defRPr>
+      </a:lvl8pPr>
+      <a:lvl9pPr marL="3886200" indent="-228600" algn="l" defTabSz="914400" rtl="0" eaLnBrk="1" latinLnBrk="0" hangingPunct="1">
+        <a:lnSpc>
+          <a:spcPct val="90000"/>
+        </a:lnSpc>
+        <a:spcBef>
+          <a:spcPts val="500"/>
+        </a:spcBef>
+        <a:buFont typeface="Arial" panose="020B0604020202020204" pitchFamily="34" charset="0"/>
+        <a:buChar char="•"/>
+        <a:defRPr sz="1800" kern="1200">
+          <a:solidFill>
+            <a:schemeClr val="tx1"/>
+          </a:solidFill>
+          <a:latin typeface="+mn-lt"/>
+          <a:ea typeface="+mn-ea"/>
+          <a:cs typeface="+mn-cs"/>
+        </a:defRPr>
+      </a:lvl9pPr>
+    </p:bodyStyle>
+    <p:otherStyle>
+      <a:defPPr>
+        <a:defRPr lang="en-US"/>
+      </a:defPPr>
+      <a:lvl1pPr marL="0" algn="l" defTabSz="914400" rtl="0" eaLnBrk="1" latinLnBrk="0" hangingPunct="1">
+        <a:defRPr sz="1800" kern="1200">
+          <a:solidFill>
+            <a:schemeClr val="tx1"/>
+          </a:solidFill>
+          <a:latin typeface="+mn-lt"/>
+          <a:ea typeface="+mn-ea"/>
+          <a:cs typeface="+mn-cs"/>
+        </a:defRPr>
+      </a:lvl1pPr>
+      <a:lvl2pPr marL="457200" algn="l" defTabSz="914400" rtl="0" eaLnBrk="1" latinLnBrk="0" hangingPunct="1">
+        <a:defRPr sz="1800" kern="1200">
+          <a:solidFill>
+            <a:schemeClr val="tx1"/>
+          </a:solidFill>
+          <a:latin typeface="+mn-lt"/>
+          <a:ea typeface="+mn-ea"/>
+          <a:cs typeface="+mn-cs"/>
+        </a:defRPr>
+      </a:lvl2pPr>
+      <a:lvl3pPr marL="914400" algn="l" defTabSz="914400" rtl="0" eaLnBrk="1" latinLnBrk="0" hangingPunct="1">
+        <a:defRPr sz="1800" kern="1200">
+          <a:solidFill>
+            <a:schemeClr val="tx1"/>
+          </a:solidFill>
+          <a:latin typeface="+mn-lt"/>
+          <a:ea typeface="+mn-ea"/>
+          <a:cs typeface="+mn-cs"/>
+        </a:defRPr>
+      </a:lvl3pPr>
+      <a:lvl4pPr marL="1371600" algn="l" defTabSz="914400" rtl="0" eaLnBrk="1" latinLnBrk="0" hangingPunct="1">
+        <a:defRPr sz="1800" kern="1200">
+          <a:solidFill>
+            <a:schemeClr val="tx1"/>
+          </a:solidFill>
+          <a:latin typeface="+mn-lt"/>
+          <a:ea typeface="+mn-ea"/>
+          <a:cs typeface="+mn-cs"/>
+        </a:defRPr>
+      </a:lvl4pPr>
+      <a:lvl5pPr marL="1828800" algn="l" defTabSz="914400" rtl="0" eaLnBrk="1" latinLnBrk="0" hangingPunct="1">
+        <a:defRPr sz="1800" kern="1200">
+          <a:solidFill>
+            <a:schemeClr val="tx1"/>
+          </a:solidFill>
+          <a:latin typeface="+mn-lt"/>
+          <a:ea typeface="+mn-ea"/>
+          <a:cs typeface="+mn-cs"/>
+        </a:defRPr>
+      </a:lvl5pPr>
+      <a:lvl6pPr marL="2286000" algn="l" defTabSz="914400" rtl="0" eaLnBrk="1" latinLnBrk="0" hangingPunct="1">
+        <a:defRPr sz="1800" kern="1200">
+          <a:solidFill>
+            <a:schemeClr val="tx1"/>
+          </a:solidFill>
+          <a:latin typeface="+mn-lt"/>
+          <a:ea typeface="+mn-ea"/>
+          <a:cs typeface="+mn-cs"/>
+        </a:defRPr>
+      </a:lvl6pPr>
+      <a:lvl7pPr marL="2743200" algn="l" defTabSz="914400" rtl="0" eaLnBrk="1" latinLnBrk="0" hangingPunct="1">
+        <a:defRPr sz="1800" kern="1200">
+          <a:solidFill>
+            <a:schemeClr val="tx1"/>
+          </a:solidFill>
+          <a:latin typeface="+mn-lt"/>
+          <a:ea typeface="+mn-ea"/>
+          <a:cs typeface="+mn-cs"/>
+        </a:defRPr>
+      </a:lvl7pPr>
+      <a:lvl8pPr marL="3200400" algn="l" defTabSz="914400" rtl="0" eaLnBrk="1" latinLnBrk="0" hangingPunct="1">
+        <a:defRPr sz="1800" kern="1200">
+          <a:solidFill>
+            <a:schemeClr val="tx1"/>
+          </a:solidFill>
+          <a:latin typeface="+mn-lt"/>
+          <a:ea typeface="+mn-ea"/>
+          <a:cs typeface="+mn-cs"/>
+        </a:defRPr>
+      </a:lvl8pPr>
+      <a:lvl9pPr marL="3657600" algn="l" defTabSz="914400" rtl="0" eaLnBrk="1" latinLnBrk="0" hangingPunct="1">
+        <a:defRPr sz="1800" kern="1200">
+          <a:solidFill>
+            <a:schemeClr val="tx1"/>
+          </a:solidFill>
+          <a:latin typeface="+mn-lt"/>
+          <a:ea typeface="+mn-ea"/>
+          <a:cs typeface="+mn-cs"/>
+        </a:defRPr>
+      </a:lvl9pPr>
+    </p:otherStyle>
+  </p:txStyles>
 </p:sldMaster>
 </file>
 
 <file path=ppt/slideMasters/slideMaster2.xml><?xml version="1.0" encoding="utf-8"?>
-<p:sldMaster xmlns:a="http://schemas.openxmlformats.org/drawingml/2006/main" xmlns:p="http://schemas.openxmlformats.org/presentationml/2006/main" xmlns:r="http://schemas.openxmlformats.org/officeDocument/2006/relationships" xmlns:p14="http://schemas.microsoft.com/office/powerpoint/2010/main" xmlns:p15="http://schemas.microsoft.com/office/powerpoint/2012/main" xmlns:mc="http://schemas.openxmlformats.org/markup-compatibility/2006">
+<p:sldMaster xmlns:a="http://schemas.openxmlformats.org/drawingml/2006/main" xmlns:r="http://schemas.openxmlformats.org/officeDocument/2006/relationships" xmlns:p="http://schemas.openxmlformats.org/presentationml/2006/main">
   <p:cSld>
     <p:bg>
       <p:bgPr>
         <a:solidFill>
-          <a:srgbClr val="ffffff"/>
+          <a:srgbClr val="FFFFFF"/>
         </a:solidFill>
+        <a:effectLst/>
       </p:bgPr>
     </p:bg>
     <p:spTree>
@@ -4698,12 +5359,12 @@
       </p:grpSpPr>
       <p:pic>
         <p:nvPicPr>
-          <p:cNvPr id="42" name="Afbeelding 11" descr=""/>
+          <p:cNvPr id="42" name="Afbeelding 11"/>
           <p:cNvPicPr/>
           <p:nvPr/>
         </p:nvPicPr>
         <p:blipFill>
-          <a:blip r:embed="rId2"/>
+          <a:blip r:embed="rId14"/>
           <a:stretch/>
         </p:blipFill>
         <p:spPr>
@@ -4779,22 +5440,20 @@
           </a:ln>
         </p:spPr>
         <p:txBody>
-          <a:bodyPr lIns="0" rIns="0" tIns="0" bIns="0" anchor="ctr">
+          <a:bodyPr lIns="0" tIns="0" rIns="0" bIns="0" anchor="ctr">
             <a:noAutofit/>
           </a:bodyPr>
+          <a:lstStyle/>
           <a:p>
             <a:pPr algn="ctr">
               <a:buNone/>
             </a:pPr>
             <a:r>
-              <a:rPr b="0" lang="en-GB" sz="4400" spc="-1" strike="noStrike">
+              <a:rPr lang="en-GB" sz="4400" b="0" strike="noStrike" spc="-1">
                 <a:latin typeface="Arial"/>
               </a:rPr>
               <a:t>Click to edit the title text format</a:t>
             </a:r>
-            <a:endParaRPr b="0" lang="en-GB" sz="4400" spc="-1" strike="noStrike">
-              <a:latin typeface="Arial"/>
-            </a:endParaRPr>
           </a:p>
         </p:txBody>
       </p:sp>
@@ -4822,9 +5481,10 @@
           </a:ln>
         </p:spPr>
         <p:txBody>
-          <a:bodyPr lIns="0" rIns="0" tIns="0" bIns="0" anchor="t">
+          <a:bodyPr lIns="0" tIns="0" rIns="0" bIns="0" anchor="t">
             <a:normAutofit/>
           </a:bodyPr>
+          <a:lstStyle/>
           <a:p>
             <a:pPr marL="432000" indent="-324000">
               <a:spcBef>
@@ -4838,17 +5498,14 @@
               <a:buChar char=""/>
             </a:pPr>
             <a:r>
-              <a:rPr b="0" lang="en-GB" sz="3200" spc="-1" strike="noStrike">
+              <a:rPr lang="en-GB" sz="3200" b="0" strike="noStrike" spc="-1">
                 <a:latin typeface="Arial"/>
               </a:rPr>
               <a:t>Click to edit the outline text format</a:t>
             </a:r>
-            <a:endParaRPr b="0" lang="en-GB" sz="3200" spc="-1" strike="noStrike">
-              <a:latin typeface="Arial"/>
-            </a:endParaRPr>
-          </a:p>
-          <a:p>
-            <a:pPr lvl="1" marL="864000" indent="-324000">
+          </a:p>
+          <a:p>
+            <a:pPr marL="864000" lvl="1" indent="-324000">
               <a:spcBef>
                 <a:spcPts val="1134"/>
               </a:spcBef>
@@ -4860,17 +5517,14 @@
               <a:buChar char=""/>
             </a:pPr>
             <a:r>
-              <a:rPr b="0" lang="en-GB" sz="2800" spc="-1" strike="noStrike">
+              <a:rPr lang="en-GB" sz="2800" b="0" strike="noStrike" spc="-1">
                 <a:latin typeface="Arial"/>
               </a:rPr>
               <a:t>Second Outline Level</a:t>
             </a:r>
-            <a:endParaRPr b="0" lang="en-GB" sz="2800" spc="-1" strike="noStrike">
-              <a:latin typeface="Arial"/>
-            </a:endParaRPr>
-          </a:p>
-          <a:p>
-            <a:pPr lvl="2" marL="1296000" indent="-288000">
+          </a:p>
+          <a:p>
+            <a:pPr marL="1296000" lvl="2" indent="-288000">
               <a:spcBef>
                 <a:spcPts val="850"/>
               </a:spcBef>
@@ -4882,17 +5536,14 @@
               <a:buChar char=""/>
             </a:pPr>
             <a:r>
-              <a:rPr b="0" lang="en-GB" sz="2400" spc="-1" strike="noStrike">
+              <a:rPr lang="en-GB" sz="2400" b="0" strike="noStrike" spc="-1">
                 <a:latin typeface="Arial"/>
               </a:rPr>
               <a:t>Third Outline Level</a:t>
             </a:r>
-            <a:endParaRPr b="0" lang="en-GB" sz="2400" spc="-1" strike="noStrike">
-              <a:latin typeface="Arial"/>
-            </a:endParaRPr>
-          </a:p>
-          <a:p>
-            <a:pPr lvl="3" marL="1728000" indent="-216000">
+          </a:p>
+          <a:p>
+            <a:pPr marL="1728000" lvl="3" indent="-216000">
               <a:spcBef>
                 <a:spcPts val="567"/>
               </a:spcBef>
@@ -4904,17 +5555,14 @@
               <a:buChar char=""/>
             </a:pPr>
             <a:r>
-              <a:rPr b="0" lang="en-GB" sz="2000" spc="-1" strike="noStrike">
+              <a:rPr lang="en-GB" sz="2000" b="0" strike="noStrike" spc="-1">
                 <a:latin typeface="Arial"/>
               </a:rPr>
               <a:t>Fourth Outline Level</a:t>
             </a:r>
-            <a:endParaRPr b="0" lang="en-GB" sz="2000" spc="-1" strike="noStrike">
-              <a:latin typeface="Arial"/>
-            </a:endParaRPr>
-          </a:p>
-          <a:p>
-            <a:pPr lvl="4" marL="2160000" indent="-216000">
+          </a:p>
+          <a:p>
+            <a:pPr marL="2160000" lvl="4" indent="-216000">
               <a:spcBef>
                 <a:spcPts val="283"/>
               </a:spcBef>
@@ -4926,17 +5574,14 @@
               <a:buChar char=""/>
             </a:pPr>
             <a:r>
-              <a:rPr b="0" lang="en-GB" sz="2000" spc="-1" strike="noStrike">
+              <a:rPr lang="en-GB" sz="2000" b="0" strike="noStrike" spc="-1">
                 <a:latin typeface="Arial"/>
               </a:rPr>
               <a:t>Fifth Outline Level</a:t>
             </a:r>
-            <a:endParaRPr b="0" lang="en-GB" sz="2000" spc="-1" strike="noStrike">
-              <a:latin typeface="Arial"/>
-            </a:endParaRPr>
-          </a:p>
-          <a:p>
-            <a:pPr lvl="5" marL="2592000" indent="-216000">
+          </a:p>
+          <a:p>
+            <a:pPr marL="2592000" lvl="5" indent="-216000">
               <a:spcBef>
                 <a:spcPts val="283"/>
               </a:spcBef>
@@ -4948,17 +5593,14 @@
               <a:buChar char=""/>
             </a:pPr>
             <a:r>
-              <a:rPr b="0" lang="en-GB" sz="2000" spc="-1" strike="noStrike">
+              <a:rPr lang="en-GB" sz="2000" b="0" strike="noStrike" spc="-1">
                 <a:latin typeface="Arial"/>
               </a:rPr>
               <a:t>Sixth Outline Level</a:t>
             </a:r>
-            <a:endParaRPr b="0" lang="en-GB" sz="2000" spc="-1" strike="noStrike">
-              <a:latin typeface="Arial"/>
-            </a:endParaRPr>
-          </a:p>
-          <a:p>
-            <a:pPr lvl="6" marL="3024000" indent="-216000">
+          </a:p>
+          <a:p>
+            <a:pPr marL="3024000" lvl="6" indent="-216000">
               <a:spcBef>
                 <a:spcPts val="283"/>
               </a:spcBef>
@@ -4970,39 +5612,316 @@
               <a:buChar char=""/>
             </a:pPr>
             <a:r>
-              <a:rPr b="0" lang="en-GB" sz="2000" spc="-1" strike="noStrike">
+              <a:rPr lang="en-GB" sz="2000" b="0" strike="noStrike" spc="-1">
                 <a:latin typeface="Arial"/>
               </a:rPr>
               <a:t>Seventh Outline Level</a:t>
             </a:r>
-            <a:endParaRPr b="0" lang="en-GB" sz="2000" spc="-1" strike="noStrike">
-              <a:latin typeface="Arial"/>
-            </a:endParaRPr>
           </a:p>
         </p:txBody>
       </p:sp>
     </p:spTree>
   </p:cSld>
-  <p:clrMap bg1="lt1" bg2="lt2" tx1="dk1" tx2="dk2" accent1="accent1" accent2="accent2" accent3="accent3" accent4="accent4" accent5="accent5" accent6="accent6" hlink="hlink" folHlink="folHlink"/>
+  <p:clrMap bg1="lt1" tx1="dk1" bg2="lt2" tx2="dk2" accent1="accent1" accent2="accent2" accent3="accent3" accent4="accent4" accent5="accent5" accent6="accent6" hlink="hlink" folHlink="folHlink"/>
   <p:sldLayoutIdLst>
-    <p:sldLayoutId id="2147483662" r:id="rId3"/>
-    <p:sldLayoutId id="2147483663" r:id="rId4"/>
-    <p:sldLayoutId id="2147483664" r:id="rId5"/>
-    <p:sldLayoutId id="2147483665" r:id="rId6"/>
-    <p:sldLayoutId id="2147483666" r:id="rId7"/>
-    <p:sldLayoutId id="2147483667" r:id="rId8"/>
-    <p:sldLayoutId id="2147483668" r:id="rId9"/>
-    <p:sldLayoutId id="2147483669" r:id="rId10"/>
-    <p:sldLayoutId id="2147483670" r:id="rId11"/>
-    <p:sldLayoutId id="2147483671" r:id="rId12"/>
-    <p:sldLayoutId id="2147483672" r:id="rId13"/>
-    <p:sldLayoutId id="2147483673" r:id="rId14"/>
+    <p:sldLayoutId id="2147483662" r:id="rId1"/>
+    <p:sldLayoutId id="2147483663" r:id="rId2"/>
+    <p:sldLayoutId id="2147483664" r:id="rId3"/>
+    <p:sldLayoutId id="2147483665" r:id="rId4"/>
+    <p:sldLayoutId id="2147483666" r:id="rId5"/>
+    <p:sldLayoutId id="2147483667" r:id="rId6"/>
+    <p:sldLayoutId id="2147483668" r:id="rId7"/>
+    <p:sldLayoutId id="2147483669" r:id="rId8"/>
+    <p:sldLayoutId id="2147483670" r:id="rId9"/>
+    <p:sldLayoutId id="2147483671" r:id="rId10"/>
+    <p:sldLayoutId id="2147483672" r:id="rId11"/>
+    <p:sldLayoutId id="2147483673" r:id="rId12"/>
   </p:sldLayoutIdLst>
+  <p:txStyles>
+    <p:titleStyle>
+      <a:lvl1pPr algn="l" defTabSz="914400" rtl="0" eaLnBrk="1" latinLnBrk="0" hangingPunct="1">
+        <a:lnSpc>
+          <a:spcPct val="90000"/>
+        </a:lnSpc>
+        <a:spcBef>
+          <a:spcPct val="0"/>
+        </a:spcBef>
+        <a:buNone/>
+        <a:defRPr sz="4400" kern="1200">
+          <a:solidFill>
+            <a:schemeClr val="tx1"/>
+          </a:solidFill>
+          <a:latin typeface="+mj-lt"/>
+          <a:ea typeface="+mj-ea"/>
+          <a:cs typeface="+mj-cs"/>
+        </a:defRPr>
+      </a:lvl1pPr>
+    </p:titleStyle>
+    <p:bodyStyle>
+      <a:lvl1pPr marL="228600" indent="-228600" algn="l" defTabSz="914400" rtl="0" eaLnBrk="1" latinLnBrk="0" hangingPunct="1">
+        <a:lnSpc>
+          <a:spcPct val="90000"/>
+        </a:lnSpc>
+        <a:spcBef>
+          <a:spcPts val="1000"/>
+        </a:spcBef>
+        <a:buFont typeface="Arial" panose="020B0604020202020204" pitchFamily="34" charset="0"/>
+        <a:buChar char="•"/>
+        <a:defRPr sz="2800" kern="1200">
+          <a:solidFill>
+            <a:schemeClr val="tx1"/>
+          </a:solidFill>
+          <a:latin typeface="+mn-lt"/>
+          <a:ea typeface="+mn-ea"/>
+          <a:cs typeface="+mn-cs"/>
+        </a:defRPr>
+      </a:lvl1pPr>
+      <a:lvl2pPr marL="685800" indent="-228600" algn="l" defTabSz="914400" rtl="0" eaLnBrk="1" latinLnBrk="0" hangingPunct="1">
+        <a:lnSpc>
+          <a:spcPct val="90000"/>
+        </a:lnSpc>
+        <a:spcBef>
+          <a:spcPts val="500"/>
+        </a:spcBef>
+        <a:buFont typeface="Arial" panose="020B0604020202020204" pitchFamily="34" charset="0"/>
+        <a:buChar char="•"/>
+        <a:defRPr sz="2400" kern="1200">
+          <a:solidFill>
+            <a:schemeClr val="tx1"/>
+          </a:solidFill>
+          <a:latin typeface="+mn-lt"/>
+          <a:ea typeface="+mn-ea"/>
+          <a:cs typeface="+mn-cs"/>
+        </a:defRPr>
+      </a:lvl2pPr>
+      <a:lvl3pPr marL="1143000" indent="-228600" algn="l" defTabSz="914400" rtl="0" eaLnBrk="1" latinLnBrk="0" hangingPunct="1">
+        <a:lnSpc>
+          <a:spcPct val="90000"/>
+        </a:lnSpc>
+        <a:spcBef>
+          <a:spcPts val="500"/>
+        </a:spcBef>
+        <a:buFont typeface="Arial" panose="020B0604020202020204" pitchFamily="34" charset="0"/>
+        <a:buChar char="•"/>
+        <a:defRPr sz="2000" kern="1200">
+          <a:solidFill>
+            <a:schemeClr val="tx1"/>
+          </a:solidFill>
+          <a:latin typeface="+mn-lt"/>
+          <a:ea typeface="+mn-ea"/>
+          <a:cs typeface="+mn-cs"/>
+        </a:defRPr>
+      </a:lvl3pPr>
+      <a:lvl4pPr marL="1600200" indent="-228600" algn="l" defTabSz="914400" rtl="0" eaLnBrk="1" latinLnBrk="0" hangingPunct="1">
+        <a:lnSpc>
+          <a:spcPct val="90000"/>
+        </a:lnSpc>
+        <a:spcBef>
+          <a:spcPts val="500"/>
+        </a:spcBef>
+        <a:buFont typeface="Arial" panose="020B0604020202020204" pitchFamily="34" charset="0"/>
+        <a:buChar char="•"/>
+        <a:defRPr sz="1800" kern="1200">
+          <a:solidFill>
+            <a:schemeClr val="tx1"/>
+          </a:solidFill>
+          <a:latin typeface="+mn-lt"/>
+          <a:ea typeface="+mn-ea"/>
+          <a:cs typeface="+mn-cs"/>
+        </a:defRPr>
+      </a:lvl4pPr>
+      <a:lvl5pPr marL="2057400" indent="-228600" algn="l" defTabSz="914400" rtl="0" eaLnBrk="1" latinLnBrk="0" hangingPunct="1">
+        <a:lnSpc>
+          <a:spcPct val="90000"/>
+        </a:lnSpc>
+        <a:spcBef>
+          <a:spcPts val="500"/>
+        </a:spcBef>
+        <a:buFont typeface="Arial" panose="020B0604020202020204" pitchFamily="34" charset="0"/>
+        <a:buChar char="•"/>
+        <a:defRPr sz="1800" kern="1200">
+          <a:solidFill>
+            <a:schemeClr val="tx1"/>
+          </a:solidFill>
+          <a:latin typeface="+mn-lt"/>
+          <a:ea typeface="+mn-ea"/>
+          <a:cs typeface="+mn-cs"/>
+        </a:defRPr>
+      </a:lvl5pPr>
+      <a:lvl6pPr marL="2514600" indent="-228600" algn="l" defTabSz="914400" rtl="0" eaLnBrk="1" latinLnBrk="0" hangingPunct="1">
+        <a:lnSpc>
+          <a:spcPct val="90000"/>
+        </a:lnSpc>
+        <a:spcBef>
+          <a:spcPts val="500"/>
+        </a:spcBef>
+        <a:buFont typeface="Arial" panose="020B0604020202020204" pitchFamily="34" charset="0"/>
+        <a:buChar char="•"/>
+        <a:defRPr sz="1800" kern="1200">
+          <a:solidFill>
+            <a:schemeClr val="tx1"/>
+          </a:solidFill>
+          <a:latin typeface="+mn-lt"/>
+          <a:ea typeface="+mn-ea"/>
+          <a:cs typeface="+mn-cs"/>
+        </a:defRPr>
+      </a:lvl6pPr>
+      <a:lvl7pPr marL="2971800" indent="-228600" algn="l" defTabSz="914400" rtl="0" eaLnBrk="1" latinLnBrk="0" hangingPunct="1">
+        <a:lnSpc>
+          <a:spcPct val="90000"/>
+        </a:lnSpc>
+        <a:spcBef>
+          <a:spcPts val="500"/>
+        </a:spcBef>
+        <a:buFont typeface="Arial" panose="020B0604020202020204" pitchFamily="34" charset="0"/>
+        <a:buChar char="•"/>
+        <a:defRPr sz="1800" kern="1200">
+          <a:solidFill>
+            <a:schemeClr val="tx1"/>
+          </a:solidFill>
+          <a:latin typeface="+mn-lt"/>
+          <a:ea typeface="+mn-ea"/>
+          <a:cs typeface="+mn-cs"/>
+        </a:defRPr>
+      </a:lvl7pPr>
+      <a:lvl8pPr marL="3429000" indent="-228600" algn="l" defTabSz="914400" rtl="0" eaLnBrk="1" latinLnBrk="0" hangingPunct="1">
+        <a:lnSpc>
+          <a:spcPct val="90000"/>
+        </a:lnSpc>
+        <a:spcBef>
+          <a:spcPts val="500"/>
+        </a:spcBef>
+        <a:buFont typeface="Arial" panose="020B0604020202020204" pitchFamily="34" charset="0"/>
+        <a:buChar char="•"/>
+        <a:defRPr sz="1800" kern="1200">
+          <a:solidFill>
+            <a:schemeClr val="tx1"/>
+          </a:solidFill>
+          <a:latin typeface="+mn-lt"/>
+          <a:ea typeface="+mn-ea"/>
+          <a:cs typeface="+mn-cs"/>
+        </a:defRPr>
+      </a:lvl8pPr>
+      <a:lvl9pPr marL="3886200" indent="-228600" algn="l" defTabSz="914400" rtl="0" eaLnBrk="1" latinLnBrk="0" hangingPunct="1">
+        <a:lnSpc>
+          <a:spcPct val="90000"/>
+        </a:lnSpc>
+        <a:spcBef>
+          <a:spcPts val="500"/>
+        </a:spcBef>
+        <a:buFont typeface="Arial" panose="020B0604020202020204" pitchFamily="34" charset="0"/>
+        <a:buChar char="•"/>
+        <a:defRPr sz="1800" kern="1200">
+          <a:solidFill>
+            <a:schemeClr val="tx1"/>
+          </a:solidFill>
+          <a:latin typeface="+mn-lt"/>
+          <a:ea typeface="+mn-ea"/>
+          <a:cs typeface="+mn-cs"/>
+        </a:defRPr>
+      </a:lvl9pPr>
+    </p:bodyStyle>
+    <p:otherStyle>
+      <a:defPPr>
+        <a:defRPr lang="en-US"/>
+      </a:defPPr>
+      <a:lvl1pPr marL="0" algn="l" defTabSz="914400" rtl="0" eaLnBrk="1" latinLnBrk="0" hangingPunct="1">
+        <a:defRPr sz="1800" kern="1200">
+          <a:solidFill>
+            <a:schemeClr val="tx1"/>
+          </a:solidFill>
+          <a:latin typeface="+mn-lt"/>
+          <a:ea typeface="+mn-ea"/>
+          <a:cs typeface="+mn-cs"/>
+        </a:defRPr>
+      </a:lvl1pPr>
+      <a:lvl2pPr marL="457200" algn="l" defTabSz="914400" rtl="0" eaLnBrk="1" latinLnBrk="0" hangingPunct="1">
+        <a:defRPr sz="1800" kern="1200">
+          <a:solidFill>
+            <a:schemeClr val="tx1"/>
+          </a:solidFill>
+          <a:latin typeface="+mn-lt"/>
+          <a:ea typeface="+mn-ea"/>
+          <a:cs typeface="+mn-cs"/>
+        </a:defRPr>
+      </a:lvl2pPr>
+      <a:lvl3pPr marL="914400" algn="l" defTabSz="914400" rtl="0" eaLnBrk="1" latinLnBrk="0" hangingPunct="1">
+        <a:defRPr sz="1800" kern="1200">
+          <a:solidFill>
+            <a:schemeClr val="tx1"/>
+          </a:solidFill>
+          <a:latin typeface="+mn-lt"/>
+          <a:ea typeface="+mn-ea"/>
+          <a:cs typeface="+mn-cs"/>
+        </a:defRPr>
+      </a:lvl3pPr>
+      <a:lvl4pPr marL="1371600" algn="l" defTabSz="914400" rtl="0" eaLnBrk="1" latinLnBrk="0" hangingPunct="1">
+        <a:defRPr sz="1800" kern="1200">
+          <a:solidFill>
+            <a:schemeClr val="tx1"/>
+          </a:solidFill>
+          <a:latin typeface="+mn-lt"/>
+          <a:ea typeface="+mn-ea"/>
+          <a:cs typeface="+mn-cs"/>
+        </a:defRPr>
+      </a:lvl4pPr>
+      <a:lvl5pPr marL="1828800" algn="l" defTabSz="914400" rtl="0" eaLnBrk="1" latinLnBrk="0" hangingPunct="1">
+        <a:defRPr sz="1800" kern="1200">
+          <a:solidFill>
+            <a:schemeClr val="tx1"/>
+          </a:solidFill>
+          <a:latin typeface="+mn-lt"/>
+          <a:ea typeface="+mn-ea"/>
+          <a:cs typeface="+mn-cs"/>
+        </a:defRPr>
+      </a:lvl5pPr>
+      <a:lvl6pPr marL="2286000" algn="l" defTabSz="914400" rtl="0" eaLnBrk="1" latinLnBrk="0" hangingPunct="1">
+        <a:defRPr sz="1800" kern="1200">
+          <a:solidFill>
+            <a:schemeClr val="tx1"/>
+          </a:solidFill>
+          <a:latin typeface="+mn-lt"/>
+          <a:ea typeface="+mn-ea"/>
+          <a:cs typeface="+mn-cs"/>
+        </a:defRPr>
+      </a:lvl6pPr>
+      <a:lvl7pPr marL="2743200" algn="l" defTabSz="914400" rtl="0" eaLnBrk="1" latinLnBrk="0" hangingPunct="1">
+        <a:defRPr sz="1800" kern="1200">
+          <a:solidFill>
+            <a:schemeClr val="tx1"/>
+          </a:solidFill>
+          <a:latin typeface="+mn-lt"/>
+          <a:ea typeface="+mn-ea"/>
+          <a:cs typeface="+mn-cs"/>
+        </a:defRPr>
+      </a:lvl7pPr>
+      <a:lvl8pPr marL="3200400" algn="l" defTabSz="914400" rtl="0" eaLnBrk="1" latinLnBrk="0" hangingPunct="1">
+        <a:defRPr sz="1800" kern="1200">
+          <a:solidFill>
+            <a:schemeClr val="tx1"/>
+          </a:solidFill>
+          <a:latin typeface="+mn-lt"/>
+          <a:ea typeface="+mn-ea"/>
+          <a:cs typeface="+mn-cs"/>
+        </a:defRPr>
+      </a:lvl8pPr>
+      <a:lvl9pPr marL="3657600" algn="l" defTabSz="914400" rtl="0" eaLnBrk="1" latinLnBrk="0" hangingPunct="1">
+        <a:defRPr sz="1800" kern="1200">
+          <a:solidFill>
+            <a:schemeClr val="tx1"/>
+          </a:solidFill>
+          <a:latin typeface="+mn-lt"/>
+          <a:ea typeface="+mn-ea"/>
+          <a:cs typeface="+mn-cs"/>
+        </a:defRPr>
+      </a:lvl9pPr>
+    </p:otherStyle>
+  </p:txStyles>
 </p:sldMaster>
 </file>
 
 <file path=ppt/slides/slide1.xml><?xml version="1.0" encoding="utf-8"?>
-<p:sld xmlns:a="http://schemas.openxmlformats.org/drawingml/2006/main" xmlns:p="http://schemas.openxmlformats.org/presentationml/2006/main" xmlns:r="http://schemas.openxmlformats.org/officeDocument/2006/relationships" xmlns:p14="http://schemas.microsoft.com/office/powerpoint/2010/main" xmlns:p15="http://schemas.microsoft.com/office/powerpoint/2012/main" xmlns:mc="http://schemas.openxmlformats.org/markup-compatibility/2006">
+<p:sld xmlns:a="http://schemas.openxmlformats.org/drawingml/2006/main" xmlns:r="http://schemas.openxmlformats.org/officeDocument/2006/relationships" xmlns:p="http://schemas.openxmlformats.org/presentationml/2006/main">
   <p:cSld>
     <p:spTree>
       <p:nvGrpSpPr>
@@ -5038,15 +5957,22 @@
           </a:ln>
         </p:spPr>
         <p:style>
-          <a:lnRef idx="0"/>
-          <a:fillRef idx="0"/>
-          <a:effectRef idx="0"/>
+          <a:lnRef idx="0">
+            <a:scrgbClr r="0" g="0" b="0"/>
+          </a:lnRef>
+          <a:fillRef idx="0">
+            <a:scrgbClr r="0" g="0" b="0"/>
+          </a:fillRef>
+          <a:effectRef idx="0">
+            <a:scrgbClr r="0" g="0" b="0"/>
+          </a:effectRef>
           <a:fontRef idx="minor"/>
         </p:style>
         <p:txBody>
-          <a:bodyPr lIns="57600" rIns="90000" tIns="90000" bIns="90000" anchor="b">
+          <a:bodyPr lIns="57600" tIns="90000" rIns="90000" bIns="90000" anchor="b">
             <a:noAutofit/>
           </a:bodyPr>
+          <a:lstStyle/>
           <a:p>
             <a:pPr>
               <a:lnSpc>
@@ -5055,16 +5981,16 @@
               <a:buNone/>
             </a:pPr>
             <a:r>
-              <a:rPr b="0" lang="en-GB" sz="3600" spc="-1" strike="noStrike">
+              <a:rPr lang="en-GB" sz="3600" b="0" strike="noStrike" spc="-1">
                 <a:solidFill>
-                  <a:srgbClr val="ffffff"/>
+                  <a:srgbClr val="FFFFFF"/>
                 </a:solidFill>
                 <a:latin typeface="Verdana"/>
                 <a:ea typeface="DejaVu Sans"/>
               </a:rPr>
               <a:t>AiOps – A vision of automation and control</a:t>
             </a:r>
-            <a:endParaRPr b="0" lang="en-GB" sz="3600" spc="-1" strike="noStrike">
+            <a:endParaRPr lang="en-GB" sz="3600" b="0" strike="noStrike" spc="-1">
               <a:latin typeface="Arial"/>
             </a:endParaRPr>
           </a:p>
@@ -5090,15 +6016,22 @@
           </a:ln>
         </p:spPr>
         <p:style>
-          <a:lnRef idx="0"/>
-          <a:fillRef idx="0"/>
-          <a:effectRef idx="0"/>
+          <a:lnRef idx="0">
+            <a:scrgbClr r="0" g="0" b="0"/>
+          </a:lnRef>
+          <a:fillRef idx="0">
+            <a:scrgbClr r="0" g="0" b="0"/>
+          </a:fillRef>
+          <a:effectRef idx="0">
+            <a:scrgbClr r="0" g="0" b="0"/>
+          </a:effectRef>
           <a:fontRef idx="minor"/>
         </p:style>
         <p:txBody>
-          <a:bodyPr lIns="72000" rIns="90000" tIns="90000" bIns="45000" anchor="t">
+          <a:bodyPr lIns="72000" tIns="90000" rIns="90000" bIns="45000" anchor="t">
             <a:noAutofit/>
           </a:bodyPr>
+          <a:lstStyle/>
           <a:p>
             <a:pPr>
               <a:lnSpc>
@@ -5109,20 +6042,20 @@
               </a:spcBef>
               <a:buNone/>
               <a:tabLst>
-                <a:tab algn="l" pos="0"/>
+                <a:tab pos="0" algn="l"/>
               </a:tabLst>
             </a:pPr>
             <a:r>
-              <a:rPr b="0" lang="en-GB" sz="2400" spc="-1" strike="noStrike">
+              <a:rPr lang="en-GB" sz="2400" b="0" strike="noStrike" spc="-1">
                 <a:solidFill>
-                  <a:srgbClr val="ffffff"/>
+                  <a:srgbClr val="FFFFFF"/>
                 </a:solidFill>
                 <a:latin typeface="Verdana"/>
                 <a:ea typeface="DejaVu Sans"/>
               </a:rPr>
               <a:t>CD-team</a:t>
             </a:r>
-            <a:endParaRPr b="0" lang="en-GB" sz="2400" spc="-1" strike="noStrike">
+            <a:endParaRPr lang="en-GB" sz="2400" b="0" strike="noStrike" spc="-1">
               <a:latin typeface="Arial"/>
             </a:endParaRPr>
           </a:p>
@@ -5148,15 +6081,22 @@
           </a:ln>
         </p:spPr>
         <p:style>
-          <a:lnRef idx="0"/>
-          <a:fillRef idx="0"/>
-          <a:effectRef idx="0"/>
+          <a:lnRef idx="0">
+            <a:scrgbClr r="0" g="0" b="0"/>
+          </a:lnRef>
+          <a:fillRef idx="0">
+            <a:scrgbClr r="0" g="0" b="0"/>
+          </a:fillRef>
+          <a:effectRef idx="0">
+            <a:scrgbClr r="0" g="0" b="0"/>
+          </a:effectRef>
           <a:fontRef idx="minor"/>
         </p:style>
         <p:txBody>
-          <a:bodyPr lIns="86400" rIns="90000" tIns="45000" bIns="45000" anchor="b">
+          <a:bodyPr lIns="86400" tIns="45000" rIns="90000" bIns="45000" anchor="b">
             <a:noAutofit/>
           </a:bodyPr>
+          <a:lstStyle/>
           <a:p>
             <a:pPr>
               <a:lnSpc>
@@ -5167,20 +6107,20 @@
               </a:spcBef>
               <a:buNone/>
               <a:tabLst>
-                <a:tab algn="l" pos="0"/>
+                <a:tab pos="0" algn="l"/>
               </a:tabLst>
             </a:pPr>
             <a:r>
-              <a:rPr b="0" lang="en-GB" sz="1600" spc="-1" strike="noStrike">
+              <a:rPr lang="en-GB" sz="1600" b="0" strike="noStrike" spc="-1">
                 <a:solidFill>
-                  <a:srgbClr val="ffffff"/>
+                  <a:srgbClr val="FFFFFF"/>
                 </a:solidFill>
                 <a:latin typeface="Verdana"/>
                 <a:ea typeface="DejaVu Sans"/>
               </a:rPr>
               <a:t>Dr. Christopher A. Tucker</a:t>
             </a:r>
-            <a:endParaRPr b="0" lang="en-GB" sz="1600" spc="-1" strike="noStrike">
+            <a:endParaRPr lang="en-GB" sz="1600" b="0" strike="noStrike" spc="-1">
               <a:latin typeface="Arial"/>
             </a:endParaRPr>
           </a:p>
@@ -5206,15 +6146,22 @@
           </a:ln>
         </p:spPr>
         <p:style>
-          <a:lnRef idx="0"/>
-          <a:fillRef idx="0"/>
-          <a:effectRef idx="0"/>
+          <a:lnRef idx="0">
+            <a:scrgbClr r="0" g="0" b="0"/>
+          </a:lnRef>
+          <a:fillRef idx="0">
+            <a:scrgbClr r="0" g="0" b="0"/>
+          </a:fillRef>
+          <a:effectRef idx="0">
+            <a:scrgbClr r="0" g="0" b="0"/>
+          </a:effectRef>
           <a:fontRef idx="minor"/>
         </p:style>
         <p:txBody>
-          <a:bodyPr lIns="90000" rIns="0" tIns="45000" bIns="45000" anchor="b">
+          <a:bodyPr lIns="90000" tIns="45000" rIns="0" bIns="45000" anchor="b">
             <a:noAutofit/>
           </a:bodyPr>
+          <a:lstStyle/>
           <a:p>
             <a:pPr algn="r">
               <a:lnSpc>
@@ -5223,16 +6170,16 @@
               <a:buNone/>
             </a:pPr>
             <a:fld id="{D367C9EA-0784-4BE0-B840-8321066A698D}" type="slidenum">
-              <a:rPr b="0" lang="en-GB" sz="1050" spc="-1" strike="noStrike">
+              <a:rPr lang="en-GB" sz="1050" b="0" strike="noStrike" spc="-1">
                 <a:solidFill>
-                  <a:srgbClr val="5b9edb"/>
+                  <a:srgbClr val="5B9EDB"/>
                 </a:solidFill>
                 <a:latin typeface="Verdana"/>
                 <a:ea typeface="DejaVu Sans"/>
               </a:rPr>
-              <a:t>&lt;number&gt;</a:t>
+              <a:t>1</a:t>
             </a:fld>
-            <a:endParaRPr b="0" lang="en-GB" sz="1050" spc="-1" strike="noStrike">
+            <a:endParaRPr lang="en-GB" sz="1050" b="0" strike="noStrike" spc="-1">
               <a:latin typeface="Arial"/>
             </a:endParaRPr>
           </a:p>
@@ -5240,13 +6187,13 @@
       </p:sp>
       <p:pic>
         <p:nvPicPr>
-          <p:cNvPr id="92" name="Tijdelijke aanduiding voor afbeelding 9" descr=""/>
+          <p:cNvPr id="92" name="Tijdelijke aanduiding voor afbeelding 9"/>
           <p:cNvPicPr/>
           <p:nvPr/>
         </p:nvPicPr>
         <p:blipFill>
-          <a:blip r:embed="rId1"/>
-          <a:srcRect l="0" t="24601" r="0" b="24601"/>
+          <a:blip r:embed="rId3"/>
+          <a:srcRect t="24601" b="24601"/>
           <a:stretch/>
         </p:blipFill>
         <p:spPr>
@@ -5264,19 +6211,14 @@
       </p:pic>
     </p:spTree>
   </p:cSld>
-  <mc:AlternateContent>
-    <mc:Choice Requires="p14">
-      <p:transition spd="slow" p14:dur="2000"/>
-    </mc:Choice>
-    <mc:Fallback>
-      <p:transition spd="slow"/>
-    </mc:Fallback>
-  </mc:AlternateContent>
+  <p:clrMapOvr>
+    <a:masterClrMapping/>
+  </p:clrMapOvr>
 </p:sld>
 </file>
 
 <file path=ppt/slides/slide2.xml><?xml version="1.0" encoding="utf-8"?>
-<p:sld xmlns:a="http://schemas.openxmlformats.org/drawingml/2006/main" xmlns:p="http://schemas.openxmlformats.org/presentationml/2006/main" xmlns:r="http://schemas.openxmlformats.org/officeDocument/2006/relationships" xmlns:p14="http://schemas.microsoft.com/office/powerpoint/2010/main" xmlns:p15="http://schemas.microsoft.com/office/powerpoint/2012/main" xmlns:mc="http://schemas.openxmlformats.org/markup-compatibility/2006">
+<p:sld xmlns:a="http://schemas.openxmlformats.org/drawingml/2006/main" xmlns:r="http://schemas.openxmlformats.org/officeDocument/2006/relationships" xmlns:p="http://schemas.openxmlformats.org/presentationml/2006/main">
   <p:cSld>
     <p:spTree>
       <p:nvGrpSpPr>
@@ -5312,15 +6254,22 @@
           </a:ln>
         </p:spPr>
         <p:style>
-          <a:lnRef idx="0"/>
-          <a:fillRef idx="0"/>
-          <a:effectRef idx="0"/>
+          <a:lnRef idx="0">
+            <a:scrgbClr r="0" g="0" b="0"/>
+          </a:lnRef>
+          <a:fillRef idx="0">
+            <a:scrgbClr r="0" g="0" b="0"/>
+          </a:fillRef>
+          <a:effectRef idx="0">
+            <a:scrgbClr r="0" g="0" b="0"/>
+          </a:effectRef>
           <a:fontRef idx="minor"/>
         </p:style>
         <p:txBody>
-          <a:bodyPr lIns="90000" rIns="90000" tIns="45000" bIns="45000" anchor="t">
+          <a:bodyPr lIns="90000" tIns="45000" rIns="90000" bIns="45000" anchor="t">
             <a:normAutofit/>
           </a:bodyPr>
+          <a:lstStyle/>
           <a:p>
             <a:pPr marL="316800" indent="-316440">
               <a:lnSpc>
@@ -5330,14 +6279,14 @@
                 <a:spcPts val="1199"/>
               </a:spcBef>
               <a:buClr>
-                <a:srgbClr val="00689a"/>
+                <a:srgbClr val="00689A"/>
               </a:buClr>
               <a:buSzPct val="80000"/>
               <a:buFont typeface="Verdana"/>
               <a:buChar char="›"/>
             </a:pPr>
             <a:r>
-              <a:rPr b="0" lang="en-GB" sz="2400" spc="-1" strike="noStrike">
+              <a:rPr lang="en-GB" sz="2400" b="0" strike="noStrike" spc="-1">
                 <a:solidFill>
                   <a:srgbClr val="000000"/>
                 </a:solidFill>
@@ -5346,7 +6295,7 @@
               </a:rPr>
               <a:t>What is AiOps?</a:t>
             </a:r>
-            <a:endParaRPr b="0" lang="en-GB" sz="2400" spc="-1" strike="noStrike">
+            <a:endParaRPr lang="en-GB" sz="2400" b="0" strike="noStrike" spc="-1">
               <a:latin typeface="Arial"/>
             </a:endParaRPr>
           </a:p>
@@ -5359,14 +6308,14 @@
                 <a:spcPts val="1199"/>
               </a:spcBef>
               <a:buClr>
-                <a:srgbClr val="00689a"/>
+                <a:srgbClr val="00689A"/>
               </a:buClr>
               <a:buSzPct val="80000"/>
               <a:buFont typeface="Verdana"/>
               <a:buChar char="›"/>
             </a:pPr>
             <a:r>
-              <a:rPr b="0" lang="en-GB" sz="2400" spc="-1" strike="noStrike">
+              <a:rPr lang="en-GB" sz="2400" b="0" strike="noStrike" spc="-1">
                 <a:solidFill>
                   <a:srgbClr val="000000"/>
                 </a:solidFill>
@@ -5375,7 +6324,7 @@
               </a:rPr>
               <a:t>Previous works: The belastingdienst misadventure</a:t>
             </a:r>
-            <a:endParaRPr b="0" lang="en-GB" sz="2400" spc="-1" strike="noStrike">
+            <a:endParaRPr lang="en-GB" sz="2400" b="0" strike="noStrike" spc="-1">
               <a:latin typeface="Arial"/>
             </a:endParaRPr>
           </a:p>
@@ -5388,14 +6337,14 @@
                 <a:spcPts val="1199"/>
               </a:spcBef>
               <a:buClr>
-                <a:srgbClr val="00689a"/>
+                <a:srgbClr val="00689A"/>
               </a:buClr>
               <a:buSzPct val="80000"/>
               <a:buFont typeface="Verdana"/>
               <a:buChar char="›"/>
             </a:pPr>
             <a:r>
-              <a:rPr b="0" lang="en-GB" sz="2400" spc="-1" strike="noStrike">
+              <a:rPr lang="en-GB" sz="2400" b="0" strike="noStrike" spc="-1">
                 <a:solidFill>
                   <a:srgbClr val="000000"/>
                 </a:solidFill>
@@ -5404,7 +6353,7 @@
               </a:rPr>
               <a:t>A new vision: Epic CD-3324</a:t>
             </a:r>
-            <a:endParaRPr b="0" lang="en-GB" sz="2400" spc="-1" strike="noStrike">
+            <a:endParaRPr lang="en-GB" sz="2400" b="0" strike="noStrike" spc="-1">
               <a:latin typeface="Arial"/>
             </a:endParaRPr>
           </a:p>
@@ -5417,14 +6366,14 @@
                 <a:spcPts val="1199"/>
               </a:spcBef>
               <a:buClr>
-                <a:srgbClr val="00689a"/>
+                <a:srgbClr val="00689A"/>
               </a:buClr>
               <a:buSzPct val="80000"/>
               <a:buFont typeface="Verdana"/>
               <a:buChar char="›"/>
             </a:pPr>
             <a:r>
-              <a:rPr b="0" lang="en-GB" sz="2400" spc="-1" strike="noStrike">
+              <a:rPr lang="en-GB" sz="2400" b="0" strike="noStrike" spc="-1">
                 <a:solidFill>
                   <a:srgbClr val="000000"/>
                 </a:solidFill>
@@ -5433,7 +6382,7 @@
               </a:rPr>
               <a:t>Pitfall! A crisis of reproducibility</a:t>
             </a:r>
-            <a:endParaRPr b="0" lang="en-GB" sz="2400" spc="-1" strike="noStrike">
+            <a:endParaRPr lang="en-GB" sz="2400" b="0" strike="noStrike" spc="-1">
               <a:latin typeface="Arial"/>
             </a:endParaRPr>
           </a:p>
@@ -5446,14 +6395,14 @@
                 <a:spcPts val="1199"/>
               </a:spcBef>
               <a:buClr>
-                <a:srgbClr val="00689a"/>
+                <a:srgbClr val="00689A"/>
               </a:buClr>
               <a:buSzPct val="80000"/>
               <a:buFont typeface="Verdana"/>
               <a:buChar char="›"/>
             </a:pPr>
             <a:r>
-              <a:rPr b="0" lang="en-GB" sz="2400" spc="-1" strike="noStrike">
+              <a:rPr lang="en-GB" sz="2400" b="0" strike="noStrike" spc="-1">
                 <a:solidFill>
                   <a:srgbClr val="000000"/>
                 </a:solidFill>
@@ -5462,7 +6411,7 @@
               </a:rPr>
               <a:t>A design proposal</a:t>
             </a:r>
-            <a:endParaRPr b="0" lang="en-GB" sz="2400" spc="-1" strike="noStrike">
+            <a:endParaRPr lang="en-GB" sz="2400" b="0" strike="noStrike" spc="-1">
               <a:latin typeface="Arial"/>
             </a:endParaRPr>
           </a:p>
@@ -5475,14 +6424,14 @@
                 <a:spcPts val="1199"/>
               </a:spcBef>
               <a:buClr>
-                <a:srgbClr val="00689a"/>
+                <a:srgbClr val="00689A"/>
               </a:buClr>
               <a:buSzPct val="80000"/>
               <a:buFont typeface="Verdana"/>
               <a:buChar char="›"/>
             </a:pPr>
             <a:r>
-              <a:rPr b="0" lang="en-GB" sz="2400" spc="-1" strike="noStrike">
+              <a:rPr lang="en-GB" sz="2400" b="0" strike="noStrike" spc="-1">
                 <a:solidFill>
                   <a:srgbClr val="000000"/>
                 </a:solidFill>
@@ -5491,7 +6440,7 @@
               </a:rPr>
               <a:t>Discussion</a:t>
             </a:r>
-            <a:endParaRPr b="0" lang="en-GB" sz="2400" spc="-1" strike="noStrike">
+            <a:endParaRPr lang="en-GB" sz="2400" b="0" strike="noStrike" spc="-1">
               <a:latin typeface="Arial"/>
             </a:endParaRPr>
           </a:p>
@@ -5517,15 +6466,22 @@
           </a:ln>
         </p:spPr>
         <p:style>
-          <a:lnRef idx="0"/>
-          <a:fillRef idx="0"/>
-          <a:effectRef idx="0"/>
+          <a:lnRef idx="0">
+            <a:scrgbClr r="0" g="0" b="0"/>
+          </a:lnRef>
+          <a:fillRef idx="0">
+            <a:scrgbClr r="0" g="0" b="0"/>
+          </a:fillRef>
+          <a:effectRef idx="0">
+            <a:scrgbClr r="0" g="0" b="0"/>
+          </a:effectRef>
           <a:fontRef idx="minor"/>
         </p:style>
         <p:txBody>
-          <a:bodyPr lIns="90000" rIns="90000" tIns="45000" bIns="45000" anchor="b">
+          <a:bodyPr lIns="90000" tIns="45000" rIns="90000" bIns="45000" anchor="b">
             <a:noAutofit/>
           </a:bodyPr>
+          <a:lstStyle/>
           <a:p>
             <a:pPr>
               <a:lnSpc>
@@ -5534,16 +6490,16 @@
               <a:buNone/>
             </a:pPr>
             <a:r>
-              <a:rPr b="0" lang="en-GB" sz="2000" spc="-1" strike="noStrike">
+              <a:rPr lang="en-GB" sz="2000" b="0" strike="noStrike" spc="-1">
                 <a:solidFill>
-                  <a:srgbClr val="00689a"/>
+                  <a:srgbClr val="00689A"/>
                 </a:solidFill>
                 <a:latin typeface="Verdana"/>
                 <a:ea typeface="DejaVu Sans"/>
               </a:rPr>
               <a:t>Agenda</a:t>
             </a:r>
-            <a:endParaRPr b="0" lang="en-GB" sz="2000" spc="-1" strike="noStrike">
+            <a:endParaRPr lang="en-GB" sz="2000" b="0" strike="noStrike" spc="-1">
               <a:latin typeface="Arial"/>
             </a:endParaRPr>
           </a:p>
@@ -5569,15 +6525,22 @@
           </a:ln>
         </p:spPr>
         <p:style>
-          <a:lnRef idx="0"/>
-          <a:fillRef idx="0"/>
-          <a:effectRef idx="0"/>
+          <a:lnRef idx="0">
+            <a:scrgbClr r="0" g="0" b="0"/>
+          </a:lnRef>
+          <a:fillRef idx="0">
+            <a:scrgbClr r="0" g="0" b="0"/>
+          </a:fillRef>
+          <a:effectRef idx="0">
+            <a:scrgbClr r="0" g="0" b="0"/>
+          </a:effectRef>
           <a:fontRef idx="minor"/>
         </p:style>
         <p:txBody>
-          <a:bodyPr lIns="90000" rIns="0" tIns="45000" bIns="45000" anchor="b">
+          <a:bodyPr lIns="90000" tIns="45000" rIns="0" bIns="45000" anchor="b">
             <a:noAutofit/>
           </a:bodyPr>
+          <a:lstStyle/>
           <a:p>
             <a:pPr algn="r">
               <a:lnSpc>
@@ -5586,16 +6549,16 @@
               <a:buNone/>
             </a:pPr>
             <a:fld id="{7414ED88-999E-4AFB-8386-51DAAF592013}" type="slidenum">
-              <a:rPr b="0" lang="en-GB" sz="1050" spc="-1" strike="noStrike">
+              <a:rPr lang="en-GB" sz="1050" b="0" strike="noStrike" spc="-1">
                 <a:solidFill>
-                  <a:srgbClr val="a6a6a6"/>
+                  <a:srgbClr val="A6A6A6"/>
                 </a:solidFill>
                 <a:latin typeface="Verdana"/>
                 <a:ea typeface="DejaVu Sans"/>
               </a:rPr>
-              <a:t>&lt;number&gt;</a:t>
+              <a:t>2</a:t>
             </a:fld>
-            <a:endParaRPr b="0" lang="en-GB" sz="1050" spc="-1" strike="noStrike">
+            <a:endParaRPr lang="en-GB" sz="1050" b="0" strike="noStrike" spc="-1">
               <a:latin typeface="Arial"/>
             </a:endParaRPr>
           </a:p>
@@ -5603,19 +6566,14 @@
       </p:sp>
     </p:spTree>
   </p:cSld>
-  <mc:AlternateContent>
-    <mc:Choice Requires="p14">
-      <p:transition spd="slow" p14:dur="2000"/>
-    </mc:Choice>
-    <mc:Fallback>
-      <p:transition spd="slow"/>
-    </mc:Fallback>
-  </mc:AlternateContent>
+  <p:clrMapOvr>
+    <a:masterClrMapping/>
+  </p:clrMapOvr>
 </p:sld>
 </file>
 
 <file path=ppt/slides/slide3.xml><?xml version="1.0" encoding="utf-8"?>
-<p:sld xmlns:a="http://schemas.openxmlformats.org/drawingml/2006/main" xmlns:p="http://schemas.openxmlformats.org/presentationml/2006/main" xmlns:r="http://schemas.openxmlformats.org/officeDocument/2006/relationships" xmlns:p14="http://schemas.microsoft.com/office/powerpoint/2010/main" xmlns:p15="http://schemas.microsoft.com/office/powerpoint/2012/main" xmlns:mc="http://schemas.openxmlformats.org/markup-compatibility/2006">
+<p:sld xmlns:a="http://schemas.openxmlformats.org/drawingml/2006/main" xmlns:r="http://schemas.openxmlformats.org/officeDocument/2006/relationships" xmlns:p="http://schemas.openxmlformats.org/presentationml/2006/main">
   <p:cSld>
     <p:spTree>
       <p:nvGrpSpPr>
@@ -5651,11 +6609,24 @@
           </a:ln>
         </p:spPr>
         <p:style>
-          <a:lnRef idx="0"/>
-          <a:fillRef idx="0"/>
-          <a:effectRef idx="0"/>
+          <a:lnRef idx="0">
+            <a:scrgbClr r="0" g="0" b="0"/>
+          </a:lnRef>
+          <a:fillRef idx="0">
+            <a:scrgbClr r="0" g="0" b="0"/>
+          </a:fillRef>
+          <a:effectRef idx="0">
+            <a:scrgbClr r="0" g="0" b="0"/>
+          </a:effectRef>
           <a:fontRef idx="minor"/>
         </p:style>
+        <p:txBody>
+          <a:bodyPr/>
+          <a:lstStyle/>
+          <a:p>
+            <a:endParaRPr lang="en-GB"/>
+          </a:p>
+        </p:txBody>
       </p:sp>
       <p:sp>
         <p:nvSpPr>
@@ -5677,15 +6648,22 @@
           </a:ln>
         </p:spPr>
         <p:style>
-          <a:lnRef idx="0"/>
-          <a:fillRef idx="0"/>
-          <a:effectRef idx="0"/>
+          <a:lnRef idx="0">
+            <a:scrgbClr r="0" g="0" b="0"/>
+          </a:lnRef>
+          <a:fillRef idx="0">
+            <a:scrgbClr r="0" g="0" b="0"/>
+          </a:fillRef>
+          <a:effectRef idx="0">
+            <a:scrgbClr r="0" g="0" b="0"/>
+          </a:effectRef>
           <a:fontRef idx="minor"/>
         </p:style>
         <p:txBody>
-          <a:bodyPr lIns="90000" rIns="90000" tIns="45000" bIns="45000" anchor="b">
+          <a:bodyPr lIns="90000" tIns="45000" rIns="90000" bIns="45000" anchor="b">
             <a:noAutofit/>
           </a:bodyPr>
+          <a:lstStyle/>
           <a:p>
             <a:pPr>
               <a:lnSpc>
@@ -5694,16 +6672,16 @@
               <a:buNone/>
             </a:pPr>
             <a:r>
-              <a:rPr b="0" lang="en-GB" sz="2000" spc="-1" strike="noStrike">
+              <a:rPr lang="en-GB" sz="2000" b="0" strike="noStrike" spc="-1">
                 <a:solidFill>
-                  <a:srgbClr val="00689a"/>
+                  <a:srgbClr val="00689A"/>
                 </a:solidFill>
                 <a:latin typeface="Verdana"/>
                 <a:ea typeface="DejaVu Sans"/>
               </a:rPr>
               <a:t>Let me take a moment…</a:t>
             </a:r>
-            <a:endParaRPr b="0" lang="en-GB" sz="2000" spc="-1" strike="noStrike">
+            <a:endParaRPr lang="en-GB" sz="2000" b="0" strike="noStrike" spc="-1">
               <a:latin typeface="Arial"/>
             </a:endParaRPr>
           </a:p>
@@ -5729,15 +6707,22 @@
           </a:ln>
         </p:spPr>
         <p:style>
-          <a:lnRef idx="0"/>
-          <a:fillRef idx="0"/>
-          <a:effectRef idx="0"/>
+          <a:lnRef idx="0">
+            <a:scrgbClr r="0" g="0" b="0"/>
+          </a:lnRef>
+          <a:fillRef idx="0">
+            <a:scrgbClr r="0" g="0" b="0"/>
+          </a:fillRef>
+          <a:effectRef idx="0">
+            <a:scrgbClr r="0" g="0" b="0"/>
+          </a:effectRef>
           <a:fontRef idx="minor"/>
         </p:style>
         <p:txBody>
-          <a:bodyPr lIns="90000" rIns="0" tIns="45000" bIns="45000" anchor="b">
+          <a:bodyPr lIns="90000" tIns="45000" rIns="0" bIns="45000" anchor="b">
             <a:noAutofit/>
           </a:bodyPr>
+          <a:lstStyle/>
           <a:p>
             <a:pPr algn="r">
               <a:lnSpc>
@@ -5746,16 +6731,16 @@
               <a:buNone/>
             </a:pPr>
             <a:fld id="{0C21A6E8-D204-425B-AAB7-62991B2A2CD5}" type="slidenum">
-              <a:rPr b="0" lang="en-GB" sz="1050" spc="-1" strike="noStrike">
+              <a:rPr lang="en-GB" sz="1050" b="0" strike="noStrike" spc="-1">
                 <a:solidFill>
-                  <a:srgbClr val="a6a6a6"/>
+                  <a:srgbClr val="A6A6A6"/>
                 </a:solidFill>
                 <a:latin typeface="Verdana"/>
                 <a:ea typeface="DejaVu Sans"/>
               </a:rPr>
-              <a:t>&lt;number&gt;</a:t>
+              <a:t>3</a:t>
             </a:fld>
-            <a:endParaRPr b="0" lang="en-GB" sz="1050" spc="-1" strike="noStrike">
+            <a:endParaRPr lang="en-GB" sz="1050" b="0" strike="noStrike" spc="-1">
               <a:latin typeface="Arial"/>
             </a:endParaRPr>
           </a:p>
@@ -5763,19 +6748,14 @@
       </p:sp>
     </p:spTree>
   </p:cSld>
-  <mc:AlternateContent>
-    <mc:Choice Requires="p14">
-      <p:transition spd="slow" p14:dur="2000"/>
-    </mc:Choice>
-    <mc:Fallback>
-      <p:transition spd="slow"/>
-    </mc:Fallback>
-  </mc:AlternateContent>
+  <p:clrMapOvr>
+    <a:masterClrMapping/>
+  </p:clrMapOvr>
 </p:sld>
 </file>
 
 <file path=ppt/slides/slide4.xml><?xml version="1.0" encoding="utf-8"?>
-<p:sld xmlns:a="http://schemas.openxmlformats.org/drawingml/2006/main" xmlns:p="http://schemas.openxmlformats.org/presentationml/2006/main" xmlns:r="http://schemas.openxmlformats.org/officeDocument/2006/relationships" xmlns:p14="http://schemas.microsoft.com/office/powerpoint/2010/main" xmlns:p15="http://schemas.microsoft.com/office/powerpoint/2012/main" xmlns:mc="http://schemas.openxmlformats.org/markup-compatibility/2006">
+<p:sld xmlns:a="http://schemas.openxmlformats.org/drawingml/2006/main" xmlns:r="http://schemas.openxmlformats.org/officeDocument/2006/relationships" xmlns:p="http://schemas.openxmlformats.org/presentationml/2006/main">
   <p:cSld>
     <p:spTree>
       <p:nvGrpSpPr>
@@ -5811,15 +6791,22 @@
           </a:ln>
         </p:spPr>
         <p:style>
-          <a:lnRef idx="0"/>
-          <a:fillRef idx="0"/>
-          <a:effectRef idx="0"/>
+          <a:lnRef idx="0">
+            <a:scrgbClr r="0" g="0" b="0"/>
+          </a:lnRef>
+          <a:fillRef idx="0">
+            <a:scrgbClr r="0" g="0" b="0"/>
+          </a:fillRef>
+          <a:effectRef idx="0">
+            <a:scrgbClr r="0" g="0" b="0"/>
+          </a:effectRef>
           <a:fontRef idx="minor"/>
         </p:style>
         <p:txBody>
-          <a:bodyPr lIns="90000" rIns="90000" tIns="45000" bIns="45000" anchor="t">
+          <a:bodyPr lIns="90000" tIns="45000" rIns="90000" bIns="45000" anchor="t">
             <a:normAutofit/>
           </a:bodyPr>
+          <a:lstStyle/>
           <a:p>
             <a:pPr marL="316800" indent="-316440">
               <a:lnSpc>
@@ -5829,14 +6816,14 @@
                 <a:spcPts val="1199"/>
               </a:spcBef>
               <a:buClr>
-                <a:srgbClr val="00689a"/>
+                <a:srgbClr val="00689A"/>
               </a:buClr>
               <a:buSzPct val="80000"/>
               <a:buFont typeface="Verdana"/>
               <a:buChar char="›"/>
             </a:pPr>
             <a:r>
-              <a:rPr b="0" lang="en-GB" sz="2200" spc="-1" strike="noStrike">
+              <a:rPr lang="en-GB" sz="2200" b="0" strike="noStrike" spc="-1">
                 <a:solidFill>
                   <a:srgbClr val="000000"/>
                 </a:solidFill>
@@ -5845,12 +6832,12 @@
               </a:rPr>
               <a:t>What is real verses what is expected</a:t>
             </a:r>
-            <a:endParaRPr b="0" lang="en-GB" sz="2200" spc="-1" strike="noStrike">
-              <a:latin typeface="Arial"/>
-            </a:endParaRPr>
-          </a:p>
-          <a:p>
-            <a:pPr lvl="1" marL="774000" indent="-316440">
+            <a:endParaRPr lang="en-GB" sz="2200" b="0" strike="noStrike" spc="-1">
+              <a:latin typeface="Arial"/>
+            </a:endParaRPr>
+          </a:p>
+          <a:p>
+            <a:pPr marL="774000" lvl="1" indent="-316440">
               <a:lnSpc>
                 <a:spcPct val="90000"/>
               </a:lnSpc>
@@ -5858,14 +6845,14 @@
                 <a:spcPts val="1199"/>
               </a:spcBef>
               <a:buClr>
-                <a:srgbClr val="00689a"/>
+                <a:srgbClr val="00689A"/>
               </a:buClr>
               <a:buSzPct val="80000"/>
               <a:buFont typeface="Verdana"/>
               <a:buChar char="›"/>
             </a:pPr>
             <a:r>
-              <a:rPr b="0" lang="en-GB" sz="1600" spc="-1" strike="noStrike">
+              <a:rPr lang="en-GB" sz="1600" b="0" strike="noStrike" spc="-1">
                 <a:solidFill>
                   <a:srgbClr val="000000"/>
                 </a:solidFill>
@@ -5874,12 +6861,12 @@
               </a:rPr>
               <a:t>Aggregate data to discover operational patterns of a cluster and classify them (looking for rules)</a:t>
             </a:r>
-            <a:endParaRPr b="0" lang="en-GB" sz="1600" spc="-1" strike="noStrike">
-              <a:latin typeface="Arial"/>
-            </a:endParaRPr>
-          </a:p>
-          <a:p>
-            <a:pPr lvl="1" marL="774000" indent="-316440">
+            <a:endParaRPr lang="en-GB" sz="1600" b="0" strike="noStrike" spc="-1">
+              <a:latin typeface="Arial"/>
+            </a:endParaRPr>
+          </a:p>
+          <a:p>
+            <a:pPr marL="774000" lvl="1" indent="-316440">
               <a:lnSpc>
                 <a:spcPct val="90000"/>
               </a:lnSpc>
@@ -5887,14 +6874,14 @@
                 <a:spcPts val="1199"/>
               </a:spcBef>
               <a:buClr>
-                <a:srgbClr val="00689a"/>
+                <a:srgbClr val="00689A"/>
               </a:buClr>
               <a:buSzPct val="80000"/>
               <a:buFont typeface="Verdana"/>
               <a:buChar char="›"/>
             </a:pPr>
             <a:r>
-              <a:rPr b="0" lang="en-GB" sz="1600" spc="-1" strike="noStrike">
+              <a:rPr lang="en-GB" sz="1600" b="0" strike="noStrike" spc="-1">
                 <a:solidFill>
                   <a:srgbClr val="000000"/>
                 </a:solidFill>
@@ -5903,12 +6890,12 @@
               </a:rPr>
               <a:t>Know when to use unstructured learning verses supervised learning</a:t>
             </a:r>
-            <a:endParaRPr b="0" lang="en-GB" sz="1600" spc="-1" strike="noStrike">
-              <a:latin typeface="Arial"/>
-            </a:endParaRPr>
-          </a:p>
-          <a:p>
-            <a:pPr lvl="1" marL="774000" indent="-316440">
+            <a:endParaRPr lang="en-GB" sz="1600" b="0" strike="noStrike" spc="-1">
+              <a:latin typeface="Arial"/>
+            </a:endParaRPr>
+          </a:p>
+          <a:p>
+            <a:pPr marL="774000" lvl="1" indent="-316440">
               <a:lnSpc>
                 <a:spcPct val="90000"/>
               </a:lnSpc>
@@ -5916,14 +6903,14 @@
                 <a:spcPts val="1199"/>
               </a:spcBef>
               <a:buClr>
-                <a:srgbClr val="00689a"/>
+                <a:srgbClr val="00689A"/>
               </a:buClr>
               <a:buSzPct val="80000"/>
               <a:buFont typeface="Verdana"/>
               <a:buChar char="›"/>
             </a:pPr>
             <a:r>
-              <a:rPr b="0" lang="en-GB" sz="1600" spc="-1" strike="noStrike">
+              <a:rPr lang="en-GB" sz="1600" b="0" strike="noStrike" spc="-1">
                 <a:solidFill>
                   <a:srgbClr val="000000"/>
                 </a:solidFill>
@@ -5932,12 +6919,12 @@
               </a:rPr>
               <a:t>Leverage change-impact analysis</a:t>
             </a:r>
-            <a:endParaRPr b="0" lang="en-GB" sz="1600" spc="-1" strike="noStrike">
-              <a:latin typeface="Arial"/>
-            </a:endParaRPr>
-          </a:p>
-          <a:p>
-            <a:pPr lvl="1" marL="774000" indent="-316440">
+            <a:endParaRPr lang="en-GB" sz="1600" b="0" strike="noStrike" spc="-1">
+              <a:latin typeface="Arial"/>
+            </a:endParaRPr>
+          </a:p>
+          <a:p>
+            <a:pPr marL="774000" lvl="1" indent="-316440">
               <a:lnSpc>
                 <a:spcPct val="90000"/>
               </a:lnSpc>
@@ -5945,14 +6932,14 @@
                 <a:spcPts val="1199"/>
               </a:spcBef>
               <a:buClr>
-                <a:srgbClr val="00689a"/>
+                <a:srgbClr val="00689A"/>
               </a:buClr>
               <a:buSzPct val="80000"/>
               <a:buFont typeface="Verdana"/>
               <a:buChar char="›"/>
             </a:pPr>
             <a:r>
-              <a:rPr b="0" lang="en-GB" sz="1600" spc="-1" strike="noStrike">
+              <a:rPr lang="en-GB" sz="1600" b="0" strike="noStrike" spc="-1">
                 <a:solidFill>
                   <a:srgbClr val="000000"/>
                 </a:solidFill>
@@ -5961,12 +6948,12 @@
               </a:rPr>
               <a:t>Has found suitability in the markets with testing</a:t>
             </a:r>
-            <a:endParaRPr b="0" lang="en-GB" sz="1600" spc="-1" strike="noStrike">
-              <a:latin typeface="Arial"/>
-            </a:endParaRPr>
-          </a:p>
-          <a:p>
-            <a:pPr lvl="2" marL="1231200" indent="-316440">
+            <a:endParaRPr lang="en-GB" sz="1600" b="0" strike="noStrike" spc="-1">
+              <a:latin typeface="Arial"/>
+            </a:endParaRPr>
+          </a:p>
+          <a:p>
+            <a:pPr marL="1231200" lvl="2" indent="-316440">
               <a:lnSpc>
                 <a:spcPct val="90000"/>
               </a:lnSpc>
@@ -5974,14 +6961,14 @@
                 <a:spcPts val="1199"/>
               </a:spcBef>
               <a:buClr>
-                <a:srgbClr val="00689a"/>
+                <a:srgbClr val="00689A"/>
               </a:buClr>
               <a:buSzPct val="80000"/>
               <a:buFont typeface="Verdana"/>
               <a:buChar char="›"/>
             </a:pPr>
             <a:r>
-              <a:rPr b="0" lang="en-GB" sz="1600" spc="-1" strike="noStrike">
+              <a:rPr lang="en-GB" sz="1600" b="0" strike="noStrike" spc="-1">
                 <a:solidFill>
                   <a:srgbClr val="000000"/>
                 </a:solidFill>
@@ -5990,7 +6977,7 @@
               </a:rPr>
               <a:t>Low-hanging fruit</a:t>
             </a:r>
-            <a:endParaRPr b="0" lang="en-GB" sz="1600" spc="-1" strike="noStrike">
+            <a:endParaRPr lang="en-GB" sz="1600" b="0" strike="noStrike" spc="-1">
               <a:latin typeface="Arial"/>
             </a:endParaRPr>
           </a:p>
@@ -6003,14 +6990,14 @@
                 <a:spcPts val="1199"/>
               </a:spcBef>
               <a:buClr>
-                <a:srgbClr val="00689a"/>
+                <a:srgbClr val="00689A"/>
               </a:buClr>
               <a:buSzPct val="80000"/>
               <a:buFont typeface="Verdana"/>
               <a:buChar char="›"/>
             </a:pPr>
             <a:r>
-              <a:rPr b="0" lang="en-GB" sz="2200" spc="-1" strike="noStrike">
+              <a:rPr lang="en-GB" sz="2200" b="0" strike="noStrike" spc="-1">
                 <a:solidFill>
                   <a:srgbClr val="000000"/>
                 </a:solidFill>
@@ -6019,12 +7006,12 @@
               </a:rPr>
               <a:t>Tools verses new development</a:t>
             </a:r>
-            <a:endParaRPr b="0" lang="en-GB" sz="2200" spc="-1" strike="noStrike">
-              <a:latin typeface="Arial"/>
-            </a:endParaRPr>
-          </a:p>
-          <a:p>
-            <a:pPr lvl="1" marL="774000" indent="-316440">
+            <a:endParaRPr lang="en-GB" sz="2200" b="0" strike="noStrike" spc="-1">
+              <a:latin typeface="Arial"/>
+            </a:endParaRPr>
+          </a:p>
+          <a:p>
+            <a:pPr marL="774000" lvl="1" indent="-316440">
               <a:lnSpc>
                 <a:spcPct val="90000"/>
               </a:lnSpc>
@@ -6032,14 +7019,14 @@
                 <a:spcPts val="1199"/>
               </a:spcBef>
               <a:buClr>
-                <a:srgbClr val="00689a"/>
+                <a:srgbClr val="00689A"/>
               </a:buClr>
               <a:buSzPct val="80000"/>
               <a:buFont typeface="Verdana"/>
               <a:buChar char="›"/>
             </a:pPr>
             <a:r>
-              <a:rPr b="0" lang="en-GB" sz="1600" spc="-1" strike="noStrike">
+              <a:rPr lang="en-GB" sz="1600" b="0" strike="noStrike" spc="-1">
                 <a:solidFill>
                   <a:srgbClr val="000000"/>
                 </a:solidFill>
@@ -6048,12 +7035,12 @@
               </a:rPr>
               <a:t>Quality of tools mixed and indeterminate</a:t>
             </a:r>
-            <a:endParaRPr b="0" lang="en-GB" sz="1600" spc="-1" strike="noStrike">
-              <a:latin typeface="Arial"/>
-            </a:endParaRPr>
-          </a:p>
-          <a:p>
-            <a:pPr lvl="1" marL="774000" indent="-316440">
+            <a:endParaRPr lang="en-GB" sz="1600" b="0" strike="noStrike" spc="-1">
+              <a:latin typeface="Arial"/>
+            </a:endParaRPr>
+          </a:p>
+          <a:p>
+            <a:pPr marL="774000" lvl="1" indent="-316440">
               <a:lnSpc>
                 <a:spcPct val="90000"/>
               </a:lnSpc>
@@ -6061,14 +7048,14 @@
                 <a:spcPts val="1199"/>
               </a:spcBef>
               <a:buClr>
-                <a:srgbClr val="00689a"/>
+                <a:srgbClr val="00689A"/>
               </a:buClr>
               <a:buSzPct val="80000"/>
               <a:buFont typeface="Verdana"/>
               <a:buChar char="›"/>
             </a:pPr>
             <a:r>
-              <a:rPr b="0" lang="en-GB" sz="1600" spc="-1" strike="noStrike">
+              <a:rPr lang="en-GB" sz="1600" b="0" strike="noStrike" spc="-1">
                 <a:solidFill>
                   <a:srgbClr val="000000"/>
                 </a:solidFill>
@@ -6077,12 +7064,12 @@
               </a:rPr>
               <a:t>Is AI “in there” or are they just saying it is?</a:t>
             </a:r>
-            <a:endParaRPr b="0" lang="en-GB" sz="1600" spc="-1" strike="noStrike">
-              <a:latin typeface="Arial"/>
-            </a:endParaRPr>
-          </a:p>
-          <a:p>
-            <a:pPr lvl="1" marL="774000" indent="-316440">
+            <a:endParaRPr lang="en-GB" sz="1600" b="0" strike="noStrike" spc="-1">
+              <a:latin typeface="Arial"/>
+            </a:endParaRPr>
+          </a:p>
+          <a:p>
+            <a:pPr marL="774000" lvl="1" indent="-316440">
               <a:lnSpc>
                 <a:spcPct val="90000"/>
               </a:lnSpc>
@@ -6090,14 +7077,14 @@
                 <a:spcPts val="1199"/>
               </a:spcBef>
               <a:buClr>
-                <a:srgbClr val="00689a"/>
+                <a:srgbClr val="00689A"/>
               </a:buClr>
               <a:buSzPct val="80000"/>
               <a:buFont typeface="Verdana"/>
               <a:buChar char="›"/>
             </a:pPr>
             <a:r>
-              <a:rPr b="0" lang="en-GB" sz="1600" spc="-1" strike="noStrike">
+              <a:rPr lang="en-GB" sz="1600" b="0" strike="noStrike" spc="-1">
                 <a:solidFill>
                   <a:srgbClr val="000000"/>
                 </a:solidFill>
@@ -6106,7 +7093,7 @@
               </a:rPr>
               <a:t>Backpropagation feedforward neural networks that can remember</a:t>
             </a:r>
-            <a:endParaRPr b="0" lang="en-GB" sz="1600" spc="-1" strike="noStrike">
+            <a:endParaRPr lang="en-GB" sz="1600" b="0" strike="noStrike" spc="-1">
               <a:latin typeface="Arial"/>
             </a:endParaRPr>
           </a:p>
@@ -6132,15 +7119,22 @@
           </a:ln>
         </p:spPr>
         <p:style>
-          <a:lnRef idx="0"/>
-          <a:fillRef idx="0"/>
-          <a:effectRef idx="0"/>
+          <a:lnRef idx="0">
+            <a:scrgbClr r="0" g="0" b="0"/>
+          </a:lnRef>
+          <a:fillRef idx="0">
+            <a:scrgbClr r="0" g="0" b="0"/>
+          </a:fillRef>
+          <a:effectRef idx="0">
+            <a:scrgbClr r="0" g="0" b="0"/>
+          </a:effectRef>
           <a:fontRef idx="minor"/>
         </p:style>
         <p:txBody>
-          <a:bodyPr lIns="90000" rIns="90000" tIns="45000" bIns="45000" anchor="b">
+          <a:bodyPr lIns="90000" tIns="45000" rIns="90000" bIns="45000" anchor="b">
             <a:noAutofit/>
           </a:bodyPr>
+          <a:lstStyle/>
           <a:p>
             <a:pPr>
               <a:lnSpc>
@@ -6149,16 +7143,16 @@
               <a:buNone/>
             </a:pPr>
             <a:r>
-              <a:rPr b="0" lang="en-GB" sz="2000" spc="-1" strike="noStrike">
+              <a:rPr lang="en-GB" sz="2000" b="0" strike="noStrike" spc="-1">
                 <a:solidFill>
-                  <a:srgbClr val="00689a"/>
+                  <a:srgbClr val="00689A"/>
                 </a:solidFill>
                 <a:latin typeface="Verdana"/>
                 <a:ea typeface="DejaVu Sans"/>
               </a:rPr>
               <a:t>What is AiOps: Beyond the hype</a:t>
             </a:r>
-            <a:endParaRPr b="0" lang="en-GB" sz="2000" spc="-1" strike="noStrike">
+            <a:endParaRPr lang="en-GB" sz="2000" b="0" strike="noStrike" spc="-1">
               <a:latin typeface="Arial"/>
             </a:endParaRPr>
           </a:p>
@@ -6184,15 +7178,22 @@
           </a:ln>
         </p:spPr>
         <p:style>
-          <a:lnRef idx="0"/>
-          <a:fillRef idx="0"/>
-          <a:effectRef idx="0"/>
+          <a:lnRef idx="0">
+            <a:scrgbClr r="0" g="0" b="0"/>
+          </a:lnRef>
+          <a:fillRef idx="0">
+            <a:scrgbClr r="0" g="0" b="0"/>
+          </a:fillRef>
+          <a:effectRef idx="0">
+            <a:scrgbClr r="0" g="0" b="0"/>
+          </a:effectRef>
           <a:fontRef idx="minor"/>
         </p:style>
         <p:txBody>
-          <a:bodyPr lIns="90000" rIns="0" tIns="45000" bIns="45000" anchor="b">
+          <a:bodyPr lIns="90000" tIns="45000" rIns="0" bIns="45000" anchor="b">
             <a:noAutofit/>
           </a:bodyPr>
+          <a:lstStyle/>
           <a:p>
             <a:pPr algn="r">
               <a:lnSpc>
@@ -6201,16 +7202,16 @@
               <a:buNone/>
             </a:pPr>
             <a:fld id="{EA944A03-4F4C-4197-AA58-220652894D72}" type="slidenum">
-              <a:rPr b="0" lang="en-GB" sz="1050" spc="-1" strike="noStrike">
+              <a:rPr lang="en-GB" sz="1050" b="0" strike="noStrike" spc="-1">
                 <a:solidFill>
-                  <a:srgbClr val="a6a6a6"/>
+                  <a:srgbClr val="A6A6A6"/>
                 </a:solidFill>
                 <a:latin typeface="Verdana"/>
                 <a:ea typeface="DejaVu Sans"/>
               </a:rPr>
-              <a:t>&lt;number&gt;</a:t>
+              <a:t>4</a:t>
             </a:fld>
-            <a:endParaRPr b="0" lang="en-GB" sz="1050" spc="-1" strike="noStrike">
+            <a:endParaRPr lang="en-GB" sz="1050" b="0" strike="noStrike" spc="-1">
               <a:latin typeface="Arial"/>
             </a:endParaRPr>
           </a:p>
@@ -6218,19 +7219,14 @@
       </p:sp>
     </p:spTree>
   </p:cSld>
-  <mc:AlternateContent>
-    <mc:Choice Requires="p14">
-      <p:transition spd="slow" p14:dur="2000"/>
-    </mc:Choice>
-    <mc:Fallback>
-      <p:transition spd="slow"/>
-    </mc:Fallback>
-  </mc:AlternateContent>
+  <p:clrMapOvr>
+    <a:masterClrMapping/>
+  </p:clrMapOvr>
 </p:sld>
 </file>
 
 <file path=ppt/slides/slide5.xml><?xml version="1.0" encoding="utf-8"?>
-<p:sld xmlns:a="http://schemas.openxmlformats.org/drawingml/2006/main" xmlns:p="http://schemas.openxmlformats.org/presentationml/2006/main" xmlns:r="http://schemas.openxmlformats.org/officeDocument/2006/relationships" xmlns:p14="http://schemas.microsoft.com/office/powerpoint/2010/main" xmlns:p15="http://schemas.microsoft.com/office/powerpoint/2012/main" xmlns:mc="http://schemas.openxmlformats.org/markup-compatibility/2006">
+<p:sld xmlns:a="http://schemas.openxmlformats.org/drawingml/2006/main" xmlns:r="http://schemas.openxmlformats.org/officeDocument/2006/relationships" xmlns:p="http://schemas.openxmlformats.org/presentationml/2006/main">
   <p:cSld>
     <p:spTree>
       <p:nvGrpSpPr>
@@ -6266,15 +7262,22 @@
           </a:ln>
         </p:spPr>
         <p:style>
-          <a:lnRef idx="0"/>
-          <a:fillRef idx="0"/>
-          <a:effectRef idx="0"/>
+          <a:lnRef idx="0">
+            <a:scrgbClr r="0" g="0" b="0"/>
+          </a:lnRef>
+          <a:fillRef idx="0">
+            <a:scrgbClr r="0" g="0" b="0"/>
+          </a:fillRef>
+          <a:effectRef idx="0">
+            <a:scrgbClr r="0" g="0" b="0"/>
+          </a:effectRef>
           <a:fontRef idx="minor"/>
         </p:style>
         <p:txBody>
-          <a:bodyPr lIns="90000" rIns="90000" tIns="45000" bIns="45000" anchor="t">
+          <a:bodyPr lIns="90000" tIns="45000" rIns="90000" bIns="45000" anchor="t">
             <a:normAutofit/>
           </a:bodyPr>
+          <a:lstStyle/>
           <a:p>
             <a:pPr marL="316800" indent="-316440">
               <a:lnSpc>
@@ -6284,14 +7287,14 @@
                 <a:spcPts val="1199"/>
               </a:spcBef>
               <a:buClr>
-                <a:srgbClr val="00689a"/>
+                <a:srgbClr val="00689A"/>
               </a:buClr>
               <a:buSzPct val="80000"/>
               <a:buFont typeface="Verdana"/>
               <a:buChar char="›"/>
             </a:pPr>
             <a:r>
-              <a:rPr b="0" lang="en-GB" sz="2200" spc="-1" strike="noStrike">
+              <a:rPr lang="en-GB" sz="2200" b="0" strike="noStrike" spc="-1">
                 <a:solidFill>
                   <a:srgbClr val="000000"/>
                 </a:solidFill>
@@ -6300,12 +7303,12 @@
               </a:rPr>
               <a:t>Lessons learned</a:t>
             </a:r>
-            <a:endParaRPr b="0" lang="en-GB" sz="2200" spc="-1" strike="noStrike">
-              <a:latin typeface="Arial"/>
-            </a:endParaRPr>
-          </a:p>
-          <a:p>
-            <a:pPr lvl="1" marL="774000" indent="-316440">
+            <a:endParaRPr lang="en-GB" sz="2200" b="0" strike="noStrike" spc="-1">
+              <a:latin typeface="Arial"/>
+            </a:endParaRPr>
+          </a:p>
+          <a:p>
+            <a:pPr marL="774000" lvl="1" indent="-316440">
               <a:lnSpc>
                 <a:spcPct val="90000"/>
               </a:lnSpc>
@@ -6313,14 +7316,14 @@
                 <a:spcPts val="1199"/>
               </a:spcBef>
               <a:buClr>
-                <a:srgbClr val="00689a"/>
+                <a:srgbClr val="00689A"/>
               </a:buClr>
               <a:buSzPct val="80000"/>
               <a:buFont typeface="Verdana"/>
               <a:buChar char="›"/>
             </a:pPr>
             <a:r>
-              <a:rPr b="0" lang="en-GB" sz="1600" spc="-1" strike="noStrike">
+              <a:rPr lang="en-GB" sz="1600" b="0" strike="noStrike" spc="-1">
                 <a:solidFill>
                   <a:srgbClr val="000000"/>
                 </a:solidFill>
@@ -6329,12 +7332,12 @@
               </a:rPr>
               <a:t>Don’t automatically trust the algorithm</a:t>
             </a:r>
-            <a:endParaRPr b="0" lang="en-GB" sz="1600" spc="-1" strike="noStrike">
-              <a:latin typeface="Arial"/>
-            </a:endParaRPr>
-          </a:p>
-          <a:p>
-            <a:pPr lvl="1" marL="774000" indent="-316440">
+            <a:endParaRPr lang="en-GB" sz="1600" b="0" strike="noStrike" spc="-1">
+              <a:latin typeface="Arial"/>
+            </a:endParaRPr>
+          </a:p>
+          <a:p>
+            <a:pPr marL="774000" lvl="1" indent="-316440">
               <a:lnSpc>
                 <a:spcPct val="90000"/>
               </a:lnSpc>
@@ -6342,14 +7345,14 @@
                 <a:spcPts val="1199"/>
               </a:spcBef>
               <a:buClr>
-                <a:srgbClr val="00689a"/>
+                <a:srgbClr val="00689A"/>
               </a:buClr>
               <a:buSzPct val="80000"/>
               <a:buFont typeface="Verdana"/>
               <a:buChar char="›"/>
             </a:pPr>
             <a:r>
-              <a:rPr b="0" lang="en-GB" sz="1600" spc="-1" strike="noStrike">
+              <a:rPr lang="en-GB" sz="1600" b="0" strike="noStrike" spc="-1">
                 <a:solidFill>
                   <a:srgbClr val="000000"/>
                 </a:solidFill>
@@ -6358,12 +7361,12 @@
               </a:rPr>
               <a:t>Involve participants to determine post-mortem </a:t>
             </a:r>
-            <a:endParaRPr b="0" lang="en-GB" sz="1600" spc="-1" strike="noStrike">
-              <a:latin typeface="Arial"/>
-            </a:endParaRPr>
-          </a:p>
-          <a:p>
-            <a:pPr lvl="1" marL="774000" indent="-316440">
+            <a:endParaRPr lang="en-GB" sz="1600" b="0" strike="noStrike" spc="-1">
+              <a:latin typeface="Arial"/>
+            </a:endParaRPr>
+          </a:p>
+          <a:p>
+            <a:pPr marL="774000" lvl="1" indent="-316440">
               <a:lnSpc>
                 <a:spcPct val="90000"/>
               </a:lnSpc>
@@ -6371,14 +7374,14 @@
                 <a:spcPts val="1199"/>
               </a:spcBef>
               <a:buClr>
-                <a:srgbClr val="00689a"/>
+                <a:srgbClr val="00689A"/>
               </a:buClr>
               <a:buSzPct val="80000"/>
               <a:buFont typeface="Verdana"/>
               <a:buChar char="›"/>
             </a:pPr>
             <a:r>
-              <a:rPr b="0" lang="en-GB" sz="1600" spc="-1" strike="noStrike">
+              <a:rPr lang="en-GB" sz="1600" b="0" strike="noStrike" spc="-1">
                 <a:solidFill>
                   <a:srgbClr val="000000"/>
                 </a:solidFill>
@@ -6387,7 +7390,7 @@
               </a:rPr>
               <a:t>Trust what is possible not what is theoretically possible</a:t>
             </a:r>
-            <a:endParaRPr b="0" lang="en-GB" sz="1600" spc="-1" strike="noStrike">
+            <a:endParaRPr lang="en-GB" sz="1600" b="0" strike="noStrike" spc="-1">
               <a:latin typeface="Arial"/>
             </a:endParaRPr>
           </a:p>
@@ -6400,14 +7403,14 @@
                 <a:spcPts val="1199"/>
               </a:spcBef>
               <a:buClr>
-                <a:srgbClr val="00689a"/>
+                <a:srgbClr val="00689A"/>
               </a:buClr>
               <a:buSzPct val="80000"/>
               <a:buFont typeface="Verdana"/>
               <a:buChar char="›"/>
             </a:pPr>
             <a:r>
-              <a:rPr b="0" lang="en-GB" sz="2200" spc="-1" strike="noStrike">
+              <a:rPr lang="en-GB" sz="2200" b="0" strike="noStrike" spc="-1">
                 <a:solidFill>
                   <a:srgbClr val="000000"/>
                 </a:solidFill>
@@ -6416,12 +7419,12 @@
               </a:rPr>
               <a:t>Changing course</a:t>
             </a:r>
-            <a:endParaRPr b="0" lang="en-GB" sz="2200" spc="-1" strike="noStrike">
-              <a:latin typeface="Arial"/>
-            </a:endParaRPr>
-          </a:p>
-          <a:p>
-            <a:pPr lvl="1" marL="774000" indent="-316440">
+            <a:endParaRPr lang="en-GB" sz="2200" b="0" strike="noStrike" spc="-1">
+              <a:latin typeface="Arial"/>
+            </a:endParaRPr>
+          </a:p>
+          <a:p>
+            <a:pPr marL="774000" lvl="1" indent="-316440">
               <a:lnSpc>
                 <a:spcPct val="90000"/>
               </a:lnSpc>
@@ -6429,14 +7432,14 @@
                 <a:spcPts val="1199"/>
               </a:spcBef>
               <a:buClr>
-                <a:srgbClr val="00689a"/>
+                <a:srgbClr val="00689A"/>
               </a:buClr>
               <a:buSzPct val="80000"/>
               <a:buFont typeface="Verdana"/>
               <a:buChar char="›"/>
             </a:pPr>
             <a:r>
-              <a:rPr b="0" lang="en-GB" sz="1600" spc="-1" strike="noStrike">
+              <a:rPr lang="en-GB" sz="1600" b="0" strike="noStrike" spc="-1">
                 <a:solidFill>
                   <a:srgbClr val="000000"/>
                 </a:solidFill>
@@ -6445,12 +7448,12 @@
               </a:rPr>
               <a:t>Determine a mathematically-sound workflow</a:t>
             </a:r>
-            <a:endParaRPr b="0" lang="en-GB" sz="1600" spc="-1" strike="noStrike">
-              <a:latin typeface="Arial"/>
-            </a:endParaRPr>
-          </a:p>
-          <a:p>
-            <a:pPr lvl="1" marL="774000" indent="-316440">
+            <a:endParaRPr lang="en-GB" sz="1600" b="0" strike="noStrike" spc="-1">
+              <a:latin typeface="Arial"/>
+            </a:endParaRPr>
+          </a:p>
+          <a:p>
+            <a:pPr marL="774000" lvl="1" indent="-316440">
               <a:lnSpc>
                 <a:spcPct val="90000"/>
               </a:lnSpc>
@@ -6458,14 +7461,14 @@
                 <a:spcPts val="1199"/>
               </a:spcBef>
               <a:buClr>
-                <a:srgbClr val="00689a"/>
+                <a:srgbClr val="00689A"/>
               </a:buClr>
               <a:buSzPct val="80000"/>
               <a:buFont typeface="Verdana"/>
               <a:buChar char="›"/>
             </a:pPr>
             <a:r>
-              <a:rPr b="0" lang="en-GB" sz="1600" spc="-1" strike="noStrike">
+              <a:rPr lang="en-GB" sz="1600" b="0" strike="noStrike" spc="-1">
                 <a:solidFill>
                   <a:srgbClr val="000000"/>
                 </a:solidFill>
@@ -6474,12 +7477,12 @@
               </a:rPr>
               <a:t>Model processes in a logical manner</a:t>
             </a:r>
-            <a:endParaRPr b="0" lang="en-GB" sz="1600" spc="-1" strike="noStrike">
-              <a:latin typeface="Arial"/>
-            </a:endParaRPr>
-          </a:p>
-          <a:p>
-            <a:pPr lvl="1" marL="774000" indent="-316440">
+            <a:endParaRPr lang="en-GB" sz="1600" b="0" strike="noStrike" spc="-1">
+              <a:latin typeface="Arial"/>
+            </a:endParaRPr>
+          </a:p>
+          <a:p>
+            <a:pPr marL="774000" lvl="1" indent="-316440">
               <a:lnSpc>
                 <a:spcPct val="90000"/>
               </a:lnSpc>
@@ -6487,14 +7490,14 @@
                 <a:spcPts val="1199"/>
               </a:spcBef>
               <a:buClr>
-                <a:srgbClr val="00689a"/>
+                <a:srgbClr val="00689A"/>
               </a:buClr>
               <a:buSzPct val="80000"/>
               <a:buFont typeface="Verdana"/>
               <a:buChar char="›"/>
             </a:pPr>
             <a:r>
-              <a:rPr b="0" lang="en-GB" sz="1600" spc="-1" strike="noStrike">
+              <a:rPr lang="en-GB" sz="1600" b="0" strike="noStrike" spc="-1">
                 <a:solidFill>
                   <a:srgbClr val="000000"/>
                 </a:solidFill>
@@ -6503,12 +7506,12 @@
               </a:rPr>
               <a:t>Keep functionality simple</a:t>
             </a:r>
-            <a:endParaRPr b="0" lang="en-GB" sz="1600" spc="-1" strike="noStrike">
-              <a:latin typeface="Arial"/>
-            </a:endParaRPr>
-          </a:p>
-          <a:p>
-            <a:pPr lvl="1" marL="774000" indent="-316440">
+            <a:endParaRPr lang="en-GB" sz="1600" b="0" strike="noStrike" spc="-1">
+              <a:latin typeface="Arial"/>
+            </a:endParaRPr>
+          </a:p>
+          <a:p>
+            <a:pPr marL="774000" lvl="1" indent="-316440">
               <a:lnSpc>
                 <a:spcPct val="90000"/>
               </a:lnSpc>
@@ -6516,14 +7519,14 @@
                 <a:spcPts val="1199"/>
               </a:spcBef>
               <a:buClr>
-                <a:srgbClr val="00689a"/>
+                <a:srgbClr val="00689A"/>
               </a:buClr>
               <a:buSzPct val="80000"/>
               <a:buFont typeface="Verdana"/>
               <a:buChar char="›"/>
             </a:pPr>
             <a:r>
-              <a:rPr b="0" lang="en-GB" sz="1600" spc="-1" strike="noStrike">
+              <a:rPr lang="en-GB" sz="1600" b="0" strike="noStrike" spc="-1">
                 <a:solidFill>
                   <a:srgbClr val="000000"/>
                 </a:solidFill>
@@ -6532,7 +7535,7 @@
               </a:rPr>
               <a:t>Orient the process toward increasing optimization</a:t>
             </a:r>
-            <a:endParaRPr b="0" lang="en-GB" sz="1600" spc="-1" strike="noStrike">
+            <a:endParaRPr lang="en-GB" sz="1600" b="0" strike="noStrike" spc="-1">
               <a:latin typeface="Arial"/>
             </a:endParaRPr>
           </a:p>
@@ -6558,15 +7561,22 @@
           </a:ln>
         </p:spPr>
         <p:style>
-          <a:lnRef idx="0"/>
-          <a:fillRef idx="0"/>
-          <a:effectRef idx="0"/>
+          <a:lnRef idx="0">
+            <a:scrgbClr r="0" g="0" b="0"/>
+          </a:lnRef>
+          <a:fillRef idx="0">
+            <a:scrgbClr r="0" g="0" b="0"/>
+          </a:fillRef>
+          <a:effectRef idx="0">
+            <a:scrgbClr r="0" g="0" b="0"/>
+          </a:effectRef>
           <a:fontRef idx="minor"/>
         </p:style>
         <p:txBody>
-          <a:bodyPr lIns="90000" rIns="90000" tIns="45000" bIns="45000" anchor="b">
+          <a:bodyPr lIns="90000" tIns="45000" rIns="90000" bIns="45000" anchor="b">
             <a:noAutofit/>
           </a:bodyPr>
+          <a:lstStyle/>
           <a:p>
             <a:pPr>
               <a:lnSpc>
@@ -6575,16 +7585,16 @@
               <a:buNone/>
             </a:pPr>
             <a:r>
-              <a:rPr b="0" lang="en-GB" sz="2000" spc="-1" strike="noStrike">
+              <a:rPr lang="en-GB" sz="2000" b="0" strike="noStrike" spc="-1">
                 <a:solidFill>
-                  <a:srgbClr val="00689a"/>
+                  <a:srgbClr val="00689A"/>
                 </a:solidFill>
                 <a:latin typeface="Verdana"/>
                 <a:ea typeface="DejaVu Sans"/>
               </a:rPr>
               <a:t>This has been tried before: The belastingdienst</a:t>
             </a:r>
-            <a:endParaRPr b="0" lang="en-GB" sz="2000" spc="-1" strike="noStrike">
+            <a:endParaRPr lang="en-GB" sz="2000" b="0" strike="noStrike" spc="-1">
               <a:latin typeface="Arial"/>
             </a:endParaRPr>
           </a:p>
@@ -6610,15 +7620,22 @@
           </a:ln>
         </p:spPr>
         <p:style>
-          <a:lnRef idx="0"/>
-          <a:fillRef idx="0"/>
-          <a:effectRef idx="0"/>
+          <a:lnRef idx="0">
+            <a:scrgbClr r="0" g="0" b="0"/>
+          </a:lnRef>
+          <a:fillRef idx="0">
+            <a:scrgbClr r="0" g="0" b="0"/>
+          </a:fillRef>
+          <a:effectRef idx="0">
+            <a:scrgbClr r="0" g="0" b="0"/>
+          </a:effectRef>
           <a:fontRef idx="minor"/>
         </p:style>
         <p:txBody>
-          <a:bodyPr lIns="90000" rIns="0" tIns="45000" bIns="45000" anchor="b">
+          <a:bodyPr lIns="90000" tIns="45000" rIns="0" bIns="45000" anchor="b">
             <a:noAutofit/>
           </a:bodyPr>
+          <a:lstStyle/>
           <a:p>
             <a:pPr algn="r">
               <a:lnSpc>
@@ -6627,16 +7644,16 @@
               <a:buNone/>
             </a:pPr>
             <a:fld id="{1049A6BE-003A-4E58-80C7-C9F7A8E26933}" type="slidenum">
-              <a:rPr b="0" lang="en-GB" sz="1050" spc="-1" strike="noStrike">
+              <a:rPr lang="en-GB" sz="1050" b="0" strike="noStrike" spc="-1">
                 <a:solidFill>
-                  <a:srgbClr val="a6a6a6"/>
+                  <a:srgbClr val="A6A6A6"/>
                 </a:solidFill>
                 <a:latin typeface="Verdana"/>
                 <a:ea typeface="DejaVu Sans"/>
               </a:rPr>
-              <a:t>&lt;number&gt;</a:t>
+              <a:t>5</a:t>
             </a:fld>
-            <a:endParaRPr b="0" lang="en-GB" sz="1050" spc="-1" strike="noStrike">
+            <a:endParaRPr lang="en-GB" sz="1050" b="0" strike="noStrike" spc="-1">
               <a:latin typeface="Arial"/>
             </a:endParaRPr>
           </a:p>
@@ -6644,19 +7661,14 @@
       </p:sp>
     </p:spTree>
   </p:cSld>
-  <mc:AlternateContent>
-    <mc:Choice Requires="p14">
-      <p:transition spd="slow" p14:dur="2000"/>
-    </mc:Choice>
-    <mc:Fallback>
-      <p:transition spd="slow"/>
-    </mc:Fallback>
-  </mc:AlternateContent>
+  <p:clrMapOvr>
+    <a:masterClrMapping/>
+  </p:clrMapOvr>
 </p:sld>
 </file>
 
 <file path=ppt/slides/slide6.xml><?xml version="1.0" encoding="utf-8"?>
-<p:sld xmlns:a="http://schemas.openxmlformats.org/drawingml/2006/main" xmlns:p="http://schemas.openxmlformats.org/presentationml/2006/main" xmlns:r="http://schemas.openxmlformats.org/officeDocument/2006/relationships" xmlns:p14="http://schemas.microsoft.com/office/powerpoint/2010/main" xmlns:p15="http://schemas.microsoft.com/office/powerpoint/2012/main" xmlns:mc="http://schemas.openxmlformats.org/markup-compatibility/2006">
+<p:sld xmlns:a="http://schemas.openxmlformats.org/drawingml/2006/main" xmlns:r="http://schemas.openxmlformats.org/officeDocument/2006/relationships" xmlns:p="http://schemas.openxmlformats.org/presentationml/2006/main">
   <p:cSld>
     <p:spTree>
       <p:nvGrpSpPr>
@@ -6680,8 +7692,8 @@
         </p:nvSpPr>
         <p:spPr>
           <a:xfrm>
-            <a:off x="635040" y="2144880"/>
-            <a:ext cx="10919880" cy="3928320"/>
+            <a:off x="635040" y="1510393"/>
+            <a:ext cx="10919880" cy="4562807"/>
           </a:xfrm>
           <a:prstGeom prst="rect">
             <a:avLst/>
@@ -6692,15 +7704,22 @@
           </a:ln>
         </p:spPr>
         <p:style>
-          <a:lnRef idx="0"/>
-          <a:fillRef idx="0"/>
-          <a:effectRef idx="0"/>
+          <a:lnRef idx="0">
+            <a:scrgbClr r="0" g="0" b="0"/>
+          </a:lnRef>
+          <a:fillRef idx="0">
+            <a:scrgbClr r="0" g="0" b="0"/>
+          </a:fillRef>
+          <a:effectRef idx="0">
+            <a:scrgbClr r="0" g="0" b="0"/>
+          </a:effectRef>
           <a:fontRef idx="minor"/>
         </p:style>
         <p:txBody>
-          <a:bodyPr lIns="90000" rIns="90000" tIns="45000" bIns="45000" anchor="t">
-            <a:normAutofit fontScale="41000"/>
-          </a:bodyPr>
+          <a:bodyPr lIns="90000" tIns="45000" rIns="90000" bIns="45000" anchor="t">
+            <a:noAutofit/>
+          </a:bodyPr>
+          <a:lstStyle/>
           <a:p>
             <a:pPr marL="316800" indent="-316440">
               <a:lnSpc>
@@ -6710,14 +7729,14 @@
                 <a:spcPts val="1199"/>
               </a:spcBef>
               <a:buClr>
-                <a:srgbClr val="00689a"/>
+                <a:srgbClr val="00689A"/>
               </a:buClr>
               <a:buSzPct val="80000"/>
               <a:buFont typeface="Verdana"/>
               <a:buChar char="›"/>
             </a:pPr>
             <a:r>
-              <a:rPr b="0" lang="en-GB" sz="4000" spc="-1" strike="noStrike">
+              <a:rPr lang="en-GB" sz="1000" b="0" strike="noStrike" spc="-1" dirty="0">
                 <a:solidFill>
                   <a:srgbClr val="000000"/>
                 </a:solidFill>
@@ -6726,12 +7745,12 @@
               </a:rPr>
               <a:t>Smart automation</a:t>
             </a:r>
-            <a:endParaRPr b="0" lang="en-GB" sz="4000" spc="-1" strike="noStrike">
-              <a:latin typeface="Arial"/>
-            </a:endParaRPr>
-          </a:p>
-          <a:p>
-            <a:pPr lvl="2" marL="648000" indent="-216000">
+            <a:endParaRPr lang="en-GB" sz="1000" b="0" strike="noStrike" spc="-1" dirty="0">
+              <a:latin typeface="Arial"/>
+            </a:endParaRPr>
+          </a:p>
+          <a:p>
+            <a:pPr marL="648000" lvl="2" indent="-216000">
               <a:lnSpc>
                 <a:spcPct val="100000"/>
               </a:lnSpc>
@@ -6749,7 +7768,7 @@
               <a:buChar char=""/>
             </a:pPr>
             <a:r>
-              <a:rPr b="0" lang="en-GB" sz="2600" spc="-1" strike="noStrike">
+              <a:rPr lang="en-GB" sz="1000" b="0" strike="noStrike" spc="-1" dirty="0">
                 <a:solidFill>
                   <a:srgbClr val="000000"/>
                 </a:solidFill>
@@ -6758,12 +7777,12 @@
               </a:rPr>
               <a:t>An executable runtime having the ability to remember changes in system variables differentiating in time can be tailored to perform complex tasks. Coupled to a feedback mechanism, it will discover the operational equilibrium of any system it is tasked within.</a:t>
             </a:r>
-            <a:endParaRPr b="0" lang="en-GB" sz="2600" spc="-1" strike="noStrike">
-              <a:latin typeface="Arial"/>
-            </a:endParaRPr>
-          </a:p>
-          <a:p>
-            <a:pPr lvl="2" marL="648000" indent="-216000">
+            <a:endParaRPr lang="en-GB" sz="1000" b="0" strike="noStrike" spc="-1" dirty="0">
+              <a:latin typeface="Arial"/>
+            </a:endParaRPr>
+          </a:p>
+          <a:p>
+            <a:pPr marL="648000" lvl="2" indent="-216000">
               <a:lnSpc>
                 <a:spcPct val="100000"/>
               </a:lnSpc>
@@ -6781,21 +7800,41 @@
               <a:buChar char=""/>
             </a:pPr>
             <a:r>
-              <a:rPr b="0" lang="en-GB" sz="2600" spc="-1" strike="noStrike">
+              <a:rPr lang="en-GB" sz="1000" b="0" strike="noStrike" spc="-1" dirty="0">
                 <a:solidFill>
                   <a:srgbClr val="000000"/>
                 </a:solidFill>
                 <a:latin typeface="Arial"/>
                 <a:ea typeface="DejaVu Sans"/>
               </a:rPr>
-              <a:t>If a program can reliably analyze patterns of time-series events over a window of data by paying attention to the causal patterns that are chosen for it to observe and with access to requisite remedies, it will apply its analysis of the best performance metric to the system it is tasked within.</a:t>
+              <a:t>If a program can reliably </a:t>
             </a:r>
-            <a:endParaRPr b="0" lang="en-GB" sz="2600" spc="-1" strike="noStrike">
-              <a:latin typeface="Arial"/>
-            </a:endParaRPr>
-          </a:p>
-          <a:p>
-            <a:pPr lvl="2" marL="648000" indent="-216000">
+            <a:r>
+              <a:rPr lang="en-GB" sz="1000" b="0" strike="noStrike" spc="-1" dirty="0" err="1">
+                <a:solidFill>
+                  <a:srgbClr val="000000"/>
+                </a:solidFill>
+                <a:latin typeface="Arial"/>
+                <a:ea typeface="DejaVu Sans"/>
+              </a:rPr>
+              <a:t>analyze</a:t>
+            </a:r>
+            <a:r>
+              <a:rPr lang="en-GB" sz="1000" b="0" strike="noStrike" spc="-1" dirty="0">
+                <a:solidFill>
+                  <a:srgbClr val="000000"/>
+                </a:solidFill>
+                <a:latin typeface="Arial"/>
+                <a:ea typeface="DejaVu Sans"/>
+              </a:rPr>
+              <a:t> patterns of time-series events over a window of data by paying attention to the causal patterns that are chosen for it to observe and with access to requisite remedies, it will apply its analysis of the best performance metric to the system it is tasked within.</a:t>
+            </a:r>
+            <a:endParaRPr lang="en-GB" sz="1000" b="0" strike="noStrike" spc="-1" dirty="0">
+              <a:latin typeface="Arial"/>
+            </a:endParaRPr>
+          </a:p>
+          <a:p>
+            <a:pPr marL="648000" lvl="2" indent="-216000">
               <a:lnSpc>
                 <a:spcPct val="100000"/>
               </a:lnSpc>
@@ -6813,7 +7852,7 @@
               <a:buChar char=""/>
             </a:pPr>
             <a:r>
-              <a:rPr b="0" lang="en-GB" sz="2600" spc="-1" strike="noStrike">
+              <a:rPr lang="en-GB" sz="1000" b="0" strike="noStrike" spc="-1" dirty="0">
                 <a:solidFill>
                   <a:srgbClr val="000000"/>
                 </a:solidFill>
@@ -6822,12 +7861,12 @@
               </a:rPr>
               <a:t>If a modal is trained to understand the relationship between causal events over a length of temporal data and the consequences of actions taken by the program, it can supervise it by tuning its neural network toward achieving systematic equilibrium.</a:t>
             </a:r>
-            <a:endParaRPr b="0" lang="en-GB" sz="2600" spc="-1" strike="noStrike">
-              <a:latin typeface="Arial"/>
-            </a:endParaRPr>
-          </a:p>
-          <a:p>
-            <a:pPr lvl="2" marL="648000" indent="-216000">
+            <a:endParaRPr lang="en-GB" sz="1000" b="0" strike="noStrike" spc="-1" dirty="0">
+              <a:latin typeface="Arial"/>
+            </a:endParaRPr>
+          </a:p>
+          <a:p>
+            <a:pPr marL="648000" lvl="2" indent="-216000">
               <a:lnSpc>
                 <a:spcPct val="100000"/>
               </a:lnSpc>
@@ -6845,7 +7884,7 @@
               <a:buChar char=""/>
             </a:pPr>
             <a:r>
-              <a:rPr b="0" lang="en-GB" sz="2600" spc="-1" strike="noStrike">
+              <a:rPr lang="en-GB" sz="1000" b="0" strike="noStrike" spc="-1" dirty="0">
                 <a:solidFill>
                   <a:srgbClr val="000000"/>
                 </a:solidFill>
@@ -6855,7 +7894,7 @@
               <a:t>A focus on metrics and balanced behaviour in the cluster by applying an attention-focused machine-learning program that generates code and publishes (Helm charts) to OpenShift</a:t>
             </a:r>
             <a:r>
-              <a:rPr b="0" lang="en-GB" sz="2600" spc="-1" strike="noStrike">
+              <a:rPr lang="en-GB" sz="1000" b="0" strike="noStrike" spc="-1" dirty="0">
                 <a:solidFill>
                   <a:srgbClr val="000000"/>
                 </a:solidFill>
@@ -6864,7 +7903,7 @@
               </a:rPr>
               <a:t>.</a:t>
             </a:r>
-            <a:endParaRPr b="0" lang="en-GB" sz="2600" spc="-1" strike="noStrike">
+            <a:endParaRPr lang="en-GB" sz="1000" b="0" strike="noStrike" spc="-1" dirty="0">
               <a:latin typeface="Arial"/>
             </a:endParaRPr>
           </a:p>
@@ -6877,14 +7916,14 @@
                 <a:spcPts val="1199"/>
               </a:spcBef>
               <a:buClr>
-                <a:srgbClr val="00689a"/>
+                <a:srgbClr val="00689A"/>
               </a:buClr>
               <a:buSzPct val="80000"/>
               <a:buFont typeface="Verdana"/>
               <a:buChar char="›"/>
             </a:pPr>
             <a:r>
-              <a:rPr b="0" lang="en-GB" sz="3600" spc="-1" strike="noStrike">
+              <a:rPr lang="en-GB" sz="1000" b="0" strike="noStrike" spc="-1" dirty="0">
                 <a:solidFill>
                   <a:srgbClr val="000000"/>
                 </a:solidFill>
@@ -6893,12 +7932,12 @@
               </a:rPr>
               <a:t>Relevant points and features</a:t>
             </a:r>
-            <a:endParaRPr b="0" lang="en-GB" sz="3600" spc="-1" strike="noStrike">
-              <a:latin typeface="Arial"/>
-            </a:endParaRPr>
-          </a:p>
-          <a:p>
-            <a:pPr lvl="1" marL="774000" indent="-316440">
+            <a:endParaRPr lang="en-GB" sz="1000" b="0" strike="noStrike" spc="-1" dirty="0">
+              <a:latin typeface="Arial"/>
+            </a:endParaRPr>
+          </a:p>
+          <a:p>
+            <a:pPr marL="774000" lvl="1" indent="-316440">
               <a:lnSpc>
                 <a:spcPct val="90000"/>
               </a:lnSpc>
@@ -6906,14 +7945,14 @@
                 <a:spcPts val="1199"/>
               </a:spcBef>
               <a:buClr>
-                <a:srgbClr val="00689a"/>
+                <a:srgbClr val="00689A"/>
               </a:buClr>
               <a:buSzPct val="80000"/>
               <a:buFont typeface="Verdana"/>
               <a:buChar char="›"/>
             </a:pPr>
             <a:r>
-              <a:rPr b="0" lang="en-GB" sz="2800" spc="-1" strike="noStrike">
+              <a:rPr lang="en-GB" sz="1000" b="0" strike="noStrike" spc="-1" dirty="0">
                 <a:solidFill>
                   <a:srgbClr val="000000"/>
                 </a:solidFill>
@@ -6922,12 +7961,12 @@
               </a:rPr>
               <a:t>What are the metrics the team is most concerned about keeping in check?</a:t>
             </a:r>
-            <a:endParaRPr b="0" lang="en-GB" sz="2800" spc="-1" strike="noStrike">
-              <a:latin typeface="Arial"/>
-            </a:endParaRPr>
-          </a:p>
-          <a:p>
-            <a:pPr lvl="1" marL="774000" indent="-316440">
+            <a:endParaRPr lang="en-GB" sz="1000" b="0" strike="noStrike" spc="-1" dirty="0">
+              <a:latin typeface="Arial"/>
+            </a:endParaRPr>
+          </a:p>
+          <a:p>
+            <a:pPr marL="774000" lvl="1" indent="-316440">
               <a:lnSpc>
                 <a:spcPct val="90000"/>
               </a:lnSpc>
@@ -6935,14 +7974,14 @@
                 <a:spcPts val="1199"/>
               </a:spcBef>
               <a:buClr>
-                <a:srgbClr val="00689a"/>
+                <a:srgbClr val="00689A"/>
               </a:buClr>
               <a:buSzPct val="80000"/>
               <a:buFont typeface="Verdana"/>
               <a:buChar char="›"/>
             </a:pPr>
             <a:r>
-              <a:rPr b="0" lang="en-GB" sz="2800" spc="-1" strike="noStrike">
+              <a:rPr lang="en-GB" sz="1000" b="0" strike="noStrike" spc="-1" dirty="0">
                 <a:solidFill>
                   <a:srgbClr val="000000"/>
                 </a:solidFill>
@@ -6951,12 +7990,12 @@
               </a:rPr>
               <a:t>Can we state we know what is the ideal metric for a given resource?</a:t>
             </a:r>
-            <a:endParaRPr b="0" lang="en-GB" sz="2800" spc="-1" strike="noStrike">
-              <a:latin typeface="Arial"/>
-            </a:endParaRPr>
-          </a:p>
-          <a:p>
-            <a:pPr lvl="1" marL="774000" indent="-316440">
+            <a:endParaRPr lang="en-GB" sz="1000" b="0" strike="noStrike" spc="-1" dirty="0">
+              <a:latin typeface="Arial"/>
+            </a:endParaRPr>
+          </a:p>
+          <a:p>
+            <a:pPr marL="774000" lvl="1" indent="-316440">
               <a:lnSpc>
                 <a:spcPct val="90000"/>
               </a:lnSpc>
@@ -6964,14 +8003,14 @@
                 <a:spcPts val="1199"/>
               </a:spcBef>
               <a:buClr>
-                <a:srgbClr val="00689a"/>
+                <a:srgbClr val="00689A"/>
               </a:buClr>
               <a:buSzPct val="80000"/>
               <a:buFont typeface="Verdana"/>
               <a:buChar char="›"/>
             </a:pPr>
             <a:r>
-              <a:rPr b="0" lang="en-GB" sz="2800" spc="-1" strike="noStrike">
+              <a:rPr lang="en-GB" sz="1000" b="0" strike="noStrike" spc="-1" dirty="0">
                 <a:solidFill>
                   <a:srgbClr val="000000"/>
                 </a:solidFill>
@@ -6980,12 +8019,12 @@
               </a:rPr>
               <a:t>Can we accept a solution that is arrived-at by computation?</a:t>
             </a:r>
-            <a:endParaRPr b="0" lang="en-GB" sz="2800" spc="-1" strike="noStrike">
-              <a:latin typeface="Arial"/>
-            </a:endParaRPr>
-          </a:p>
-          <a:p>
-            <a:pPr lvl="1" marL="774000" indent="-316440">
+            <a:endParaRPr lang="en-GB" sz="1000" b="0" strike="noStrike" spc="-1" dirty="0">
+              <a:latin typeface="Arial"/>
+            </a:endParaRPr>
+          </a:p>
+          <a:p>
+            <a:pPr marL="774000" lvl="1" indent="-316440">
               <a:lnSpc>
                 <a:spcPct val="90000"/>
               </a:lnSpc>
@@ -6993,14 +8032,14 @@
                 <a:spcPts val="1199"/>
               </a:spcBef>
               <a:buClr>
-                <a:srgbClr val="00689a"/>
+                <a:srgbClr val="00689A"/>
               </a:buClr>
               <a:buSzPct val="80000"/>
               <a:buFont typeface="Verdana"/>
               <a:buChar char="›"/>
             </a:pPr>
             <a:r>
-              <a:rPr b="0" lang="en-GB" sz="2800" spc="-1" strike="noStrike">
+              <a:rPr lang="en-GB" sz="1000" b="0" strike="noStrike" spc="-1" dirty="0">
                 <a:solidFill>
                   <a:srgbClr val="000000"/>
                 </a:solidFill>
@@ -7009,12 +8048,12 @@
               </a:rPr>
               <a:t>Training is performed as a build step.</a:t>
             </a:r>
-            <a:endParaRPr b="0" lang="en-GB" sz="2800" spc="-1" strike="noStrike">
-              <a:latin typeface="Arial"/>
-            </a:endParaRPr>
-          </a:p>
-          <a:p>
-            <a:pPr lvl="1" marL="774000" indent="-316440">
+            <a:endParaRPr lang="en-GB" sz="1000" b="0" strike="noStrike" spc="-1" dirty="0">
+              <a:latin typeface="Arial"/>
+            </a:endParaRPr>
+          </a:p>
+          <a:p>
+            <a:pPr marL="774000" lvl="1" indent="-316440">
               <a:lnSpc>
                 <a:spcPct val="90000"/>
               </a:lnSpc>
@@ -7022,14 +8061,14 @@
                 <a:spcPts val="1199"/>
               </a:spcBef>
               <a:buClr>
-                <a:srgbClr val="00689a"/>
+                <a:srgbClr val="00689A"/>
               </a:buClr>
               <a:buSzPct val="80000"/>
               <a:buFont typeface="Verdana"/>
               <a:buChar char="›"/>
             </a:pPr>
             <a:r>
-              <a:rPr b="0" lang="en-GB" sz="2800" spc="-1" strike="noStrike">
+              <a:rPr lang="en-GB" sz="1000" b="0" strike="noStrike" spc="-1" dirty="0">
                 <a:solidFill>
                   <a:srgbClr val="000000"/>
                 </a:solidFill>
@@ -7038,12 +8077,12 @@
               </a:rPr>
               <a:t>Output charts can be tested before they are deployed.</a:t>
             </a:r>
-            <a:endParaRPr b="0" lang="en-GB" sz="2800" spc="-1" strike="noStrike">
-              <a:latin typeface="Arial"/>
-            </a:endParaRPr>
-          </a:p>
-          <a:p>
-            <a:pPr lvl="1" marL="774000" indent="-316440">
+            <a:endParaRPr lang="en-GB" sz="1000" b="0" strike="noStrike" spc="-1" dirty="0">
+              <a:latin typeface="Arial"/>
+            </a:endParaRPr>
+          </a:p>
+          <a:p>
+            <a:pPr marL="774000" lvl="1" indent="-316440">
               <a:lnSpc>
                 <a:spcPct val="90000"/>
               </a:lnSpc>
@@ -7051,14 +8090,14 @@
                 <a:spcPts val="1199"/>
               </a:spcBef>
               <a:buClr>
-                <a:srgbClr val="00689a"/>
+                <a:srgbClr val="00689A"/>
               </a:buClr>
               <a:buSzPct val="80000"/>
               <a:buFont typeface="Verdana"/>
               <a:buChar char="›"/>
             </a:pPr>
             <a:r>
-              <a:rPr b="0" lang="en-GB" sz="2800" spc="-1" strike="noStrike">
+              <a:rPr lang="en-GB" sz="1000" b="0" strike="noStrike" spc="-1" dirty="0">
                 <a:solidFill>
                   <a:srgbClr val="000000"/>
                 </a:solidFill>
@@ -7067,12 +8106,12 @@
               </a:rPr>
               <a:t>Output charts can be interrupted (reviewed) as a part of the testing (confidence-building) step.</a:t>
             </a:r>
-            <a:endParaRPr b="0" lang="en-GB" sz="2800" spc="-1" strike="noStrike">
-              <a:latin typeface="Arial"/>
-            </a:endParaRPr>
-          </a:p>
-          <a:p>
-            <a:pPr lvl="1" marL="774000" indent="-316440">
+            <a:endParaRPr lang="en-GB" sz="1000" b="0" strike="noStrike" spc="-1" dirty="0">
+              <a:latin typeface="Arial"/>
+            </a:endParaRPr>
+          </a:p>
+          <a:p>
+            <a:pPr marL="774000" lvl="1" indent="-316440">
               <a:lnSpc>
                 <a:spcPct val="90000"/>
               </a:lnSpc>
@@ -7080,14 +8119,14 @@
                 <a:spcPts val="1199"/>
               </a:spcBef>
               <a:buClr>
-                <a:srgbClr val="00689a"/>
+                <a:srgbClr val="00689A"/>
               </a:buClr>
               <a:buSzPct val="80000"/>
               <a:buFont typeface="Verdana"/>
               <a:buChar char="›"/>
             </a:pPr>
             <a:r>
-              <a:rPr b="0" lang="en-GB" sz="2800" spc="-1" strike="noStrike">
+              <a:rPr lang="en-GB" sz="1000" b="0" strike="noStrike" spc="-1" dirty="0">
                 <a:solidFill>
                   <a:srgbClr val="000000"/>
                 </a:solidFill>
@@ -7096,7 +8135,7 @@
               </a:rPr>
               <a:t>Error/failure handling: If the agent experiences errors that it cannot solve, an option is to call a human reviewer, as notifications, generally, are undesirable.</a:t>
             </a:r>
-            <a:endParaRPr b="0" lang="en-GB" sz="2800" spc="-1" strike="noStrike">
+            <a:endParaRPr lang="en-GB" sz="1000" b="0" strike="noStrike" spc="-1" dirty="0">
               <a:latin typeface="Arial"/>
             </a:endParaRPr>
           </a:p>
@@ -7110,8 +8149,8 @@
         </p:nvSpPr>
         <p:spPr>
           <a:xfrm>
-            <a:off x="635040" y="1052640"/>
-            <a:ext cx="10919880" cy="944280"/>
+            <a:off x="635040" y="938896"/>
+            <a:ext cx="10919880" cy="462034"/>
           </a:xfrm>
           <a:prstGeom prst="rect">
             <a:avLst/>
@@ -7122,15 +8161,22 @@
           </a:ln>
         </p:spPr>
         <p:style>
-          <a:lnRef idx="0"/>
-          <a:fillRef idx="0"/>
-          <a:effectRef idx="0"/>
+          <a:lnRef idx="0">
+            <a:scrgbClr r="0" g="0" b="0"/>
+          </a:lnRef>
+          <a:fillRef idx="0">
+            <a:scrgbClr r="0" g="0" b="0"/>
+          </a:fillRef>
+          <a:effectRef idx="0">
+            <a:scrgbClr r="0" g="0" b="0"/>
+          </a:effectRef>
           <a:fontRef idx="minor"/>
         </p:style>
         <p:txBody>
-          <a:bodyPr lIns="90000" rIns="90000" tIns="45000" bIns="45000" anchor="b">
+          <a:bodyPr lIns="90000" tIns="45000" rIns="90000" bIns="45000" anchor="b">
             <a:noAutofit/>
           </a:bodyPr>
+          <a:lstStyle/>
           <a:p>
             <a:pPr>
               <a:lnSpc>
@@ -7139,16 +8185,16 @@
               <a:buNone/>
             </a:pPr>
             <a:r>
-              <a:rPr b="0" lang="en-GB" sz="2000" spc="-1" strike="noStrike">
+              <a:rPr lang="en-GB" sz="2000" b="0" strike="noStrike" spc="-1" dirty="0">
                 <a:solidFill>
-                  <a:srgbClr val="00689a"/>
+                  <a:srgbClr val="00689A"/>
                 </a:solidFill>
                 <a:latin typeface="Verdana"/>
                 <a:ea typeface="DejaVu Sans"/>
               </a:rPr>
               <a:t>A new vision: Epic CD-3324</a:t>
             </a:r>
-            <a:endParaRPr b="0" lang="en-GB" sz="2000" spc="-1" strike="noStrike">
+            <a:endParaRPr lang="en-GB" sz="2000" b="0" strike="noStrike" spc="-1" dirty="0">
               <a:latin typeface="Arial"/>
             </a:endParaRPr>
           </a:p>
@@ -7174,15 +8220,22 @@
           </a:ln>
         </p:spPr>
         <p:style>
-          <a:lnRef idx="0"/>
-          <a:fillRef idx="0"/>
-          <a:effectRef idx="0"/>
+          <a:lnRef idx="0">
+            <a:scrgbClr r="0" g="0" b="0"/>
+          </a:lnRef>
+          <a:fillRef idx="0">
+            <a:scrgbClr r="0" g="0" b="0"/>
+          </a:fillRef>
+          <a:effectRef idx="0">
+            <a:scrgbClr r="0" g="0" b="0"/>
+          </a:effectRef>
           <a:fontRef idx="minor"/>
         </p:style>
         <p:txBody>
-          <a:bodyPr lIns="90000" rIns="0" tIns="45000" bIns="45000" anchor="b">
+          <a:bodyPr lIns="90000" tIns="45000" rIns="0" bIns="45000" anchor="b">
             <a:noAutofit/>
           </a:bodyPr>
+          <a:lstStyle/>
           <a:p>
             <a:pPr algn="r">
               <a:lnSpc>
@@ -7191,16 +8244,16 @@
               <a:buNone/>
             </a:pPr>
             <a:fld id="{13BEA54D-B57A-4B22-9071-1E3693025052}" type="slidenum">
-              <a:rPr b="0" lang="en-GB" sz="1050" spc="-1" strike="noStrike">
+              <a:rPr lang="en-GB" sz="1050" b="0" strike="noStrike" spc="-1">
                 <a:solidFill>
-                  <a:srgbClr val="a6a6a6"/>
+                  <a:srgbClr val="A6A6A6"/>
                 </a:solidFill>
                 <a:latin typeface="Verdana"/>
                 <a:ea typeface="DejaVu Sans"/>
               </a:rPr>
-              <a:t>&lt;number&gt;</a:t>
+              <a:t>6</a:t>
             </a:fld>
-            <a:endParaRPr b="0" lang="en-GB" sz="1050" spc="-1" strike="noStrike">
+            <a:endParaRPr lang="en-GB" sz="1050" b="0" strike="noStrike" spc="-1">
               <a:latin typeface="Arial"/>
             </a:endParaRPr>
           </a:p>
@@ -7208,19 +8261,14 @@
       </p:sp>
     </p:spTree>
   </p:cSld>
-  <mc:AlternateContent>
-    <mc:Choice Requires="p14">
-      <p:transition spd="slow" p14:dur="2000"/>
-    </mc:Choice>
-    <mc:Fallback>
-      <p:transition spd="slow"/>
-    </mc:Fallback>
-  </mc:AlternateContent>
+  <p:clrMapOvr>
+    <a:masterClrMapping/>
+  </p:clrMapOvr>
 </p:sld>
 </file>
 
 <file path=ppt/slides/slide7.xml><?xml version="1.0" encoding="utf-8"?>
-<p:sld xmlns:a="http://schemas.openxmlformats.org/drawingml/2006/main" xmlns:p="http://schemas.openxmlformats.org/presentationml/2006/main" xmlns:r="http://schemas.openxmlformats.org/officeDocument/2006/relationships" xmlns:p14="http://schemas.microsoft.com/office/powerpoint/2010/main" xmlns:p15="http://schemas.microsoft.com/office/powerpoint/2012/main" xmlns:mc="http://schemas.openxmlformats.org/markup-compatibility/2006">
+<p:sld xmlns:a="http://schemas.openxmlformats.org/drawingml/2006/main" xmlns:r="http://schemas.openxmlformats.org/officeDocument/2006/relationships" xmlns:p="http://schemas.openxmlformats.org/presentationml/2006/main">
   <p:cSld>
     <p:spTree>
       <p:nvGrpSpPr>
@@ -7256,15 +8304,22 @@
           </a:ln>
         </p:spPr>
         <p:style>
-          <a:lnRef idx="0"/>
-          <a:fillRef idx="0"/>
-          <a:effectRef idx="0"/>
+          <a:lnRef idx="0">
+            <a:scrgbClr r="0" g="0" b="0"/>
+          </a:lnRef>
+          <a:fillRef idx="0">
+            <a:scrgbClr r="0" g="0" b="0"/>
+          </a:fillRef>
+          <a:effectRef idx="0">
+            <a:scrgbClr r="0" g="0" b="0"/>
+          </a:effectRef>
           <a:fontRef idx="minor"/>
         </p:style>
         <p:txBody>
-          <a:bodyPr lIns="90000" rIns="90000" tIns="45000" bIns="45000" anchor="t">
+          <a:bodyPr lIns="90000" tIns="45000" rIns="90000" bIns="45000" anchor="t">
             <a:normAutofit/>
           </a:bodyPr>
+          <a:lstStyle/>
           <a:p>
             <a:pPr marL="316800" indent="-316440">
               <a:lnSpc>
@@ -7274,14 +8329,14 @@
                 <a:spcPts val="1199"/>
               </a:spcBef>
               <a:buClr>
-                <a:srgbClr val="00689a"/>
+                <a:srgbClr val="00689A"/>
               </a:buClr>
               <a:buSzPct val="80000"/>
               <a:buFont typeface="Verdana"/>
               <a:buChar char="›"/>
             </a:pPr>
             <a:r>
-              <a:rPr b="0" lang="en-GB" sz="2200" spc="-1" strike="noStrike">
+              <a:rPr lang="en-GB" sz="2200" b="0" strike="noStrike" spc="-1">
                 <a:solidFill>
                   <a:srgbClr val="000000"/>
                 </a:solidFill>
@@ -7290,12 +8345,12 @@
               </a:rPr>
               <a:t>Too often these methods are not done well</a:t>
             </a:r>
-            <a:endParaRPr b="0" lang="en-GB" sz="2200" spc="-1" strike="noStrike">
-              <a:latin typeface="Arial"/>
-            </a:endParaRPr>
-          </a:p>
-          <a:p>
-            <a:pPr lvl="1" marL="774000" indent="-316440">
+            <a:endParaRPr lang="en-GB" sz="2200" b="0" strike="noStrike" spc="-1">
+              <a:latin typeface="Arial"/>
+            </a:endParaRPr>
+          </a:p>
+          <a:p>
+            <a:pPr marL="774000" lvl="1" indent="-316440">
               <a:lnSpc>
                 <a:spcPct val="90000"/>
               </a:lnSpc>
@@ -7303,14 +8358,14 @@
                 <a:spcPts val="1199"/>
               </a:spcBef>
               <a:buClr>
-                <a:srgbClr val="00689a"/>
+                <a:srgbClr val="00689A"/>
               </a:buClr>
               <a:buSzPct val="80000"/>
               <a:buFont typeface="Verdana"/>
               <a:buChar char="›"/>
             </a:pPr>
             <a:r>
-              <a:rPr b="0" lang="en-GB" sz="1600" spc="-1" strike="noStrike">
+              <a:rPr lang="en-GB" sz="1600" b="0" strike="noStrike" spc="-1">
                 <a:solidFill>
                   <a:srgbClr val="000000"/>
                 </a:solidFill>
@@ -7319,12 +8374,12 @@
               </a:rPr>
               <a:t>One design to suit many kinds of purposes</a:t>
             </a:r>
-            <a:endParaRPr b="0" lang="en-GB" sz="1600" spc="-1" strike="noStrike">
-              <a:latin typeface="Arial"/>
-            </a:endParaRPr>
-          </a:p>
-          <a:p>
-            <a:pPr lvl="1" marL="774000" indent="-316440">
+            <a:endParaRPr lang="en-GB" sz="1600" b="0" strike="noStrike" spc="-1">
+              <a:latin typeface="Arial"/>
+            </a:endParaRPr>
+          </a:p>
+          <a:p>
+            <a:pPr marL="774000" lvl="1" indent="-316440">
               <a:lnSpc>
                 <a:spcPct val="90000"/>
               </a:lnSpc>
@@ -7332,14 +8387,14 @@
                 <a:spcPts val="1199"/>
               </a:spcBef>
               <a:buClr>
-                <a:srgbClr val="00689a"/>
+                <a:srgbClr val="00689A"/>
               </a:buClr>
               <a:buSzPct val="80000"/>
               <a:buFont typeface="Verdana"/>
               <a:buChar char="›"/>
             </a:pPr>
             <a:r>
-              <a:rPr b="0" lang="en-GB" sz="1600" spc="-1" strike="noStrike">
+              <a:rPr lang="en-GB" sz="1600" b="0" strike="noStrike" spc="-1">
                 <a:solidFill>
                   <a:srgbClr val="000000"/>
                 </a:solidFill>
@@ -7348,12 +8403,12 @@
               </a:rPr>
               <a:t>Division in machine-learning elements: Separation is key</a:t>
             </a:r>
-            <a:endParaRPr b="0" lang="en-GB" sz="1600" spc="-1" strike="noStrike">
-              <a:latin typeface="Arial"/>
-            </a:endParaRPr>
-          </a:p>
-          <a:p>
-            <a:pPr lvl="1" marL="774000" indent="-316440">
+            <a:endParaRPr lang="en-GB" sz="1600" b="0" strike="noStrike" spc="-1">
+              <a:latin typeface="Arial"/>
+            </a:endParaRPr>
+          </a:p>
+          <a:p>
+            <a:pPr marL="774000" lvl="1" indent="-316440">
               <a:lnSpc>
                 <a:spcPct val="90000"/>
               </a:lnSpc>
@@ -7361,14 +8416,14 @@
                 <a:spcPts val="1199"/>
               </a:spcBef>
               <a:buClr>
-                <a:srgbClr val="00689a"/>
+                <a:srgbClr val="00689A"/>
               </a:buClr>
               <a:buSzPct val="80000"/>
               <a:buFont typeface="Verdana"/>
               <a:buChar char="›"/>
             </a:pPr>
             <a:r>
-              <a:rPr b="0" lang="en-GB" sz="1600" spc="-1" strike="noStrike">
+              <a:rPr lang="en-GB" sz="1600" b="0" strike="noStrike" spc="-1">
                 <a:solidFill>
                   <a:srgbClr val="000000"/>
                 </a:solidFill>
@@ -7377,7 +8432,7 @@
               </a:rPr>
               <a:t>Follow where the predictive mathematical solutions lead</a:t>
             </a:r>
-            <a:endParaRPr b="0" lang="en-GB" sz="1600" spc="-1" strike="noStrike">
+            <a:endParaRPr lang="en-GB" sz="1600" b="0" strike="noStrike" spc="-1">
               <a:latin typeface="Arial"/>
             </a:endParaRPr>
           </a:p>
@@ -7390,14 +8445,14 @@
                 <a:spcPts val="1199"/>
               </a:spcBef>
               <a:buClr>
-                <a:srgbClr val="00689a"/>
+                <a:srgbClr val="00689A"/>
               </a:buClr>
               <a:buSzPct val="80000"/>
               <a:buFont typeface="Verdana"/>
               <a:buChar char="›"/>
             </a:pPr>
             <a:r>
-              <a:rPr b="0" lang="en-GB" sz="2200" spc="-1" strike="noStrike">
+              <a:rPr lang="en-GB" sz="2200" b="0" strike="noStrike" spc="-1">
                 <a:solidFill>
                   <a:srgbClr val="000000"/>
                 </a:solidFill>
@@ -7406,12 +8461,12 @@
               </a:rPr>
               <a:t>Collaborate</a:t>
             </a:r>
-            <a:endParaRPr b="0" lang="en-GB" sz="2200" spc="-1" strike="noStrike">
-              <a:latin typeface="Arial"/>
-            </a:endParaRPr>
-          </a:p>
-          <a:p>
-            <a:pPr lvl="1" marL="774000" indent="-316440">
+            <a:endParaRPr lang="en-GB" sz="2200" b="0" strike="noStrike" spc="-1">
+              <a:latin typeface="Arial"/>
+            </a:endParaRPr>
+          </a:p>
+          <a:p>
+            <a:pPr marL="774000" lvl="1" indent="-316440">
               <a:lnSpc>
                 <a:spcPct val="90000"/>
               </a:lnSpc>
@@ -7419,14 +8474,14 @@
                 <a:spcPts val="1199"/>
               </a:spcBef>
               <a:buClr>
-                <a:srgbClr val="00689a"/>
+                <a:srgbClr val="00689A"/>
               </a:buClr>
               <a:buSzPct val="80000"/>
               <a:buFont typeface="Verdana"/>
               <a:buChar char="›"/>
             </a:pPr>
             <a:r>
-              <a:rPr b="0" lang="en-GB" sz="1600" spc="-1" strike="noStrike">
+              <a:rPr lang="en-GB" sz="1600" b="0" strike="noStrike" spc="-1">
                 <a:solidFill>
                   <a:srgbClr val="000000"/>
                 </a:solidFill>
@@ -7435,12 +8490,12 @@
               </a:rPr>
               <a:t>Don’t get intimidated by the complexity – an unavoidable feature</a:t>
             </a:r>
-            <a:endParaRPr b="0" lang="en-GB" sz="1600" spc="-1" strike="noStrike">
-              <a:latin typeface="Arial"/>
-            </a:endParaRPr>
-          </a:p>
-          <a:p>
-            <a:pPr lvl="1" marL="774000" indent="-316440">
+            <a:endParaRPr lang="en-GB" sz="1600" b="0" strike="noStrike" spc="-1">
+              <a:latin typeface="Arial"/>
+            </a:endParaRPr>
+          </a:p>
+          <a:p>
+            <a:pPr marL="774000" lvl="1" indent="-316440">
               <a:lnSpc>
                 <a:spcPct val="90000"/>
               </a:lnSpc>
@@ -7448,14 +8503,14 @@
                 <a:spcPts val="1199"/>
               </a:spcBef>
               <a:buClr>
-                <a:srgbClr val="00689a"/>
+                <a:srgbClr val="00689A"/>
               </a:buClr>
               <a:buSzPct val="80000"/>
               <a:buFont typeface="Verdana"/>
               <a:buChar char="›"/>
             </a:pPr>
             <a:r>
-              <a:rPr b="0" lang="en-GB" sz="1600" spc="-1" strike="noStrike">
+              <a:rPr lang="en-GB" sz="1600" b="0" strike="noStrike" spc="-1">
                 <a:solidFill>
                   <a:srgbClr val="000000"/>
                 </a:solidFill>
@@ -7464,12 +8519,12 @@
               </a:rPr>
               <a:t>Establish fitness and create trust</a:t>
             </a:r>
-            <a:endParaRPr b="0" lang="en-GB" sz="1600" spc="-1" strike="noStrike">
-              <a:latin typeface="Arial"/>
-            </a:endParaRPr>
-          </a:p>
-          <a:p>
-            <a:pPr lvl="1" marL="774000" indent="-316440">
+            <a:endParaRPr lang="en-GB" sz="1600" b="0" strike="noStrike" spc="-1">
+              <a:latin typeface="Arial"/>
+            </a:endParaRPr>
+          </a:p>
+          <a:p>
+            <a:pPr marL="774000" lvl="1" indent="-316440">
               <a:lnSpc>
                 <a:spcPct val="90000"/>
               </a:lnSpc>
@@ -7477,14 +8532,14 @@
                 <a:spcPts val="1199"/>
               </a:spcBef>
               <a:buClr>
-                <a:srgbClr val="00689a"/>
+                <a:srgbClr val="00689A"/>
               </a:buClr>
               <a:buSzPct val="80000"/>
               <a:buFont typeface="Verdana"/>
               <a:buChar char="›"/>
             </a:pPr>
             <a:r>
-              <a:rPr b="0" lang="en-GB" sz="1600" spc="-1" strike="noStrike">
+              <a:rPr lang="en-GB" sz="1600" b="0" strike="noStrike" spc="-1">
                 <a:solidFill>
                   <a:srgbClr val="000000"/>
                 </a:solidFill>
@@ -7493,12 +8548,12 @@
               </a:rPr>
               <a:t>Keep supervision tasks until (the feeling is) it is ready</a:t>
             </a:r>
-            <a:endParaRPr b="0" lang="en-GB" sz="1600" spc="-1" strike="noStrike">
-              <a:latin typeface="Arial"/>
-            </a:endParaRPr>
-          </a:p>
-          <a:p>
-            <a:pPr lvl="1" marL="774000" indent="-316440">
+            <a:endParaRPr lang="en-GB" sz="1600" b="0" strike="noStrike" spc="-1">
+              <a:latin typeface="Arial"/>
+            </a:endParaRPr>
+          </a:p>
+          <a:p>
+            <a:pPr marL="774000" lvl="1" indent="-316440">
               <a:lnSpc>
                 <a:spcPct val="90000"/>
               </a:lnSpc>
@@ -7506,14 +8561,14 @@
                 <a:spcPts val="1199"/>
               </a:spcBef>
               <a:buClr>
-                <a:srgbClr val="00689a"/>
+                <a:srgbClr val="00689A"/>
               </a:buClr>
               <a:buSzPct val="80000"/>
               <a:buFont typeface="Verdana"/>
               <a:buChar char="›"/>
             </a:pPr>
             <a:r>
-              <a:rPr b="0" lang="en-GB" sz="1600" spc="-1" strike="noStrike">
+              <a:rPr lang="en-GB" sz="1600" b="0" strike="noStrike" spc="-1">
                 <a:solidFill>
                   <a:srgbClr val="000000"/>
                 </a:solidFill>
@@ -7523,7 +8578,7 @@
               <a:t>Remember: Despite the flowery language...it is (piecewise) linear algebra...well...except for curved solutions...</a:t>
             </a:r>
             <a:r>
-              <a:rPr b="0" lang="en-GB" sz="1900" spc="-1" strike="noStrike">
+              <a:rPr lang="en-GB" sz="1900" b="0" strike="noStrike" spc="-1">
                 <a:solidFill>
                   <a:srgbClr val="000000"/>
                 </a:solidFill>
@@ -7532,7 +8587,7 @@
               </a:rPr>
               <a:t> </a:t>
             </a:r>
-            <a:endParaRPr b="0" lang="en-GB" sz="1900" spc="-1" strike="noStrike">
+            <a:endParaRPr lang="en-GB" sz="1900" b="0" strike="noStrike" spc="-1">
               <a:latin typeface="Arial"/>
             </a:endParaRPr>
           </a:p>
@@ -7546,7 +8601,7 @@
               </a:spcBef>
               <a:buNone/>
             </a:pPr>
-            <a:endParaRPr b="0" lang="en-GB" sz="1900" spc="-1" strike="noStrike">
+            <a:endParaRPr lang="en-GB" sz="1900" b="0" strike="noStrike" spc="-1">
               <a:latin typeface="Arial"/>
             </a:endParaRPr>
           </a:p>
@@ -7572,15 +8627,22 @@
           </a:ln>
         </p:spPr>
         <p:style>
-          <a:lnRef idx="0"/>
-          <a:fillRef idx="0"/>
-          <a:effectRef idx="0"/>
+          <a:lnRef idx="0">
+            <a:scrgbClr r="0" g="0" b="0"/>
+          </a:lnRef>
+          <a:fillRef idx="0">
+            <a:scrgbClr r="0" g="0" b="0"/>
+          </a:fillRef>
+          <a:effectRef idx="0">
+            <a:scrgbClr r="0" g="0" b="0"/>
+          </a:effectRef>
           <a:fontRef idx="minor"/>
         </p:style>
         <p:txBody>
-          <a:bodyPr lIns="90000" rIns="90000" tIns="45000" bIns="45000" anchor="b">
+          <a:bodyPr lIns="90000" tIns="45000" rIns="90000" bIns="45000" anchor="b">
             <a:noAutofit/>
           </a:bodyPr>
+          <a:lstStyle/>
           <a:p>
             <a:pPr>
               <a:lnSpc>
@@ -7589,16 +8651,16 @@
               <a:buNone/>
             </a:pPr>
             <a:r>
-              <a:rPr b="0" lang="en-GB" sz="2000" spc="-1" strike="noStrike">
+              <a:rPr lang="en-GB" sz="2000" b="0" strike="noStrike" spc="-1">
                 <a:solidFill>
-                  <a:srgbClr val="00689a"/>
+                  <a:srgbClr val="00689A"/>
                 </a:solidFill>
                 <a:latin typeface="Verdana"/>
                 <a:ea typeface="DejaVu Sans"/>
               </a:rPr>
               <a:t>Pitfall! A crisis of reproducibility</a:t>
             </a:r>
-            <a:endParaRPr b="0" lang="en-GB" sz="2000" spc="-1" strike="noStrike">
+            <a:endParaRPr lang="en-GB" sz="2000" b="0" strike="noStrike" spc="-1">
               <a:latin typeface="Arial"/>
             </a:endParaRPr>
           </a:p>
@@ -7624,15 +8686,22 @@
           </a:ln>
         </p:spPr>
         <p:style>
-          <a:lnRef idx="0"/>
-          <a:fillRef idx="0"/>
-          <a:effectRef idx="0"/>
+          <a:lnRef idx="0">
+            <a:scrgbClr r="0" g="0" b="0"/>
+          </a:lnRef>
+          <a:fillRef idx="0">
+            <a:scrgbClr r="0" g="0" b="0"/>
+          </a:fillRef>
+          <a:effectRef idx="0">
+            <a:scrgbClr r="0" g="0" b="0"/>
+          </a:effectRef>
           <a:fontRef idx="minor"/>
         </p:style>
         <p:txBody>
-          <a:bodyPr lIns="90000" rIns="0" tIns="45000" bIns="45000" anchor="b">
+          <a:bodyPr lIns="90000" tIns="45000" rIns="0" bIns="45000" anchor="b">
             <a:noAutofit/>
           </a:bodyPr>
+          <a:lstStyle/>
           <a:p>
             <a:pPr algn="r">
               <a:lnSpc>
@@ -7641,16 +8710,16 @@
               <a:buNone/>
             </a:pPr>
             <a:fld id="{AAE17FAE-E79A-4E53-B23A-A112DEBD99C4}" type="slidenum">
-              <a:rPr b="0" lang="en-GB" sz="1050" spc="-1" strike="noStrike">
+              <a:rPr lang="en-GB" sz="1050" b="0" strike="noStrike" spc="-1">
                 <a:solidFill>
-                  <a:srgbClr val="a6a6a6"/>
+                  <a:srgbClr val="A6A6A6"/>
                 </a:solidFill>
                 <a:latin typeface="Verdana"/>
                 <a:ea typeface="DejaVu Sans"/>
               </a:rPr>
-              <a:t>&lt;number&gt;</a:t>
+              <a:t>7</a:t>
             </a:fld>
-            <a:endParaRPr b="0" lang="en-GB" sz="1050" spc="-1" strike="noStrike">
+            <a:endParaRPr lang="en-GB" sz="1050" b="0" strike="noStrike" spc="-1">
               <a:latin typeface="Arial"/>
             </a:endParaRPr>
           </a:p>
@@ -7658,19 +8727,14 @@
       </p:sp>
     </p:spTree>
   </p:cSld>
-  <mc:AlternateContent>
-    <mc:Choice Requires="p14">
-      <p:transition spd="slow" p14:dur="2000"/>
-    </mc:Choice>
-    <mc:Fallback>
-      <p:transition spd="slow"/>
-    </mc:Fallback>
-  </mc:AlternateContent>
+  <p:clrMapOvr>
+    <a:masterClrMapping/>
+  </p:clrMapOvr>
 </p:sld>
 </file>
 
 <file path=ppt/slides/slide8.xml><?xml version="1.0" encoding="utf-8"?>
-<p:sld xmlns:a="http://schemas.openxmlformats.org/drawingml/2006/main" xmlns:p="http://schemas.openxmlformats.org/presentationml/2006/main" xmlns:r="http://schemas.openxmlformats.org/officeDocument/2006/relationships" xmlns:p14="http://schemas.microsoft.com/office/powerpoint/2010/main" xmlns:p15="http://schemas.microsoft.com/office/powerpoint/2012/main" xmlns:mc="http://schemas.openxmlformats.org/markup-compatibility/2006">
+<p:sld xmlns:a="http://schemas.openxmlformats.org/drawingml/2006/main" xmlns:r="http://schemas.openxmlformats.org/officeDocument/2006/relationships" xmlns:p="http://schemas.openxmlformats.org/presentationml/2006/main">
   <p:cSld>
     <p:spTree>
       <p:nvGrpSpPr>
@@ -7706,11 +8770,24 @@
           </a:ln>
         </p:spPr>
         <p:style>
-          <a:lnRef idx="0"/>
-          <a:fillRef idx="0"/>
-          <a:effectRef idx="0"/>
+          <a:lnRef idx="0">
+            <a:scrgbClr r="0" g="0" b="0"/>
+          </a:lnRef>
+          <a:fillRef idx="0">
+            <a:scrgbClr r="0" g="0" b="0"/>
+          </a:fillRef>
+          <a:effectRef idx="0">
+            <a:scrgbClr r="0" g="0" b="0"/>
+          </a:effectRef>
           <a:fontRef idx="minor"/>
         </p:style>
+        <p:txBody>
+          <a:bodyPr/>
+          <a:lstStyle/>
+          <a:p>
+            <a:endParaRPr lang="en-GB"/>
+          </a:p>
+        </p:txBody>
       </p:sp>
       <p:sp>
         <p:nvSpPr>
@@ -7732,15 +8809,22 @@
           </a:ln>
         </p:spPr>
         <p:style>
-          <a:lnRef idx="0"/>
-          <a:fillRef idx="0"/>
-          <a:effectRef idx="0"/>
+          <a:lnRef idx="0">
+            <a:scrgbClr r="0" g="0" b="0"/>
+          </a:lnRef>
+          <a:fillRef idx="0">
+            <a:scrgbClr r="0" g="0" b="0"/>
+          </a:fillRef>
+          <a:effectRef idx="0">
+            <a:scrgbClr r="0" g="0" b="0"/>
+          </a:effectRef>
           <a:fontRef idx="minor"/>
         </p:style>
         <p:txBody>
-          <a:bodyPr lIns="90000" rIns="90000" tIns="45000" bIns="45000" anchor="b">
+          <a:bodyPr lIns="90000" tIns="45000" rIns="90000" bIns="45000" anchor="b">
             <a:noAutofit/>
           </a:bodyPr>
+          <a:lstStyle/>
           <a:p>
             <a:pPr>
               <a:lnSpc>
@@ -7749,16 +8833,16 @@
               <a:buNone/>
             </a:pPr>
             <a:r>
-              <a:rPr b="0" lang="en-GB" sz="2000" spc="-1" strike="noStrike">
+              <a:rPr lang="en-GB" sz="2000" b="0" strike="noStrike" spc="-1">
                 <a:solidFill>
-                  <a:srgbClr val="00689a"/>
+                  <a:srgbClr val="00689A"/>
                 </a:solidFill>
                 <a:latin typeface="Verdana"/>
                 <a:ea typeface="DejaVu Sans"/>
               </a:rPr>
               <a:t>Design proposal</a:t>
             </a:r>
-            <a:endParaRPr b="0" lang="en-GB" sz="2000" spc="-1" strike="noStrike">
+            <a:endParaRPr lang="en-GB" sz="2000" b="0" strike="noStrike" spc="-1">
               <a:latin typeface="Arial"/>
             </a:endParaRPr>
           </a:p>
@@ -7784,15 +8868,22 @@
           </a:ln>
         </p:spPr>
         <p:style>
-          <a:lnRef idx="0"/>
-          <a:fillRef idx="0"/>
-          <a:effectRef idx="0"/>
+          <a:lnRef idx="0">
+            <a:scrgbClr r="0" g="0" b="0"/>
+          </a:lnRef>
+          <a:fillRef idx="0">
+            <a:scrgbClr r="0" g="0" b="0"/>
+          </a:fillRef>
+          <a:effectRef idx="0">
+            <a:scrgbClr r="0" g="0" b="0"/>
+          </a:effectRef>
           <a:fontRef idx="minor"/>
         </p:style>
         <p:txBody>
-          <a:bodyPr lIns="90000" rIns="0" tIns="45000" bIns="45000" anchor="b">
+          <a:bodyPr lIns="90000" tIns="45000" rIns="0" bIns="45000" anchor="b">
             <a:noAutofit/>
           </a:bodyPr>
+          <a:lstStyle/>
           <a:p>
             <a:pPr algn="r">
               <a:lnSpc>
@@ -7801,16 +8892,16 @@
               <a:buNone/>
             </a:pPr>
             <a:fld id="{D58499F0-0DA9-4705-A4C1-FE2BB827A80D}" type="slidenum">
-              <a:rPr b="0" lang="en-GB" sz="1050" spc="-1" strike="noStrike">
+              <a:rPr lang="en-GB" sz="1050" b="0" strike="noStrike" spc="-1">
                 <a:solidFill>
-                  <a:srgbClr val="a6a6a6"/>
+                  <a:srgbClr val="A6A6A6"/>
                 </a:solidFill>
                 <a:latin typeface="Verdana"/>
                 <a:ea typeface="DejaVu Sans"/>
               </a:rPr>
-              <a:t>&lt;number&gt;</a:t>
+              <a:t>8</a:t>
             </a:fld>
-            <a:endParaRPr b="0" lang="en-GB" sz="1050" spc="-1" strike="noStrike">
+            <a:endParaRPr lang="en-GB" sz="1050" b="0" strike="noStrike" spc="-1">
               <a:latin typeface="Arial"/>
             </a:endParaRPr>
           </a:p>
@@ -7818,12 +8909,12 @@
       </p:sp>
       <p:pic>
         <p:nvPicPr>
-          <p:cNvPr id="114" name="" descr=""/>
+          <p:cNvPr id="114" name="Picture 113"/>
           <p:cNvPicPr/>
           <p:nvPr/>
         </p:nvPicPr>
         <p:blipFill>
-          <a:blip r:embed="rId1"/>
+          <a:blip r:embed="rId3"/>
           <a:stretch/>
         </p:blipFill>
         <p:spPr>
@@ -7841,19 +8932,14 @@
       </p:pic>
     </p:spTree>
   </p:cSld>
-  <mc:AlternateContent>
-    <mc:Choice Requires="p14">
-      <p:transition spd="slow" p14:dur="2000"/>
-    </mc:Choice>
-    <mc:Fallback>
-      <p:transition spd="slow"/>
-    </mc:Fallback>
-  </mc:AlternateContent>
+  <p:clrMapOvr>
+    <a:masterClrMapping/>
+  </p:clrMapOvr>
 </p:sld>
 </file>
 
 <file path=ppt/slides/slide9.xml><?xml version="1.0" encoding="utf-8"?>
-<p:sld xmlns:a="http://schemas.openxmlformats.org/drawingml/2006/main" xmlns:p="http://schemas.openxmlformats.org/presentationml/2006/main" xmlns:r="http://schemas.openxmlformats.org/officeDocument/2006/relationships" xmlns:p14="http://schemas.microsoft.com/office/powerpoint/2010/main" xmlns:p15="http://schemas.microsoft.com/office/powerpoint/2012/main" xmlns:mc="http://schemas.openxmlformats.org/markup-compatibility/2006">
+<p:sld xmlns:a="http://schemas.openxmlformats.org/drawingml/2006/main" xmlns:r="http://schemas.openxmlformats.org/officeDocument/2006/relationships" xmlns:p="http://schemas.openxmlformats.org/presentationml/2006/main">
   <p:cSld>
     <p:spTree>
       <p:nvGrpSpPr>
@@ -7889,15 +8975,22 @@
           </a:ln>
         </p:spPr>
         <p:style>
-          <a:lnRef idx="0"/>
-          <a:fillRef idx="0"/>
-          <a:effectRef idx="0"/>
+          <a:lnRef idx="0">
+            <a:scrgbClr r="0" g="0" b="0"/>
+          </a:lnRef>
+          <a:fillRef idx="0">
+            <a:scrgbClr r="0" g="0" b="0"/>
+          </a:fillRef>
+          <a:effectRef idx="0">
+            <a:scrgbClr r="0" g="0" b="0"/>
+          </a:effectRef>
           <a:fontRef idx="minor"/>
         </p:style>
         <p:txBody>
-          <a:bodyPr lIns="90000" rIns="90000" tIns="45000" bIns="45000" anchor="t">
+          <a:bodyPr lIns="90000" tIns="45000" rIns="90000" bIns="45000" anchor="t">
             <a:normAutofit/>
           </a:bodyPr>
+          <a:lstStyle/>
           <a:p>
             <a:pPr marL="316800" indent="-316440">
               <a:lnSpc>
@@ -7907,14 +9000,14 @@
                 <a:spcPts val="1199"/>
               </a:spcBef>
               <a:buClr>
-                <a:srgbClr val="00689a"/>
+                <a:srgbClr val="00689A"/>
               </a:buClr>
               <a:buSzPct val="80000"/>
               <a:buFont typeface="Verdana"/>
               <a:buChar char="›"/>
             </a:pPr>
             <a:r>
-              <a:rPr b="0" lang="en-GB" sz="2400" spc="-1" strike="noStrike">
+              <a:rPr lang="en-GB" sz="2400" b="0" strike="noStrike" spc="-1">
                 <a:solidFill>
                   <a:srgbClr val="000000"/>
                 </a:solidFill>
@@ -7923,7 +9016,7 @@
               </a:rPr>
               <a:t>Is AI trustworthy?</a:t>
             </a:r>
-            <a:endParaRPr b="0" lang="en-GB" sz="2400" spc="-1" strike="noStrike">
+            <a:endParaRPr lang="en-GB" sz="2400" b="0" strike="noStrike" spc="-1">
               <a:latin typeface="Arial"/>
             </a:endParaRPr>
           </a:p>
@@ -7936,14 +9029,14 @@
                 <a:spcPts val="1199"/>
               </a:spcBef>
               <a:buClr>
-                <a:srgbClr val="00689a"/>
+                <a:srgbClr val="00689A"/>
               </a:buClr>
               <a:buSzPct val="80000"/>
               <a:buFont typeface="Verdana"/>
               <a:buChar char="›"/>
             </a:pPr>
             <a:r>
-              <a:rPr b="0" lang="en-GB" sz="2400" spc="-1" strike="noStrike">
+              <a:rPr lang="en-GB" sz="2400" b="0" strike="noStrike" spc="-1">
                 <a:solidFill>
                   <a:srgbClr val="000000"/>
                 </a:solidFill>
@@ -7952,7 +9045,7 @@
               </a:rPr>
               <a:t>Can this idea be replicated to perform other kinds of tasks?</a:t>
             </a:r>
-            <a:endParaRPr b="0" lang="en-GB" sz="2400" spc="-1" strike="noStrike">
+            <a:endParaRPr lang="en-GB" sz="2400" b="0" strike="noStrike" spc="-1">
               <a:latin typeface="Arial"/>
             </a:endParaRPr>
           </a:p>
@@ -7965,14 +9058,14 @@
                 <a:spcPts val="1199"/>
               </a:spcBef>
               <a:buClr>
-                <a:srgbClr val="00689a"/>
+                <a:srgbClr val="00689A"/>
               </a:buClr>
               <a:buSzPct val="80000"/>
               <a:buFont typeface="Verdana"/>
               <a:buChar char="›"/>
             </a:pPr>
             <a:r>
-              <a:rPr b="0" lang="en-GB" sz="2400" spc="-1" strike="noStrike">
+              <a:rPr lang="en-GB" sz="2400" b="0" strike="noStrike" spc="-1">
                 <a:solidFill>
                   <a:srgbClr val="000000"/>
                 </a:solidFill>
@@ -7981,7 +9074,7 @@
               </a:rPr>
               <a:t>A containerized deployment of an application?</a:t>
             </a:r>
-            <a:endParaRPr b="0" lang="en-GB" sz="2400" spc="-1" strike="noStrike">
+            <a:endParaRPr lang="en-GB" sz="2400" b="0" strike="noStrike" spc="-1">
               <a:latin typeface="Arial"/>
             </a:endParaRPr>
           </a:p>
@@ -7994,14 +9087,14 @@
                 <a:spcPts val="1199"/>
               </a:spcBef>
               <a:buClr>
-                <a:srgbClr val="00689a"/>
+                <a:srgbClr val="00689A"/>
               </a:buClr>
               <a:buSzPct val="80000"/>
               <a:buFont typeface="Verdana"/>
               <a:buChar char="›"/>
             </a:pPr>
             <a:r>
-              <a:rPr b="0" lang="en-GB" sz="2400" spc="-1" strike="noStrike">
+              <a:rPr lang="en-GB" sz="2400" b="0" strike="noStrike" spc="-1">
                 <a:solidFill>
                   <a:srgbClr val="000000"/>
                 </a:solidFill>
@@ -8010,7 +9103,7 @@
               </a:rPr>
               <a:t>When is the moment we “let go” and set the algorithm free?</a:t>
             </a:r>
-            <a:endParaRPr b="0" lang="en-GB" sz="2400" spc="-1" strike="noStrike">
+            <a:endParaRPr lang="en-GB" sz="2400" b="0" strike="noStrike" spc="-1">
               <a:latin typeface="Arial"/>
             </a:endParaRPr>
           </a:p>
@@ -8023,14 +9116,14 @@
                 <a:spcPts val="1199"/>
               </a:spcBef>
               <a:buClr>
-                <a:srgbClr val="00689a"/>
+                <a:srgbClr val="00689A"/>
               </a:buClr>
               <a:buSzPct val="80000"/>
               <a:buFont typeface="Verdana"/>
               <a:buChar char="›"/>
             </a:pPr>
             <a:r>
-              <a:rPr b="0" lang="en-GB" sz="2400" spc="-1" strike="noStrike">
+              <a:rPr lang="en-GB" sz="2400" b="0" strike="noStrike" spc="-1">
                 <a:solidFill>
                   <a:srgbClr val="000000"/>
                 </a:solidFill>
@@ -8039,7 +9132,7 @@
               </a:rPr>
               <a:t>Other points?</a:t>
             </a:r>
-            <a:endParaRPr b="0" lang="en-GB" sz="2400" spc="-1" strike="noStrike">
+            <a:endParaRPr lang="en-GB" sz="2400" b="0" strike="noStrike" spc="-1">
               <a:latin typeface="Arial"/>
             </a:endParaRPr>
           </a:p>
@@ -8065,15 +9158,22 @@
           </a:ln>
         </p:spPr>
         <p:style>
-          <a:lnRef idx="0"/>
-          <a:fillRef idx="0"/>
-          <a:effectRef idx="0"/>
+          <a:lnRef idx="0">
+            <a:scrgbClr r="0" g="0" b="0"/>
+          </a:lnRef>
+          <a:fillRef idx="0">
+            <a:scrgbClr r="0" g="0" b="0"/>
+          </a:fillRef>
+          <a:effectRef idx="0">
+            <a:scrgbClr r="0" g="0" b="0"/>
+          </a:effectRef>
           <a:fontRef idx="minor"/>
         </p:style>
         <p:txBody>
-          <a:bodyPr lIns="90000" rIns="90000" tIns="45000" bIns="45000" anchor="b">
+          <a:bodyPr lIns="90000" tIns="45000" rIns="90000" bIns="45000" anchor="b">
             <a:noAutofit/>
           </a:bodyPr>
+          <a:lstStyle/>
           <a:p>
             <a:pPr>
               <a:lnSpc>
@@ -8082,16 +9182,16 @@
               <a:buNone/>
             </a:pPr>
             <a:r>
-              <a:rPr b="0" lang="en-GB" sz="2000" spc="-1" strike="noStrike">
+              <a:rPr lang="en-GB" sz="2000" b="0" strike="noStrike" spc="-1">
                 <a:solidFill>
-                  <a:srgbClr val="00689a"/>
+                  <a:srgbClr val="00689A"/>
                 </a:solidFill>
                 <a:latin typeface="Verdana"/>
                 <a:ea typeface="DejaVu Sans"/>
               </a:rPr>
               <a:t>Discussion points</a:t>
             </a:r>
-            <a:endParaRPr b="0" lang="en-GB" sz="2000" spc="-1" strike="noStrike">
+            <a:endParaRPr lang="en-GB" sz="2000" b="0" strike="noStrike" spc="-1">
               <a:latin typeface="Arial"/>
             </a:endParaRPr>
           </a:p>
@@ -8117,15 +9217,22 @@
           </a:ln>
         </p:spPr>
         <p:style>
-          <a:lnRef idx="0"/>
-          <a:fillRef idx="0"/>
-          <a:effectRef idx="0"/>
+          <a:lnRef idx="0">
+            <a:scrgbClr r="0" g="0" b="0"/>
+          </a:lnRef>
+          <a:fillRef idx="0">
+            <a:scrgbClr r="0" g="0" b="0"/>
+          </a:fillRef>
+          <a:effectRef idx="0">
+            <a:scrgbClr r="0" g="0" b="0"/>
+          </a:effectRef>
           <a:fontRef idx="minor"/>
         </p:style>
         <p:txBody>
-          <a:bodyPr lIns="90000" rIns="0" tIns="45000" bIns="45000" anchor="b">
+          <a:bodyPr lIns="90000" tIns="45000" rIns="0" bIns="45000" anchor="b">
             <a:noAutofit/>
           </a:bodyPr>
+          <a:lstStyle/>
           <a:p>
             <a:pPr algn="r">
               <a:lnSpc>
@@ -8134,16 +9241,16 @@
               <a:buNone/>
             </a:pPr>
             <a:fld id="{5DCF4BE5-0428-4661-ABF3-7D767CBECC89}" type="slidenum">
-              <a:rPr b="0" lang="en-GB" sz="1050" spc="-1" strike="noStrike">
+              <a:rPr lang="en-GB" sz="1050" b="0" strike="noStrike" spc="-1">
                 <a:solidFill>
-                  <a:srgbClr val="a6a6a6"/>
+                  <a:srgbClr val="A6A6A6"/>
                 </a:solidFill>
                 <a:latin typeface="Verdana"/>
                 <a:ea typeface="DejaVu Sans"/>
               </a:rPr>
-              <a:t>&lt;number&gt;</a:t>
+              <a:t>9</a:t>
             </a:fld>
-            <a:endParaRPr b="0" lang="en-GB" sz="1050" spc="-1" strike="noStrike">
+            <a:endParaRPr lang="en-GB" sz="1050" b="0" strike="noStrike" spc="-1">
               <a:latin typeface="Arial"/>
             </a:endParaRPr>
           </a:p>
@@ -8151,14 +9258,9 @@
       </p:sp>
     </p:spTree>
   </p:cSld>
-  <mc:AlternateContent>
-    <mc:Choice Requires="p14">
-      <p:transition spd="slow" p14:dur="2000"/>
-    </mc:Choice>
-    <mc:Fallback>
-      <p:transition spd="slow"/>
-    </mc:Fallback>
-  </mc:AlternateContent>
+  <p:clrMapOvr>
+    <a:masterClrMapping/>
+  </p:clrMapOvr>
 </p:sld>
 </file>
 
@@ -8173,34 +9275,34 @@
         <a:sysClr val="window" lastClr="FFFFFF"/>
       </a:lt1>
       <a:dk2>
-        <a:srgbClr val="00689a"/>
+        <a:srgbClr val="00689A"/>
       </a:dk2>
       <a:lt2>
-        <a:srgbClr val="e4eff9"/>
+        <a:srgbClr val="E4EFF9"/>
       </a:lt2>
       <a:accent1>
-        <a:srgbClr val="f092cd"/>
+        <a:srgbClr val="F092CD"/>
       </a:accent1>
       <a:accent2>
-        <a:srgbClr val="f9e11e"/>
+        <a:srgbClr val="F9E11E"/>
       </a:accent2>
       <a:accent3>
-        <a:srgbClr val="ffb612"/>
+        <a:srgbClr val="FFB612"/>
       </a:accent3>
       <a:accent4>
-        <a:srgbClr val="017bc6"/>
+        <a:srgbClr val="017BC6"/>
       </a:accent4>
       <a:accent5>
-        <a:srgbClr val="75d1b5"/>
+        <a:srgbClr val="75D1B5"/>
       </a:accent5>
       <a:accent6>
-        <a:srgbClr val="e17000"/>
+        <a:srgbClr val="E17000"/>
       </a:accent6>
       <a:hlink>
-        <a:srgbClr val="00689a"/>
+        <a:srgbClr val="00689A"/>
       </a:hlink>
       <a:folHlink>
-        <a:srgbClr val="ccdff0"/>
+        <a:srgbClr val="CCDFF0"/>
       </a:folHlink>
     </a:clrScheme>
     <a:fontScheme name="Office">
@@ -8385,6 +9487,8 @@
       </a:bgFillStyleLst>
     </a:fmtScheme>
   </a:themeElements>
+  <a:objectDefaults/>
+  <a:extraClrSchemeLst/>
 </a:theme>
 </file>
 
@@ -8399,34 +9503,34 @@
         <a:sysClr val="window" lastClr="FFFFFF"/>
       </a:lt1>
       <a:dk2>
-        <a:srgbClr val="00689a"/>
+        <a:srgbClr val="00689A"/>
       </a:dk2>
       <a:lt2>
-        <a:srgbClr val="e4eff9"/>
+        <a:srgbClr val="E4EFF9"/>
       </a:lt2>
       <a:accent1>
-        <a:srgbClr val="f092cd"/>
+        <a:srgbClr val="F092CD"/>
       </a:accent1>
       <a:accent2>
-        <a:srgbClr val="f9e11e"/>
+        <a:srgbClr val="F9E11E"/>
       </a:accent2>
       <a:accent3>
-        <a:srgbClr val="ffb612"/>
+        <a:srgbClr val="FFB612"/>
       </a:accent3>
       <a:accent4>
-        <a:srgbClr val="017bc6"/>
+        <a:srgbClr val="017BC6"/>
       </a:accent4>
       <a:accent5>
-        <a:srgbClr val="75d1b5"/>
+        <a:srgbClr val="75D1B5"/>
       </a:accent5>
       <a:accent6>
-        <a:srgbClr val="e17000"/>
+        <a:srgbClr val="E17000"/>
       </a:accent6>
       <a:hlink>
-        <a:srgbClr val="00689a"/>
+        <a:srgbClr val="00689A"/>
       </a:hlink>
       <a:folHlink>
-        <a:srgbClr val="ccdff0"/>
+        <a:srgbClr val="CCDFF0"/>
       </a:folHlink>
     </a:clrScheme>
     <a:fontScheme name="Office">
@@ -8611,6 +9715,8 @@
       </a:bgFillStyleLst>
     </a:fmtScheme>
   </a:themeElements>
+  <a:objectDefaults/>
+  <a:extraClrSchemeLst/>
 </a:theme>
 </file>
 
@@ -8625,34 +9731,34 @@
         <a:sysClr val="window" lastClr="FFFFFF"/>
       </a:lt1>
       <a:dk2>
-        <a:srgbClr val="00689a"/>
+        <a:srgbClr val="00689A"/>
       </a:dk2>
       <a:lt2>
-        <a:srgbClr val="e4eff9"/>
+        <a:srgbClr val="E4EFF9"/>
       </a:lt2>
       <a:accent1>
-        <a:srgbClr val="f092cd"/>
+        <a:srgbClr val="F092CD"/>
       </a:accent1>
       <a:accent2>
-        <a:srgbClr val="f9e11e"/>
+        <a:srgbClr val="F9E11E"/>
       </a:accent2>
       <a:accent3>
-        <a:srgbClr val="ffb612"/>
+        <a:srgbClr val="FFB612"/>
       </a:accent3>
       <a:accent4>
-        <a:srgbClr val="017bc6"/>
+        <a:srgbClr val="017BC6"/>
       </a:accent4>
       <a:accent5>
-        <a:srgbClr val="75d1b5"/>
+        <a:srgbClr val="75D1B5"/>
       </a:accent5>
       <a:accent6>
-        <a:srgbClr val="e17000"/>
+        <a:srgbClr val="E17000"/>
       </a:accent6>
       <a:hlink>
-        <a:srgbClr val="00689a"/>
+        <a:srgbClr val="00689A"/>
       </a:hlink>
       <a:folHlink>
-        <a:srgbClr val="ccdff0"/>
+        <a:srgbClr val="CCDFF0"/>
       </a:folHlink>
     </a:clrScheme>
     <a:fontScheme name="Office">
@@ -8837,5 +9943,7 @@
       </a:bgFillStyleLst>
     </a:fmtScheme>
   </a:themeElements>
+  <a:objectDefaults/>
+  <a:extraClrSchemeLst/>
 </a:theme>
 </file>